--- a/presentacion/storymaker-deck.pptx
+++ b/presentacion/storymaker-deck.pptx
@@ -27,9 +27,10 @@
     <p:sldId id="275" r:id="rId21"/>
     <p:sldId id="276" r:id="rId22"/>
     <p:sldId id="277" r:id="rId23"/>
+    <p:sldId id="278" r:id="rId24"/>
   </p:sldIdLst>
   <p:notesMasterIdLst>
-    <p:notesMasterId r:id="rId24"/>
+    <p:notesMasterId r:id="rId25"/>
   </p:notesMasterIdLst>
   <p:sldSz cx="12192000" cy="6858000"/>
   <p:notesSz cx="6858000" cy="12192000"/>
@@ -787,7 +788,7 @@
           <a:p>
             <a:r>
               <a:rPr lang="en-US" dirty="0"/>
-              <a:t>Tokens: medido en Langfuse sobre la novela de ejemplo, capítulos 4 a 10: 3,45 USD en 79 llamadas, reintentos incluidos. Unos 0,49 USD por capítulo, 4,9 USD por novela, unos 4,50 €. La estimación previa (1,5 USD) se quedaba corta a un tercio: el Continuista solo ya es el 43 % del coste. Infraestructura: una VM pequeña, unos 40 € al mes, entre unas 200 novelas. Pago y soporte: comisión de pasarela más atención. Horas: estimadas desde los planes y el historial del proyecto.</a:t>
+              <a:t>Mercado de referencia: México. Cada partida y su fuente. TOKENS (medido): Langfuse, sesión de la novela de ejemplo, capítulos 4 a 10: 3,45 USD en 79 llamadas con reintentos incluidos; 0,49 USD por capítulo, 4,90 por novela. La estimación previa, 1,5 USD, se quedaba en un tercio: el Continuista solo es el 43 %. PASARELA: Stripe México cobra 3,6 % + 3 MXN por transacción nacional y aplica IVA del 16 % a su comisión; sobre 49 USD son 1,76 + 0,17 = 1,93, y con IVA 2,24 USD. Con conversión de moneda se añade un 2 %. SOPORTE: el soporte tercerizado en México cobra por resolución entre 1 y 7 USD, unos 4 de media, y 12–20 USD la hora de agente; suponemos 1 ticket por cada 4 novelas, porque la entrevista resuelve casi todo y la corrección la pide el lector desde la app. OBSERVABILIDAD: el plan Core de Langfuse (29 USD/mes, en el fijo) incluye 100.000 unidades; una novela son unas 300, y el exceso cuesta 8 USD cada 100.000. PRECIO: 49 USD, unos 865 MXN; supuesto comercial a validar con el cliente. DESARROLLO: 45 USD/h es el percentil 75 de un desarrollador senior en México (mediana 38 USD/h); el rango nearshore senior va de 28 a 50 USD/h. Fuentes: stripe.com/mx/pricing y wise.com (Stripe México), support.stripe.com (IVA sobre comisiones), langfuse.com/pricing, rethinkcx.com y crescendo.ai (soporte en México), lemon.io y 4mlabs.io (tarifas en México), DOF (tipo de cambio).</a:t>
             </a:r>
             <a:endParaRPr lang="en-US" dirty="0"/>
           </a:p>
@@ -875,7 +876,7 @@
           <a:p>
             <a:r>
               <a:rPr lang="en-US" dirty="0"/>
-              <a:t>Fijo: infraestructura base 150 € y mantenimiento 1.500 € al mes; a 2.000 novelas se duplica el mantenimiento. Variable con el coste real de Langfuse: 4,50 € de tokens, 0,20 € de infraestructura y 2,50 € de pasarela y soporte.</a:t>
+              <a:t>Cómo sale cada columna. INGRESOS: novelas al mes por 49 USD (unos 865 MXN). VARIABLE: novelas por 8,17 USD, el coste unitario de la slide anterior; crece con cada novela. FIJO, lo que se paga al mes aunque no se venda ninguna: servidor de 2 vCPU y 4 GB, 24 USD en DigitalOcean más unos 5 de copias de seguridad (29); Langfuse Core, 29 USD con 100.000 unidades incluidas; dominio, correo transaccional y utilidades, unos 20; y mantenimiento, 20 horas al mes a 45 USD, la tarifa senior en México, para errores, dependencias y ajuste de prompts (900). A 2.000 novelas: aplicación y Postgres gestionado, unos 150 USD, porque SQLite ya no aguanta varias novelas en paralelo, y 40 horas de mantenimiento: unos 2.000. MARGEN: ingresos menos variable y fijo. SENSIBILIDAD: si los tokens suben un 50 %, son 2,45 USD más por novela. Una revisión solo reescribe los capítulos que usan el hecho corregido. Fuentes: digitalocean.com/pricing/droplets, langfuse.com/pricing, lemon.io (tarifas en México).</a:t>
             </a:r>
             <a:endParaRPr lang="en-US" dirty="0"/>
           </a:p>
@@ -963,7 +964,7 @@
           <a:p>
             <a:r>
               <a:rPr lang="en-US" dirty="0"/>
-              <a:t>La demo es evidencia obligatoria: un cambio del lector propagado solo a los capítulos que usan el hecho, conservando la versión anterior.</a:t>
+              <a:t>Cada riesgo salió de la corrida real, no de una lista genérica. Cuota: el límite de la cuenta detuvo la novela y el checkpoint por capítulo permitió seguir desde el 4. SQLite: con cinco novelas en paralelo, «database is locked»; hoy se corre una por vez. Juez: todo en Haiku por coste, así que las notas del Crítico salen más altas de lo que el texto merece; MODELO_JUEZ está separado para cambiarlo en una línea. Datos: nombres y recuerdos del destinatario pasan por el proveedor; la cuenta corporativa los anonimizaba (hallazgo real). Extractor: entidades duplicadas, objetos como nombres y una salida de escena registrada como partida definitiva (P-38). Coste: 4,9 USD medidos frente a 1,5 estimados.</a:t>
             </a:r>
             <a:endParaRPr lang="en-US" dirty="0"/>
           </a:p>
@@ -1051,7 +1052,7 @@
           <a:p>
             <a:r>
               <a:rPr lang="en-US" dirty="0"/>
-              <a:t>Contraportada con los datos de contacto de la empresa presentadora.</a:t>
+              <a:t>La demo es evidencia obligatoria: un cambio del lector propagado solo a los capítulos que usan el hecho, conservando la versión anterior. Hoja de ruta: que un fallo de Lean vuelva al Escritor como defecto con cita en vez de parar la publicación; validadores de estilo baratos y deterministas; exponer la novela como herramientas MCP (download_novel); dar en la app la decisión humana sobre un capítulo escalado (P-36); y pedir la dedicatoria en el formulario de la entrevista, que hoy no la recoge.</a:t>
             </a:r>
             <a:endParaRPr lang="en-US" dirty="0"/>
           </a:p>
@@ -1139,7 +1140,7 @@
           <a:p>
             <a:r>
               <a:rPr lang="en-US" dirty="0"/>
-              <a:t>Anexos para preguntas; no entran en los 10 minutos.</a:t>
+              <a:t>Contraportada con los datos de contacto de la empresa presentadora.</a:t>
             </a:r>
             <a:endParaRPr lang="en-US" dirty="0"/>
           </a:p>
@@ -1227,7 +1228,7 @@
           <a:p>
             <a:r>
               <a:rPr lang="en-US" dirty="0"/>
-              <a:t>El cliente de modelo se inyecta; en pruebas se usa un doble con respuestas fijas.</a:t>
+              <a:t>Anexos para preguntas; no entran en los 10 minutos.</a:t>
             </a:r>
             <a:endParaRPr lang="en-US" dirty="0"/>
           </a:p>
@@ -1315,7 +1316,7 @@
           <a:p>
             <a:r>
               <a:rPr lang="en-US" dirty="0"/>
-              <a:t>Los diez estados de maquina.py: del pendiente al publicado, con reparación, escalado y regeneración.</a:t>
+              <a:t>El cliente de modelo se inyecta; en pruebas se usa un doble con respuestas fijas.</a:t>
             </a:r>
             <a:endParaRPr lang="en-US" dirty="0"/>
           </a:p>
@@ -1403,7 +1404,7 @@
           <a:p>
             <a:r>
               <a:rPr lang="en-US" dirty="0"/>
-              <a:t>El intento de 141 palabras era metacomentario, no prosa: la v1 le pedía conservar un texto que no llegaba al mínimo.</a:t>
+              <a:t>Los diez estados de maquina.py: del pendiente al publicado, con reparación, escalado y regeneración.</a:t>
             </a:r>
             <a:endParaRPr lang="en-US" dirty="0"/>
           </a:p>
@@ -1491,7 +1492,7 @@
           <a:p>
             <a:r>
               <a:rPr lang="en-US" dirty="0"/>
-              <a:t>Dos dimensiones igual de importantes: personalización y calidad narrativa. Una no rescata a la otra.</a:t>
+              <a:t>Quien regala —a un hijo, a la pareja, en una boda o una jubilación— necesita dos cosas a la vez: que el destinatario se reconozca y que la novela se lea de principio a fin. La matriz cruza las dos. Arriba a la izquierda, la plantilla con el nombre cambiado: se lee bien porque el texto es fijo, pero podría ser de cualquiera. Abajo a la derecha, un chat con IA: mete los datos, pero sin memoria olvida lo que dijo en el capítulo tres y se contradice en el siete, y nadie lo revisa. Arriba a la derecha está el escritor a medida, que lo consigue, pero es caro y tarda semanas. StoryMaker ocupa ese cuadrante al precio y la velocidad de una plantilla: 49 USD, unas horas (unos 8 minutos por capítulo medidos), y una corrección solo rehace los capítulos afectados. Las posiciones son cualitativas: ilustran el argumento, no una medición.</a:t>
             </a:r>
             <a:endParaRPr lang="en-US" dirty="0"/>
           </a:p>
@@ -1579,7 +1580,7 @@
           <a:p>
             <a:r>
               <a:rPr lang="en-US" dirty="0"/>
-              <a:t>El vector es léxico y local, no semántico: sin proveedor de embeddings. Es una decisión de producto declarada.</a:t>
+              <a:t>El intento de 141 palabras era metacomentario, no prosa: la v1 le pedía conservar un texto que no llegaba al mínimo.</a:t>
             </a:r>
             <a:endParaRPr lang="en-US" dirty="0"/>
           </a:p>
@@ -1667,7 +1668,7 @@
           <a:p>
             <a:r>
               <a:rPr lang="en-US" dirty="0"/>
-              <a:t>Todos salieron de la corrida real y cada arreglo tiene su test. Las dos correcciones de datos (el trabajo escalado del capítulo 10 y el evento 60) fueron decisión humana y constan en el registro de auditoría. Registro completo en docs/proceso/.</a:t>
+              <a:t>El vector es léxico y local, no semántico: sin proveedor de embeddings. Es una decisión de producto declarada.</a:t>
             </a:r>
             <a:endParaRPr lang="en-US" dirty="0"/>
           </a:p>
@@ -1755,7 +1756,7 @@
           <a:p>
             <a:r>
               <a:rPr lang="en-US" dirty="0"/>
-              <a:t>Sin clave de API: acceso por consumo de cuenta; el coste se deriva de los tokens y de la tarifa declarada.</a:t>
+              <a:t>Todos salieron de la corrida real y cada arreglo tiene su test. Las dos correcciones de datos (el trabajo escalado del capítulo 10 y el evento 60) fueron decisión humana y constan en el registro de auditoría. Registro completo en docs/proceso/.</a:t>
             </a:r>
             <a:endParaRPr lang="en-US" dirty="0"/>
           </a:p>
@@ -1779,6 +1780,94 @@
             <a:fld id="{F7021451-1387-4CA6-816F-3879F97B5CBC}" type="slidenum">
               <a:rPr lang="en-US"/>
               <a:t>22</a:t>
+            </a:fld>
+            <a:endParaRPr lang="en-US"/>
+          </a:p>
+        </p:txBody>
+      </p:sp>
+    </p:spTree>
+    <p:extLst>
+      <p:ext uri="{BB962C8B-B14F-4D97-AF65-F5344CB8AC3E}">
+        <p14:creationId xmlns:p14="http://schemas.microsoft.com/office/powerpoint/2010/main" val="1024086991"/>
+      </p:ext>
+    </p:extLst>
+  </p:cSld>
+  <p:clrMapOvr>
+    <a:masterClrMapping/>
+  </p:clrMapOvr>
+</p:notes>
+</file>
+
+<file path=ppt/notesSlides/notesSlide23.xml><?xml version="1.0" encoding="utf-8"?>
+<p:notes xmlns:a="http://schemas.openxmlformats.org/drawingml/2006/main" xmlns:r="http://schemas.openxmlformats.org/officeDocument/2006/relationships" xmlns:p="http://schemas.openxmlformats.org/presentationml/2006/main">
+  <p:cSld>
+    <p:spTree>
+      <p:nvGrpSpPr>
+        <p:cNvPr id="1" name=""/>
+        <p:cNvGrpSpPr/>
+        <p:nvPr/>
+      </p:nvGrpSpPr>
+      <p:grpSpPr>
+        <a:xfrm>
+          <a:off x="0" y="0"/>
+          <a:ext cx="0" cy="0"/>
+          <a:chOff x="0" y="0"/>
+          <a:chExt cx="0" cy="0"/>
+        </a:xfrm>
+      </p:grpSpPr>
+      <p:sp>
+        <p:nvSpPr>
+          <p:cNvPr id="2" name="Slide Image Placeholder 1"/>
+          <p:cNvSpPr>
+            <a:spLocks noGrp="1" noRot="1" noChangeAspect="1"/>
+          </p:cNvSpPr>
+          <p:nvPr>
+            <p:ph type="sldImg"/>
+          </p:nvPr>
+        </p:nvSpPr>
+        <p:spPr/>
+      </p:sp>
+      <p:sp>
+        <p:nvSpPr>
+          <p:cNvPr id="3" name="Notes Placeholder 2"/>
+          <p:cNvSpPr>
+            <a:spLocks noGrp="1"/>
+          </p:cNvSpPr>
+          <p:nvPr>
+            <p:ph type="body" idx="1"/>
+          </p:nvPr>
+        </p:nvSpPr>
+        <p:spPr/>
+        <p:txBody>
+          <a:bodyPr/>
+          <a:lstStyle/>
+          <a:p>
+            <a:r>
+              <a:rPr lang="en-US" dirty="0"/>
+              <a:t>Sin clave de API: acceso por consumo de cuenta; el coste se deriva de los tokens y de la tarifa declarada.</a:t>
+            </a:r>
+            <a:endParaRPr lang="en-US" dirty="0"/>
+          </a:p>
+        </p:txBody>
+      </p:sp>
+      <p:sp>
+        <p:nvSpPr>
+          <p:cNvPr id="4" name="Slide Number Placeholder 3"/>
+          <p:cNvSpPr>
+            <a:spLocks noGrp="1"/>
+          </p:cNvSpPr>
+          <p:nvPr>
+            <p:ph type="sldNum" sz="quarter" idx="10"/>
+          </p:nvPr>
+        </p:nvSpPr>
+        <p:spPr/>
+        <p:txBody>
+          <a:bodyPr/>
+          <a:lstStyle/>
+          <a:p>
+            <a:fld id="{F7021451-1387-4CA6-816F-3879F97B5CBC}" type="slidenum">
+              <a:rPr lang="en-US"/>
+              <a:t>23</a:t>
             </a:fld>
             <a:endParaRPr lang="en-US"/>
           </a:p>
@@ -3098,7 +3187,7 @@
         <p:spPr>
           <a:xfrm>
             <a:off x="5873750" y="5143500"/>
-            <a:ext cx="1638300" cy="452041"/>
+            <a:ext cx="1638300" cy="665361"/>
           </a:xfrm>
           <a:prstGeom prst="rect">
             <a:avLst/>
@@ -3127,7 +3216,7 @@
                 <a:ea typeface="Arial" pitchFamily="34" charset="-122"/>
                 <a:cs typeface="Arial" pitchFamily="34" charset="-120"/>
               </a:rPr>
-              <a:t>Regalos con Historia S.L.</a:t>
+              <a:t>Regalos con Historia S.A. de C.V.</a:t>
             </a:r>
             <a:endParaRPr lang="en-US" sz="1400" dirty="0"/>
           </a:p>
@@ -4545,18 +4634,19 @@
           </p:nvPr>
         </p:nvGraphicFramePr>
         <p:xfrm>
-          <a:off x="984250" y="1529029"/>
-          <a:ext cx="4984750" cy="2328532"/>
+          <a:off x="984250" y="1503629"/>
+          <a:ext cx="10236200" cy="2539471"/>
         </p:xfrm>
         <a:graphic>
           <a:graphicData uri="http://schemas.openxmlformats.org/drawingml/2006/table">
             <a:tbl>
               <a:tblPr/>
               <a:tblGrid>
-                <a:gridCol w="3090545"/>
-                <a:gridCol w="1894205"/>
+                <a:gridCol w="2763774"/>
+                <a:gridCol w="5936996"/>
+                <a:gridCol w="1535430"/>
               </a:tblGrid>
-              <a:tr h="332647">
+              <a:tr h="317434">
                 <a:tc>
                   <a:txBody>
                     <a:bodyPr/>
@@ -4633,6 +4723,77 @@
                     <a:bodyPr/>
                     <a:lstStyle/>
                     <a:p>
+                      <a:pPr indent="0" marL="0">
+                        <a:lnSpc>
+                          <a:spcPts val="1680"/>
+                        </a:lnSpc>
+                        <a:buNone/>
+                      </a:pPr>
+                      <a:r>
+                        <a:rPr lang="en-US" sz="1200" b="1" dirty="0">
+                          <a:solidFill>
+                            <a:srgbClr val="FFFFFF"/>
+                          </a:solidFill>
+                          <a:latin typeface="Arial" pitchFamily="34" charset="0"/>
+                          <a:ea typeface="Arial" pitchFamily="34" charset="-122"/>
+                          <a:cs typeface="Arial" pitchFamily="34" charset="-120"/>
+                        </a:rPr>
+                        <a:t>Cómo se calcula</a:t>
+                      </a:r>
+                      <a:endParaRPr lang="en-US" sz="1200" dirty="0">
+                        <a:latin typeface="Arial" charset="0"/>
+                        <a:ea typeface="Arial" charset="0"/>
+                        <a:cs typeface="Arial" charset="0"/>
+                      </a:endParaRPr>
+                    </a:p>
+                  </a:txBody>
+                  <a:tcPr marL="53340" marR="53340" marT="53340" marB="53340" anchor="t">
+                    <a:lnL w="12700" cap="flat" cmpd="sng" algn="ctr">
+                      <a:solidFill>
+                        <a:srgbClr val="1C2834"/>
+                      </a:solidFill>
+                      <a:prstDash val="solid"/>
+                      <a:round/>
+                      <a:headEnd type="none" w="med" len="med"/>
+                      <a:tailEnd type="none" w="med" len="med"/>
+                    </a:lnL>
+                    <a:lnR w="12700" cap="flat" cmpd="sng" algn="ctr">
+                      <a:solidFill>
+                        <a:srgbClr val="1C2834"/>
+                      </a:solidFill>
+                      <a:prstDash val="solid"/>
+                      <a:round/>
+                      <a:headEnd type="none" w="med" len="med"/>
+                      <a:tailEnd type="none" w="med" len="med"/>
+                    </a:lnR>
+                    <a:lnT w="12700" cap="flat" cmpd="sng" algn="ctr">
+                      <a:solidFill>
+                        <a:srgbClr val="CBCBCB"/>
+                      </a:solidFill>
+                      <a:prstDash val="solid"/>
+                      <a:round/>
+                      <a:headEnd type="none" w="med" len="med"/>
+                      <a:tailEnd type="none" w="med" len="med"/>
+                    </a:lnT>
+                    <a:lnB w="12700" cap="flat" cmpd="sng" algn="ctr">
+                      <a:solidFill>
+                        <a:srgbClr val="1C2834"/>
+                      </a:solidFill>
+                      <a:prstDash val="solid"/>
+                      <a:round/>
+                      <a:headEnd type="none" w="med" len="med"/>
+                      <a:tailEnd type="none" w="med" len="med"/>
+                    </a:lnB>
+                    <a:solidFill>
+                      <a:srgbClr val="1E2D3D"/>
+                    </a:solidFill>
+                  </a:tcPr>
+                </a:tc>
+                <a:tc>
+                  <a:txBody>
+                    <a:bodyPr/>
+                    <a:lstStyle/>
+                    <a:p>
                       <a:pPr algn="r" indent="0" marL="0">
                         <a:lnSpc>
                           <a:spcPts val="1680"/>
@@ -4648,7 +4809,7 @@
                           <a:ea typeface="Arial" pitchFamily="34" charset="-122"/>
                           <a:cs typeface="Arial" pitchFamily="34" charset="-120"/>
                         </a:rPr>
-                        <a:t>€</a:t>
+                        <a:t>USD</a:t>
                       </a:r>
                       <a:endParaRPr lang="en-US" sz="1200" dirty="0">
                         <a:latin typeface="Arial" charset="0"/>
@@ -4700,7 +4861,7 @@
                   </a:tcPr>
                 </a:tc>
               </a:tr>
-              <a:tr h="332647">
+              <a:tr h="317434">
                 <a:tc>
                   <a:txBody>
                     <a:bodyPr/>
@@ -4721,7 +4882,75 @@
                           <a:ea typeface="Arial" pitchFamily="34" charset="-122"/>
                           <a:cs typeface="Arial" pitchFamily="34" charset="-120"/>
                         </a:rPr>
-                        <a:t>Tokens, medido en Langfuse</a:t>
+                        <a:t>Tokens del modelo</a:t>
+                      </a:r>
+                      <a:endParaRPr lang="en-US" sz="1200" dirty="0">
+                        <a:latin typeface="Arial" charset="0"/>
+                        <a:ea typeface="Arial" charset="0"/>
+                        <a:cs typeface="Arial" charset="0"/>
+                      </a:endParaRPr>
+                    </a:p>
+                  </a:txBody>
+                  <a:tcPr marL="53340" marR="53340" marT="53340" marB="53340" anchor="t">
+                    <a:lnL w="12700" cap="flat" cmpd="sng" algn="ctr">
+                      <a:solidFill>
+                        <a:srgbClr val="CBCBCB"/>
+                      </a:solidFill>
+                      <a:prstDash val="solid"/>
+                      <a:round/>
+                      <a:headEnd type="none" w="med" len="med"/>
+                      <a:tailEnd type="none" w="med" len="med"/>
+                    </a:lnL>
+                    <a:lnR w="12700" cap="flat" cmpd="sng" algn="ctr">
+                      <a:solidFill>
+                        <a:srgbClr val="CBCBCB"/>
+                      </a:solidFill>
+                      <a:prstDash val="solid"/>
+                      <a:round/>
+                      <a:headEnd type="none" w="med" len="med"/>
+                      <a:tailEnd type="none" w="med" len="med"/>
+                    </a:lnR>
+                    <a:lnT w="12700" cap="flat" cmpd="sng" algn="ctr">
+                      <a:solidFill>
+                        <a:srgbClr val="1C2834"/>
+                      </a:solidFill>
+                      <a:prstDash val="solid"/>
+                      <a:round/>
+                      <a:headEnd type="none" w="med" len="med"/>
+                      <a:tailEnd type="none" w="med" len="med"/>
+                    </a:lnT>
+                    <a:lnB w="12700" cap="flat" cmpd="sng" algn="ctr">
+                      <a:solidFill>
+                        <a:srgbClr val="CBCBCB"/>
+                      </a:solidFill>
+                      <a:prstDash val="solid"/>
+                      <a:round/>
+                      <a:headEnd type="none" w="med" len="med"/>
+                      <a:tailEnd type="none" w="med" len="med"/>
+                    </a:lnB>
+                  </a:tcPr>
+                </a:tc>
+                <a:tc>
+                  <a:txBody>
+                    <a:bodyPr/>
+                    <a:lstStyle/>
+                    <a:p>
+                      <a:pPr indent="0" marL="0">
+                        <a:lnSpc>
+                          <a:spcPts val="1680"/>
+                        </a:lnSpc>
+                        <a:buNone/>
+                      </a:pPr>
+                      <a:r>
+                        <a:rPr lang="en-US" sz="1200" dirty="0">
+                          <a:solidFill>
+                            <a:srgbClr val="233441"/>
+                          </a:solidFill>
+                          <a:latin typeface="Arial" pitchFamily="34" charset="0"/>
+                          <a:ea typeface="Arial" pitchFamily="34" charset="-122"/>
+                          <a:cs typeface="Arial" pitchFamily="34" charset="-120"/>
+                        </a:rPr>
+                        <a:t>Medido en Langfuse: 0,49 USD por capítulo × 10, reintentos incluidos</a:t>
                       </a:r>
                       <a:endParaRPr lang="en-US" sz="1200" dirty="0">
                         <a:latin typeface="Arial" charset="0"/>
@@ -4789,7 +5018,7 @@
                           <a:ea typeface="Arial" pitchFamily="34" charset="-122"/>
                           <a:cs typeface="Arial" pitchFamily="34" charset="-120"/>
                         </a:rPr>
-                        <a:t>4,50</a:t>
+                        <a:t>4,90</a:t>
                       </a:r>
                       <a:endParaRPr lang="en-US" sz="1200" dirty="0">
                         <a:latin typeface="Arial" charset="0"/>
@@ -4838,7 +5067,7 @@
                   </a:tcPr>
                 </a:tc>
               </a:tr>
-              <a:tr h="332647">
+              <a:tr h="317434">
                 <a:tc>
                   <a:txBody>
                     <a:bodyPr/>
@@ -4859,7 +5088,7 @@
                           <a:ea typeface="Arial" pitchFamily="34" charset="-122"/>
                           <a:cs typeface="Arial" pitchFamily="34" charset="-120"/>
                         </a:rPr>
-                        <a:t>Infraestructura por novela</a:t>
+                        <a:t>Pasarela de pago</a:t>
                       </a:r>
                       <a:endParaRPr lang="en-US" sz="1200" dirty="0">
                         <a:latin typeface="Arial" charset="0"/>
@@ -4872,6 +5101,77 @@
                     <a:lnL w="12700" cap="flat" cmpd="sng" algn="ctr">
                       <a:solidFill>
                         <a:srgbClr val="CBCBCB"/>
+                      </a:solidFill>
+                      <a:prstDash val="solid"/>
+                      <a:round/>
+                      <a:headEnd type="none" w="med" len="med"/>
+                      <a:tailEnd type="none" w="med" len="med"/>
+                    </a:lnL>
+                    <a:lnR w="12700" cap="flat" cmpd="sng" algn="ctr">
+                      <a:solidFill>
+                        <a:srgbClr val="C8C8C7"/>
+                      </a:solidFill>
+                      <a:prstDash val="solid"/>
+                      <a:round/>
+                      <a:headEnd type="none" w="med" len="med"/>
+                      <a:tailEnd type="none" w="med" len="med"/>
+                    </a:lnR>
+                    <a:lnT w="12700" cap="flat" cmpd="sng" algn="ctr">
+                      <a:solidFill>
+                        <a:srgbClr val="CBCBCB"/>
+                      </a:solidFill>
+                      <a:prstDash val="solid"/>
+                      <a:round/>
+                      <a:headEnd type="none" w="med" len="med"/>
+                      <a:tailEnd type="none" w="med" len="med"/>
+                    </a:lnT>
+                    <a:lnB w="12700" cap="flat" cmpd="sng" algn="ctr">
+                      <a:solidFill>
+                        <a:srgbClr val="C8C8C7"/>
+                      </a:solidFill>
+                      <a:prstDash val="solid"/>
+                      <a:round/>
+                      <a:headEnd type="none" w="med" len="med"/>
+                      <a:tailEnd type="none" w="med" len="med"/>
+                    </a:lnB>
+                    <a:solidFill>
+                      <a:srgbClr val="FBFBFA"/>
+                    </a:solidFill>
+                  </a:tcPr>
+                </a:tc>
+                <a:tc>
+                  <a:txBody>
+                    <a:bodyPr/>
+                    <a:lstStyle/>
+                    <a:p>
+                      <a:pPr indent="0" marL="0">
+                        <a:lnSpc>
+                          <a:spcPts val="1680"/>
+                        </a:lnSpc>
+                        <a:buNone/>
+                      </a:pPr>
+                      <a:r>
+                        <a:rPr lang="en-US" sz="1200" dirty="0">
+                          <a:solidFill>
+                            <a:srgbClr val="233441"/>
+                          </a:solidFill>
+                          <a:latin typeface="Arial" pitchFamily="34" charset="0"/>
+                          <a:ea typeface="Arial" pitchFamily="34" charset="-122"/>
+                          <a:cs typeface="Arial" pitchFamily="34" charset="-120"/>
+                        </a:rPr>
+                        <a:t>Stripe México: 3,6 % + 3 MXN por cobro, más IVA del 16 % sobre la comisión</a:t>
+                      </a:r>
+                      <a:endParaRPr lang="en-US" sz="1200" dirty="0">
+                        <a:latin typeface="Arial" charset="0"/>
+                        <a:ea typeface="Arial" charset="0"/>
+                        <a:cs typeface="Arial" charset="0"/>
+                      </a:endParaRPr>
+                    </a:p>
+                  </a:txBody>
+                  <a:tcPr marL="53340" marR="53340" marT="53340" marB="53340" anchor="t">
+                    <a:lnL w="12700" cap="flat" cmpd="sng" algn="ctr">
+                      <a:solidFill>
+                        <a:srgbClr val="C8C8C7"/>
                       </a:solidFill>
                       <a:prstDash val="solid"/>
                       <a:round/>
@@ -4930,7 +5230,7 @@
                           <a:ea typeface="Arial" pitchFamily="34" charset="-122"/>
                           <a:cs typeface="Arial" pitchFamily="34" charset="-120"/>
                         </a:rPr>
-                        <a:t>0,20</a:t>
+                        <a:t>2,24</a:t>
                       </a:r>
                       <a:endParaRPr lang="en-US" sz="1200" dirty="0">
                         <a:latin typeface="Arial" charset="0"/>
@@ -4982,7 +5282,7 @@
                   </a:tcPr>
                 </a:tc>
               </a:tr>
-              <a:tr h="332647">
+              <a:tr h="317434">
                 <a:tc>
                   <a:txBody>
                     <a:bodyPr/>
@@ -5003,7 +5303,75 @@
                           <a:ea typeface="Arial" pitchFamily="34" charset="-122"/>
                           <a:cs typeface="Arial" pitchFamily="34" charset="-120"/>
                         </a:rPr>
-                        <a:t>Pasarela de pago y soporte</a:t>
+                        <a:t>Soporte</a:t>
+                      </a:r>
+                      <a:endParaRPr lang="en-US" sz="1200" dirty="0">
+                        <a:latin typeface="Arial" charset="0"/>
+                        <a:ea typeface="Arial" charset="0"/>
+                        <a:cs typeface="Arial" charset="0"/>
+                      </a:endParaRPr>
+                    </a:p>
+                  </a:txBody>
+                  <a:tcPr marL="53340" marR="53340" marT="53340" marB="53340" anchor="t">
+                    <a:lnL w="12700" cap="flat" cmpd="sng" algn="ctr">
+                      <a:solidFill>
+                        <a:srgbClr val="CBCBCB"/>
+                      </a:solidFill>
+                      <a:prstDash val="solid"/>
+                      <a:round/>
+                      <a:headEnd type="none" w="med" len="med"/>
+                      <a:tailEnd type="none" w="med" len="med"/>
+                    </a:lnL>
+                    <a:lnR w="12700" cap="flat" cmpd="sng" algn="ctr">
+                      <a:solidFill>
+                        <a:srgbClr val="CBCBCB"/>
+                      </a:solidFill>
+                      <a:prstDash val="solid"/>
+                      <a:round/>
+                      <a:headEnd type="none" w="med" len="med"/>
+                      <a:tailEnd type="none" w="med" len="med"/>
+                    </a:lnR>
+                    <a:lnT w="12700" cap="flat" cmpd="sng" algn="ctr">
+                      <a:solidFill>
+                        <a:srgbClr val="C8C8C7"/>
+                      </a:solidFill>
+                      <a:prstDash val="solid"/>
+                      <a:round/>
+                      <a:headEnd type="none" w="med" len="med"/>
+                      <a:tailEnd type="none" w="med" len="med"/>
+                    </a:lnT>
+                    <a:lnB w="12700" cap="flat" cmpd="sng" algn="ctr">
+                      <a:solidFill>
+                        <a:srgbClr val="CBCBCB"/>
+                      </a:solidFill>
+                      <a:prstDash val="solid"/>
+                      <a:round/>
+                      <a:headEnd type="none" w="med" len="med"/>
+                      <a:tailEnd type="none" w="med" len="med"/>
+                    </a:lnB>
+                  </a:tcPr>
+                </a:tc>
+                <a:tc>
+                  <a:txBody>
+                    <a:bodyPr/>
+                    <a:lstStyle/>
+                    <a:p>
+                      <a:pPr indent="0" marL="0">
+                        <a:lnSpc>
+                          <a:spcPts val="1680"/>
+                        </a:lnSpc>
+                        <a:buNone/>
+                      </a:pPr>
+                      <a:r>
+                        <a:rPr lang="en-US" sz="1200" dirty="0">
+                          <a:solidFill>
+                            <a:srgbClr val="233441"/>
+                          </a:solidFill>
+                          <a:latin typeface="Arial" pitchFamily="34" charset="0"/>
+                          <a:ea typeface="Arial" pitchFamily="34" charset="-122"/>
+                          <a:cs typeface="Arial" pitchFamily="34" charset="-120"/>
+                        </a:rPr>
+                        <a:t>1 de cada 4 novelas abre un ticket; soporte tercerizado en México, ~4 USD</a:t>
                       </a:r>
                       <a:endParaRPr lang="en-US" sz="1200" dirty="0">
                         <a:latin typeface="Arial" charset="0"/>
@@ -5071,7 +5439,7 @@
                           <a:ea typeface="Arial" pitchFamily="34" charset="-122"/>
                           <a:cs typeface="Arial" pitchFamily="34" charset="-120"/>
                         </a:rPr>
-                        <a:t>2,50</a:t>
+                        <a:t>1,00</a:t>
                       </a:r>
                       <a:endParaRPr lang="en-US" sz="1200" dirty="0">
                         <a:latin typeface="Arial" charset="0"/>
@@ -5120,7 +5488,222 @@
                   </a:tcPr>
                 </a:tc>
               </a:tr>
-              <a:tr h="332647">
+              <a:tr h="317434">
+                <a:tc>
+                  <a:txBody>
+                    <a:bodyPr/>
+                    <a:lstStyle/>
+                    <a:p>
+                      <a:pPr indent="0" marL="0">
+                        <a:lnSpc>
+                          <a:spcPts val="1680"/>
+                        </a:lnSpc>
+                        <a:buNone/>
+                      </a:pPr>
+                      <a:r>
+                        <a:rPr lang="en-US" sz="1200" dirty="0">
+                          <a:solidFill>
+                            <a:srgbClr val="233441"/>
+                          </a:solidFill>
+                          <a:latin typeface="Arial" pitchFamily="34" charset="0"/>
+                          <a:ea typeface="Arial" pitchFamily="34" charset="-122"/>
+                          <a:cs typeface="Arial" pitchFamily="34" charset="-120"/>
+                        </a:rPr>
+                        <a:t>Observabilidad extra</a:t>
+                      </a:r>
+                      <a:endParaRPr lang="en-US" sz="1200" dirty="0">
+                        <a:latin typeface="Arial" charset="0"/>
+                        <a:ea typeface="Arial" charset="0"/>
+                        <a:cs typeface="Arial" charset="0"/>
+                      </a:endParaRPr>
+                    </a:p>
+                  </a:txBody>
+                  <a:tcPr marL="53340" marR="53340" marT="53340" marB="53340" anchor="t">
+                    <a:lnL w="12700" cap="flat" cmpd="sng" algn="ctr">
+                      <a:solidFill>
+                        <a:srgbClr val="CBCBCB"/>
+                      </a:solidFill>
+                      <a:prstDash val="solid"/>
+                      <a:round/>
+                      <a:headEnd type="none" w="med" len="med"/>
+                      <a:tailEnd type="none" w="med" len="med"/>
+                    </a:lnL>
+                    <a:lnR w="12700" cap="flat" cmpd="sng" algn="ctr">
+                      <a:solidFill>
+                        <a:srgbClr val="C8C8C7"/>
+                      </a:solidFill>
+                      <a:prstDash val="solid"/>
+                      <a:round/>
+                      <a:headEnd type="none" w="med" len="med"/>
+                      <a:tailEnd type="none" w="med" len="med"/>
+                    </a:lnR>
+                    <a:lnT w="12700" cap="flat" cmpd="sng" algn="ctr">
+                      <a:solidFill>
+                        <a:srgbClr val="CBCBCB"/>
+                      </a:solidFill>
+                      <a:prstDash val="solid"/>
+                      <a:round/>
+                      <a:headEnd type="none" w="med" len="med"/>
+                      <a:tailEnd type="none" w="med" len="med"/>
+                    </a:lnT>
+                    <a:lnB w="12700" cap="flat" cmpd="sng" algn="ctr">
+                      <a:solidFill>
+                        <a:srgbClr val="C8C8C7"/>
+                      </a:solidFill>
+                      <a:prstDash val="solid"/>
+                      <a:round/>
+                      <a:headEnd type="none" w="med" len="med"/>
+                      <a:tailEnd type="none" w="med" len="med"/>
+                    </a:lnB>
+                    <a:solidFill>
+                      <a:srgbClr val="FBFBFA"/>
+                    </a:solidFill>
+                  </a:tcPr>
+                </a:tc>
+                <a:tc>
+                  <a:txBody>
+                    <a:bodyPr/>
+                    <a:lstStyle/>
+                    <a:p>
+                      <a:pPr indent="0" marL="0">
+                        <a:lnSpc>
+                          <a:spcPts val="1680"/>
+                        </a:lnSpc>
+                        <a:buNone/>
+                      </a:pPr>
+                      <a:r>
+                        <a:rPr lang="en-US" sz="1200" dirty="0">
+                          <a:solidFill>
+                            <a:srgbClr val="233441"/>
+                          </a:solidFill>
+                          <a:latin typeface="Arial" pitchFamily="34" charset="0"/>
+                          <a:ea typeface="Arial" pitchFamily="34" charset="-122"/>
+                          <a:cs typeface="Arial" pitchFamily="34" charset="-120"/>
+                        </a:rPr>
+                        <a:t>~300 unidades de Langfuse por novela, a 8 USD cada 100.000</a:t>
+                      </a:r>
+                      <a:endParaRPr lang="en-US" sz="1200" dirty="0">
+                        <a:latin typeface="Arial" charset="0"/>
+                        <a:ea typeface="Arial" charset="0"/>
+                        <a:cs typeface="Arial" charset="0"/>
+                      </a:endParaRPr>
+                    </a:p>
+                  </a:txBody>
+                  <a:tcPr marL="53340" marR="53340" marT="53340" marB="53340" anchor="t">
+                    <a:lnL w="12700" cap="flat" cmpd="sng" algn="ctr">
+                      <a:solidFill>
+                        <a:srgbClr val="C8C8C7"/>
+                      </a:solidFill>
+                      <a:prstDash val="solid"/>
+                      <a:round/>
+                      <a:headEnd type="none" w="med" len="med"/>
+                      <a:tailEnd type="none" w="med" len="med"/>
+                    </a:lnL>
+                    <a:lnR w="12700" cap="flat" cmpd="sng" algn="ctr">
+                      <a:solidFill>
+                        <a:srgbClr val="C8C8C7"/>
+                      </a:solidFill>
+                      <a:prstDash val="solid"/>
+                      <a:round/>
+                      <a:headEnd type="none" w="med" len="med"/>
+                      <a:tailEnd type="none" w="med" len="med"/>
+                    </a:lnR>
+                    <a:lnT w="12700" cap="flat" cmpd="sng" algn="ctr">
+                      <a:solidFill>
+                        <a:srgbClr val="CBCBCB"/>
+                      </a:solidFill>
+                      <a:prstDash val="solid"/>
+                      <a:round/>
+                      <a:headEnd type="none" w="med" len="med"/>
+                      <a:tailEnd type="none" w="med" len="med"/>
+                    </a:lnT>
+                    <a:lnB w="12700" cap="flat" cmpd="sng" algn="ctr">
+                      <a:solidFill>
+                        <a:srgbClr val="C8C8C7"/>
+                      </a:solidFill>
+                      <a:prstDash val="solid"/>
+                      <a:round/>
+                      <a:headEnd type="none" w="med" len="med"/>
+                      <a:tailEnd type="none" w="med" len="med"/>
+                    </a:lnB>
+                    <a:solidFill>
+                      <a:srgbClr val="FBFBFA"/>
+                    </a:solidFill>
+                  </a:tcPr>
+                </a:tc>
+                <a:tc>
+                  <a:txBody>
+                    <a:bodyPr/>
+                    <a:lstStyle/>
+                    <a:p>
+                      <a:pPr algn="r" indent="0" marL="0">
+                        <a:lnSpc>
+                          <a:spcPts val="1680"/>
+                        </a:lnSpc>
+                        <a:buNone/>
+                      </a:pPr>
+                      <a:r>
+                        <a:rPr lang="en-US" sz="1200" dirty="0">
+                          <a:solidFill>
+                            <a:srgbClr val="233441"/>
+                          </a:solidFill>
+                          <a:latin typeface="Arial" pitchFamily="34" charset="0"/>
+                          <a:ea typeface="Arial" pitchFamily="34" charset="-122"/>
+                          <a:cs typeface="Arial" pitchFamily="34" charset="-120"/>
+                        </a:rPr>
+                        <a:t>0,03</a:t>
+                      </a:r>
+                      <a:endParaRPr lang="en-US" sz="1200" dirty="0">
+                        <a:latin typeface="Arial" charset="0"/>
+                        <a:ea typeface="Arial" charset="0"/>
+                        <a:cs typeface="Arial" charset="0"/>
+                      </a:endParaRPr>
+                    </a:p>
+                  </a:txBody>
+                  <a:tcPr marL="53340" marR="53340" marT="53340" marB="53340" anchor="t">
+                    <a:lnL w="12700" cap="flat" cmpd="sng" algn="ctr">
+                      <a:solidFill>
+                        <a:srgbClr val="C8C8C7"/>
+                      </a:solidFill>
+                      <a:prstDash val="solid"/>
+                      <a:round/>
+                      <a:headEnd type="none" w="med" len="med"/>
+                      <a:tailEnd type="none" w="med" len="med"/>
+                    </a:lnL>
+                    <a:lnR w="12700" cap="flat" cmpd="sng" algn="ctr">
+                      <a:solidFill>
+                        <a:srgbClr val="C8C8C7"/>
+                      </a:solidFill>
+                      <a:prstDash val="solid"/>
+                      <a:round/>
+                      <a:headEnd type="none" w="med" len="med"/>
+                      <a:tailEnd type="none" w="med" len="med"/>
+                    </a:lnR>
+                    <a:lnT w="12700" cap="flat" cmpd="sng" algn="ctr">
+                      <a:solidFill>
+                        <a:srgbClr val="CBCBCB"/>
+                      </a:solidFill>
+                      <a:prstDash val="solid"/>
+                      <a:round/>
+                      <a:headEnd type="none" w="med" len="med"/>
+                      <a:tailEnd type="none" w="med" len="med"/>
+                    </a:lnT>
+                    <a:lnB w="12700" cap="flat" cmpd="sng" algn="ctr">
+                      <a:solidFill>
+                        <a:srgbClr val="C8C8C7"/>
+                      </a:solidFill>
+                      <a:prstDash val="solid"/>
+                      <a:round/>
+                      <a:headEnd type="none" w="med" len="med"/>
+                      <a:tailEnd type="none" w="med" len="med"/>
+                    </a:lnB>
+                    <a:solidFill>
+                      <a:srgbClr val="FBFBFA"/>
+                    </a:solidFill>
+                  </a:tcPr>
+                </a:tc>
+              </a:tr>
+              <a:tr h="317434">
                 <a:tc>
                   <a:txBody>
                     <a:bodyPr/>
@@ -5162,7 +5745,7 @@
                     </a:lnL>
                     <a:lnR w="12700" cap="flat" cmpd="sng" algn="ctr">
                       <a:solidFill>
-                        <a:srgbClr val="C8C8C7"/>
+                        <a:srgbClr val="CBC5C1"/>
                       </a:solidFill>
                       <a:prstDash val="solid"/>
                       <a:round/>
@@ -5171,7 +5754,7 @@
                     </a:lnR>
                     <a:lnT w="12700" cap="flat" cmpd="sng" algn="ctr">
                       <a:solidFill>
-                        <a:srgbClr val="CBCBCB"/>
+                        <a:srgbClr val="C8C8C7"/>
                       </a:solidFill>
                       <a:prstDash val="solid"/>
                       <a:round/>
@@ -5180,7 +5763,7 @@
                     </a:lnT>
                     <a:lnB w="12700" cap="flat" cmpd="sng" algn="ctr">
                       <a:solidFill>
-                        <a:srgbClr val="C8C8C7"/>
+                        <a:srgbClr val="CBC5C1"/>
                       </a:solidFill>
                       <a:prstDash val="solid"/>
                       <a:round/>
@@ -5188,7 +5771,78 @@
                       <a:tailEnd type="none" w="med" len="med"/>
                     </a:lnB>
                     <a:solidFill>
-                      <a:srgbClr val="FBFBFA"/>
+                      <a:srgbClr val="FFF7F2"/>
+                    </a:solidFill>
+                  </a:tcPr>
+                </a:tc>
+                <a:tc>
+                  <a:txBody>
+                    <a:bodyPr/>
+                    <a:lstStyle/>
+                    <a:p>
+                      <a:pPr indent="0" marL="0">
+                        <a:lnSpc>
+                          <a:spcPts val="1680"/>
+                        </a:lnSpc>
+                        <a:buNone/>
+                      </a:pPr>
+                      <a:r>
+                        <a:rPr lang="en-US" sz="1200" dirty="0">
+                          <a:solidFill>
+                            <a:srgbClr val="233441"/>
+                          </a:solidFill>
+                          <a:latin typeface="Arial" pitchFamily="34" charset="0"/>
+                          <a:ea typeface="Arial" pitchFamily="34" charset="-122"/>
+                          <a:cs typeface="Arial" pitchFamily="34" charset="-120"/>
+                        </a:rPr>
+                        <a:t>Suma de lo anterior; el servidor y el mantenimiento son fijos</a:t>
+                      </a:r>
+                      <a:endParaRPr lang="en-US" sz="1200" dirty="0">
+                        <a:latin typeface="Arial" charset="0"/>
+                        <a:ea typeface="Arial" charset="0"/>
+                        <a:cs typeface="Arial" charset="0"/>
+                      </a:endParaRPr>
+                    </a:p>
+                  </a:txBody>
+                  <a:tcPr marL="53340" marR="53340" marT="53340" marB="53340" anchor="t">
+                    <a:lnL w="12700" cap="flat" cmpd="sng" algn="ctr">
+                      <a:solidFill>
+                        <a:srgbClr val="CBC5C1"/>
+                      </a:solidFill>
+                      <a:prstDash val="solid"/>
+                      <a:round/>
+                      <a:headEnd type="none" w="med" len="med"/>
+                      <a:tailEnd type="none" w="med" len="med"/>
+                    </a:lnL>
+                    <a:lnR w="12700" cap="flat" cmpd="sng" algn="ctr">
+                      <a:solidFill>
+                        <a:srgbClr val="CBC5C1"/>
+                      </a:solidFill>
+                      <a:prstDash val="solid"/>
+                      <a:round/>
+                      <a:headEnd type="none" w="med" len="med"/>
+                      <a:tailEnd type="none" w="med" len="med"/>
+                    </a:lnR>
+                    <a:lnT w="12700" cap="flat" cmpd="sng" algn="ctr">
+                      <a:solidFill>
+                        <a:srgbClr val="C8C8C7"/>
+                      </a:solidFill>
+                      <a:prstDash val="solid"/>
+                      <a:round/>
+                      <a:headEnd type="none" w="med" len="med"/>
+                      <a:tailEnd type="none" w="med" len="med"/>
+                    </a:lnT>
+                    <a:lnB w="12700" cap="flat" cmpd="sng" algn="ctr">
+                      <a:solidFill>
+                        <a:srgbClr val="CBC5C1"/>
+                      </a:solidFill>
+                      <a:prstDash val="solid"/>
+                      <a:round/>
+                      <a:headEnd type="none" w="med" len="med"/>
+                      <a:tailEnd type="none" w="med" len="med"/>
+                    </a:lnB>
+                    <a:solidFill>
+                      <a:srgbClr val="FFF7F2"/>
                     </a:solidFill>
                   </a:tcPr>
                 </a:tc>
@@ -5212,7 +5866,7 @@
                           <a:ea typeface="Arial" pitchFamily="34" charset="-122"/>
                           <a:cs typeface="Arial" pitchFamily="34" charset="-120"/>
                         </a:rPr>
-                        <a:t>7,20</a:t>
+                        <a:t>8,17</a:t>
                       </a:r>
                       <a:endParaRPr lang="en-US" sz="1200" dirty="0">
                         <a:latin typeface="Arial" charset="0"/>
@@ -5224,7 +5878,7 @@
                   <a:tcPr marL="53340" marR="53340" marT="53340" marB="53340" anchor="t">
                     <a:lnL w="12700" cap="flat" cmpd="sng" algn="ctr">
                       <a:solidFill>
-                        <a:srgbClr val="C8C8C7"/>
+                        <a:srgbClr val="CBC5C1"/>
                       </a:solidFill>
                       <a:prstDash val="solid"/>
                       <a:round/>
@@ -5233,7 +5887,7 @@
                     </a:lnL>
                     <a:lnR w="12700" cap="flat" cmpd="sng" algn="ctr">
                       <a:solidFill>
-                        <a:srgbClr val="C8C8C7"/>
+                        <a:srgbClr val="CBC5C1"/>
                       </a:solidFill>
                       <a:prstDash val="solid"/>
                       <a:round/>
@@ -5242,7 +5896,7 @@
                     </a:lnR>
                     <a:lnT w="12700" cap="flat" cmpd="sng" algn="ctr">
                       <a:solidFill>
-                        <a:srgbClr val="CBCBCB"/>
+                        <a:srgbClr val="C8C8C7"/>
                       </a:solidFill>
                       <a:prstDash val="solid"/>
                       <a:round/>
@@ -5251,7 +5905,7 @@
                     </a:lnT>
                     <a:lnB w="12700" cap="flat" cmpd="sng" algn="ctr">
                       <a:solidFill>
-                        <a:srgbClr val="C8C8C7"/>
+                        <a:srgbClr val="CBC5C1"/>
                       </a:solidFill>
                       <a:prstDash val="solid"/>
                       <a:round/>
@@ -5259,12 +5913,12 @@
                       <a:tailEnd type="none" w="med" len="med"/>
                     </a:lnB>
                     <a:solidFill>
-                      <a:srgbClr val="FBFBFA"/>
+                      <a:srgbClr val="FFF7F2"/>
                     </a:solidFill>
                   </a:tcPr>
                 </a:tc>
               </a:tr>
-              <a:tr h="332647">
+              <a:tr h="317434">
                 <a:tc>
                   <a:txBody>
                     <a:bodyPr/>
@@ -5315,7 +5969,75 @@
                     </a:lnR>
                     <a:lnT w="12700" cap="flat" cmpd="sng" algn="ctr">
                       <a:solidFill>
-                        <a:srgbClr val="C8C8C7"/>
+                        <a:srgbClr val="CBC5C1"/>
+                      </a:solidFill>
+                      <a:prstDash val="solid"/>
+                      <a:round/>
+                      <a:headEnd type="none" w="med" len="med"/>
+                      <a:tailEnd type="none" w="med" len="med"/>
+                    </a:lnT>
+                    <a:lnB w="12700" cap="flat" cmpd="sng" algn="ctr">
+                      <a:solidFill>
+                        <a:srgbClr val="CBCBCB"/>
+                      </a:solidFill>
+                      <a:prstDash val="solid"/>
+                      <a:round/>
+                      <a:headEnd type="none" w="med" len="med"/>
+                      <a:tailEnd type="none" w="med" len="med"/>
+                    </a:lnB>
+                  </a:tcPr>
+                </a:tc>
+                <a:tc>
+                  <a:txBody>
+                    <a:bodyPr/>
+                    <a:lstStyle/>
+                    <a:p>
+                      <a:pPr indent="0" marL="0">
+                        <a:lnSpc>
+                          <a:spcPts val="1680"/>
+                        </a:lnSpc>
+                        <a:buNone/>
+                      </a:pPr>
+                      <a:r>
+                        <a:rPr lang="en-US" sz="1200" dirty="0">
+                          <a:solidFill>
+                            <a:srgbClr val="233441"/>
+                          </a:solidFill>
+                          <a:latin typeface="Arial" pitchFamily="34" charset="0"/>
+                          <a:ea typeface="Arial" pitchFamily="34" charset="-122"/>
+                          <a:cs typeface="Arial" pitchFamily="34" charset="-120"/>
+                        </a:rPr>
+                        <a:t>Regalo personalizado de gama media, unos 865 MXN</a:t>
+                      </a:r>
+                      <a:endParaRPr lang="en-US" sz="1200" dirty="0">
+                        <a:latin typeface="Arial" charset="0"/>
+                        <a:ea typeface="Arial" charset="0"/>
+                        <a:cs typeface="Arial" charset="0"/>
+                      </a:endParaRPr>
+                    </a:p>
+                  </a:txBody>
+                  <a:tcPr marL="53340" marR="53340" marT="53340" marB="53340" anchor="t">
+                    <a:lnL w="12700" cap="flat" cmpd="sng" algn="ctr">
+                      <a:solidFill>
+                        <a:srgbClr val="CBCBCB"/>
+                      </a:solidFill>
+                      <a:prstDash val="solid"/>
+                      <a:round/>
+                      <a:headEnd type="none" w="med" len="med"/>
+                      <a:tailEnd type="none" w="med" len="med"/>
+                    </a:lnL>
+                    <a:lnR w="12700" cap="flat" cmpd="sng" algn="ctr">
+                      <a:solidFill>
+                        <a:srgbClr val="CBCBCB"/>
+                      </a:solidFill>
+                      <a:prstDash val="solid"/>
+                      <a:round/>
+                      <a:headEnd type="none" w="med" len="med"/>
+                      <a:tailEnd type="none" w="med" len="med"/>
+                    </a:lnR>
+                    <a:lnT w="12700" cap="flat" cmpd="sng" algn="ctr">
+                      <a:solidFill>
+                        <a:srgbClr val="CBC5C1"/>
                       </a:solidFill>
                       <a:prstDash val="solid"/>
                       <a:round/>
@@ -5383,7 +6105,7 @@
                     </a:lnR>
                     <a:lnT w="12700" cap="flat" cmpd="sng" algn="ctr">
                       <a:solidFill>
-                        <a:srgbClr val="C8C8C7"/>
+                        <a:srgbClr val="CBC5C1"/>
                       </a:solidFill>
                       <a:prstDash val="solid"/>
                       <a:round/>
@@ -5402,7 +6124,7 @@
                   </a:tcPr>
                 </a:tc>
               </a:tr>
-              <a:tr h="332647">
+              <a:tr h="317434">
                 <a:tc>
                   <a:txBody>
                     <a:bodyPr/>
@@ -5479,253 +6201,6 @@
                     <a:bodyPr/>
                     <a:lstStyle/>
                     <a:p>
-                      <a:pPr algn="r" indent="0" marL="0">
-                        <a:lnSpc>
-                          <a:spcPts val="1680"/>
-                        </a:lnSpc>
-                        <a:buNone/>
-                      </a:pPr>
-                      <a:r>
-                        <a:rPr lang="en-US" sz="1200" dirty="0">
-                          <a:solidFill>
-                            <a:srgbClr val="F4631E"/>
-                          </a:solidFill>
-                          <a:latin typeface="Arial" pitchFamily="34" charset="0"/>
-                          <a:ea typeface="Arial" pitchFamily="34" charset="-122"/>
-                          <a:cs typeface="Arial" pitchFamily="34" charset="-120"/>
-                        </a:rPr>
-                        <a:t>41,80 · 85 %</a:t>
-                      </a:r>
-                      <a:endParaRPr lang="en-US" sz="1200" dirty="0">
-                        <a:latin typeface="Arial" charset="0"/>
-                        <a:ea typeface="Arial" charset="0"/>
-                        <a:cs typeface="Arial" charset="0"/>
-                      </a:endParaRPr>
-                    </a:p>
-                  </a:txBody>
-                  <a:tcPr marL="53340" marR="53340" marT="53340" marB="53340" anchor="t">
-                    <a:lnL w="12700" cap="flat" cmpd="sng" algn="ctr">
-                      <a:solidFill>
-                        <a:srgbClr val="CBC5C1"/>
-                      </a:solidFill>
-                      <a:prstDash val="solid"/>
-                      <a:round/>
-                      <a:headEnd type="none" w="med" len="med"/>
-                      <a:tailEnd type="none" w="med" len="med"/>
-                    </a:lnL>
-                    <a:lnR w="12700" cap="flat" cmpd="sng" algn="ctr">
-                      <a:solidFill>
-                        <a:srgbClr val="CBC5C1"/>
-                      </a:solidFill>
-                      <a:prstDash val="solid"/>
-                      <a:round/>
-                      <a:headEnd type="none" w="med" len="med"/>
-                      <a:tailEnd type="none" w="med" len="med"/>
-                    </a:lnR>
-                    <a:lnT w="12700" cap="flat" cmpd="sng" algn="ctr">
-                      <a:solidFill>
-                        <a:srgbClr val="CBCBCB"/>
-                      </a:solidFill>
-                      <a:prstDash val="solid"/>
-                      <a:round/>
-                      <a:headEnd type="none" w="med" len="med"/>
-                      <a:tailEnd type="none" w="med" len="med"/>
-                    </a:lnT>
-                    <a:lnB w="12700" cap="flat" cmpd="sng" algn="ctr">
-                      <a:solidFill>
-                        <a:srgbClr val="CBC5C1"/>
-                      </a:solidFill>
-                      <a:prstDash val="solid"/>
-                      <a:round/>
-                      <a:headEnd type="none" w="med" len="med"/>
-                      <a:tailEnd type="none" w="med" len="med"/>
-                    </a:lnB>
-                    <a:solidFill>
-                      <a:srgbClr val="FFF7F2"/>
-                    </a:solidFill>
-                  </a:tcPr>
-                </a:tc>
-              </a:tr>
-            </a:tbl>
-          </a:graphicData>
-        </a:graphic>
-      </p:graphicFrame>
-      <p:graphicFrame>
-        <p:nvGraphicFramePr>
-          <p:cNvPr id="5" name="Table 1"/>
-          <p:cNvGraphicFramePr>
-            <a:graphicFrameLocks noGrp="1"/>
-          </p:cNvGraphicFramePr>
-          <p:nvPr>
-            <p:extLst>
-              <p:ext uri="{D42A27DB-BD31-4B8C-83A1-F6EECF244321}">
-                <p14:modId xmlns:p14="http://schemas.microsoft.com/office/powerpoint/2010/main" val="1579011935"/>
-              </p:ext>
-            </p:extLst>
-          </p:nvPr>
-        </p:nvGraphicFramePr>
-        <p:xfrm>
-          <a:off x="6235700" y="1529029"/>
-          <a:ext cx="4984750" cy="2328532"/>
-        </p:xfrm>
-        <a:graphic>
-          <a:graphicData uri="http://schemas.openxmlformats.org/drawingml/2006/table">
-            <a:tbl>
-              <a:tblPr/>
-              <a:tblGrid>
-                <a:gridCol w="3090545"/>
-                <a:gridCol w="1894205"/>
-              </a:tblGrid>
-              <a:tr h="332647">
-                <a:tc>
-                  <a:txBody>
-                    <a:bodyPr/>
-                    <a:lstStyle/>
-                    <a:p>
-                      <a:pPr indent="0" marL="0">
-                        <a:lnSpc>
-                          <a:spcPts val="1680"/>
-                        </a:lnSpc>
-                        <a:buNone/>
-                      </a:pPr>
-                      <a:r>
-                        <a:rPr lang="en-US" sz="1200" b="1" dirty="0">
-                          <a:solidFill>
-                            <a:srgbClr val="FFFFFF"/>
-                          </a:solidFill>
-                          <a:latin typeface="Arial" pitchFamily="34" charset="0"/>
-                          <a:ea typeface="Arial" pitchFamily="34" charset="-122"/>
-                          <a:cs typeface="Arial" pitchFamily="34" charset="-120"/>
-                        </a:rPr>
-                        <a:t>Desarrollo</a:t>
-                      </a:r>
-                      <a:endParaRPr lang="en-US" sz="1200" dirty="0">
-                        <a:latin typeface="Arial" charset="0"/>
-                        <a:ea typeface="Arial" charset="0"/>
-                        <a:cs typeface="Arial" charset="0"/>
-                      </a:endParaRPr>
-                    </a:p>
-                  </a:txBody>
-                  <a:tcPr marL="53340" marR="53340" marT="53340" marB="53340" anchor="t">
-                    <a:lnL w="12700" cap="flat" cmpd="sng" algn="ctr">
-                      <a:solidFill>
-                        <a:srgbClr val="CBCBCB"/>
-                      </a:solidFill>
-                      <a:prstDash val="solid"/>
-                      <a:round/>
-                      <a:headEnd type="none" w="med" len="med"/>
-                      <a:tailEnd type="none" w="med" len="med"/>
-                    </a:lnL>
-                    <a:lnR w="12700" cap="flat" cmpd="sng" algn="ctr">
-                      <a:solidFill>
-                        <a:srgbClr val="1C2834"/>
-                      </a:solidFill>
-                      <a:prstDash val="solid"/>
-                      <a:round/>
-                      <a:headEnd type="none" w="med" len="med"/>
-                      <a:tailEnd type="none" w="med" len="med"/>
-                    </a:lnR>
-                    <a:lnT w="12700" cap="flat" cmpd="sng" algn="ctr">
-                      <a:solidFill>
-                        <a:srgbClr val="CBCBCB"/>
-                      </a:solidFill>
-                      <a:prstDash val="solid"/>
-                      <a:round/>
-                      <a:headEnd type="none" w="med" len="med"/>
-                      <a:tailEnd type="none" w="med" len="med"/>
-                    </a:lnT>
-                    <a:lnB w="12700" cap="flat" cmpd="sng" algn="ctr">
-                      <a:solidFill>
-                        <a:srgbClr val="1C2834"/>
-                      </a:solidFill>
-                      <a:prstDash val="solid"/>
-                      <a:round/>
-                      <a:headEnd type="none" w="med" len="med"/>
-                      <a:tailEnd type="none" w="med" len="med"/>
-                    </a:lnB>
-                    <a:solidFill>
-                      <a:srgbClr val="1E2D3D"/>
-                    </a:solidFill>
-                  </a:tcPr>
-                </a:tc>
-                <a:tc>
-                  <a:txBody>
-                    <a:bodyPr/>
-                    <a:lstStyle/>
-                    <a:p>
-                      <a:pPr algn="r" indent="0" marL="0">
-                        <a:lnSpc>
-                          <a:spcPts val="1680"/>
-                        </a:lnSpc>
-                        <a:buNone/>
-                      </a:pPr>
-                      <a:r>
-                        <a:rPr lang="en-US" sz="1200" b="1" dirty="0">
-                          <a:solidFill>
-                            <a:srgbClr val="FFFFFF"/>
-                          </a:solidFill>
-                          <a:latin typeface="Arial" pitchFamily="34" charset="0"/>
-                          <a:ea typeface="Arial" pitchFamily="34" charset="-122"/>
-                          <a:cs typeface="Arial" pitchFamily="34" charset="-120"/>
-                        </a:rPr>
-                        <a:t>Horas</a:t>
-                      </a:r>
-                      <a:endParaRPr lang="en-US" sz="1200" dirty="0">
-                        <a:latin typeface="Arial" charset="0"/>
-                        <a:ea typeface="Arial" charset="0"/>
-                        <a:cs typeface="Arial" charset="0"/>
-                      </a:endParaRPr>
-                    </a:p>
-                  </a:txBody>
-                  <a:tcPr marL="53340" marR="53340" marT="53340" marB="53340" anchor="t">
-                    <a:lnL w="12700" cap="flat" cmpd="sng" algn="ctr">
-                      <a:solidFill>
-                        <a:srgbClr val="1C2834"/>
-                      </a:solidFill>
-                      <a:prstDash val="solid"/>
-                      <a:round/>
-                      <a:headEnd type="none" w="med" len="med"/>
-                      <a:tailEnd type="none" w="med" len="med"/>
-                    </a:lnL>
-                    <a:lnR w="12700" cap="flat" cmpd="sng" algn="ctr">
-                      <a:solidFill>
-                        <a:srgbClr val="1C2834"/>
-                      </a:solidFill>
-                      <a:prstDash val="solid"/>
-                      <a:round/>
-                      <a:headEnd type="none" w="med" len="med"/>
-                      <a:tailEnd type="none" w="med" len="med"/>
-                    </a:lnR>
-                    <a:lnT w="12700" cap="flat" cmpd="sng" algn="ctr">
-                      <a:solidFill>
-                        <a:srgbClr val="CBCBCB"/>
-                      </a:solidFill>
-                      <a:prstDash val="solid"/>
-                      <a:round/>
-                      <a:headEnd type="none" w="med" len="med"/>
-                      <a:tailEnd type="none" w="med" len="med"/>
-                    </a:lnT>
-                    <a:lnB w="12700" cap="flat" cmpd="sng" algn="ctr">
-                      <a:solidFill>
-                        <a:srgbClr val="1C2834"/>
-                      </a:solidFill>
-                      <a:prstDash val="solid"/>
-                      <a:round/>
-                      <a:headEnd type="none" w="med" len="med"/>
-                      <a:tailEnd type="none" w="med" len="med"/>
-                    </a:lnB>
-                    <a:solidFill>
-                      <a:srgbClr val="1E2D3D"/>
-                    </a:solidFill>
-                  </a:tcPr>
-                </a:tc>
-              </a:tr>
-              <a:tr h="332647">
-                <a:tc>
-                  <a:txBody>
-                    <a:bodyPr/>
-                    <a:lstStyle/>
-                    <a:p>
                       <a:pPr indent="0" marL="0">
                         <a:lnSpc>
                           <a:spcPts val="1680"/>
@@ -5741,7 +6216,7 @@
                           <a:ea typeface="Arial" pitchFamily="34" charset="-122"/>
                           <a:cs typeface="Arial" pitchFamily="34" charset="-120"/>
                         </a:rPr>
-                        <a:t>Diseño y specs</a:t>
+                        <a:t>Precio menos coste unitario</a:t>
                       </a:r>
                       <a:endParaRPr lang="en-US" sz="1200" dirty="0">
                         <a:latin typeface="Arial" charset="0"/>
@@ -5753,709 +6228,7 @@
                   <a:tcPr marL="53340" marR="53340" marT="53340" marB="53340" anchor="t">
                     <a:lnL w="12700" cap="flat" cmpd="sng" algn="ctr">
                       <a:solidFill>
-                        <a:srgbClr val="CBCBCB"/>
-                      </a:solidFill>
-                      <a:prstDash val="solid"/>
-                      <a:round/>
-                      <a:headEnd type="none" w="med" len="med"/>
-                      <a:tailEnd type="none" w="med" len="med"/>
-                    </a:lnL>
-                    <a:lnR w="12700" cap="flat" cmpd="sng" algn="ctr">
-                      <a:solidFill>
-                        <a:srgbClr val="CBCBCB"/>
-                      </a:solidFill>
-                      <a:prstDash val="solid"/>
-                      <a:round/>
-                      <a:headEnd type="none" w="med" len="med"/>
-                      <a:tailEnd type="none" w="med" len="med"/>
-                    </a:lnR>
-                    <a:lnT w="12700" cap="flat" cmpd="sng" algn="ctr">
-                      <a:solidFill>
-                        <a:srgbClr val="1C2834"/>
-                      </a:solidFill>
-                      <a:prstDash val="solid"/>
-                      <a:round/>
-                      <a:headEnd type="none" w="med" len="med"/>
-                      <a:tailEnd type="none" w="med" len="med"/>
-                    </a:lnT>
-                    <a:lnB w="12700" cap="flat" cmpd="sng" algn="ctr">
-                      <a:solidFill>
-                        <a:srgbClr val="CBCBCB"/>
-                      </a:solidFill>
-                      <a:prstDash val="solid"/>
-                      <a:round/>
-                      <a:headEnd type="none" w="med" len="med"/>
-                      <a:tailEnd type="none" w="med" len="med"/>
-                    </a:lnB>
-                  </a:tcPr>
-                </a:tc>
-                <a:tc>
-                  <a:txBody>
-                    <a:bodyPr/>
-                    <a:lstStyle/>
-                    <a:p>
-                      <a:pPr algn="r" indent="0" marL="0">
-                        <a:lnSpc>
-                          <a:spcPts val="1680"/>
-                        </a:lnSpc>
-                        <a:buNone/>
-                      </a:pPr>
-                      <a:r>
-                        <a:rPr lang="en-US" sz="1200" dirty="0">
-                          <a:solidFill>
-                            <a:srgbClr val="233441"/>
-                          </a:solidFill>
-                          <a:latin typeface="Arial" pitchFamily="34" charset="0"/>
-                          <a:ea typeface="Arial" pitchFamily="34" charset="-122"/>
-                          <a:cs typeface="Arial" pitchFamily="34" charset="-120"/>
-                        </a:rPr>
-                        <a:t>60</a:t>
-                      </a:r>
-                      <a:endParaRPr lang="en-US" sz="1200" dirty="0">
-                        <a:latin typeface="Arial" charset="0"/>
-                        <a:ea typeface="Arial" charset="0"/>
-                        <a:cs typeface="Arial" charset="0"/>
-                      </a:endParaRPr>
-                    </a:p>
-                  </a:txBody>
-                  <a:tcPr marL="53340" marR="53340" marT="53340" marB="53340" anchor="t">
-                    <a:lnL w="12700" cap="flat" cmpd="sng" algn="ctr">
-                      <a:solidFill>
-                        <a:srgbClr val="CBCBCB"/>
-                      </a:solidFill>
-                      <a:prstDash val="solid"/>
-                      <a:round/>
-                      <a:headEnd type="none" w="med" len="med"/>
-                      <a:tailEnd type="none" w="med" len="med"/>
-                    </a:lnL>
-                    <a:lnR w="12700" cap="flat" cmpd="sng" algn="ctr">
-                      <a:solidFill>
-                        <a:srgbClr val="CBCBCB"/>
-                      </a:solidFill>
-                      <a:prstDash val="solid"/>
-                      <a:round/>
-                      <a:headEnd type="none" w="med" len="med"/>
-                      <a:tailEnd type="none" w="med" len="med"/>
-                    </a:lnR>
-                    <a:lnT w="12700" cap="flat" cmpd="sng" algn="ctr">
-                      <a:solidFill>
-                        <a:srgbClr val="1C2834"/>
-                      </a:solidFill>
-                      <a:prstDash val="solid"/>
-                      <a:round/>
-                      <a:headEnd type="none" w="med" len="med"/>
-                      <a:tailEnd type="none" w="med" len="med"/>
-                    </a:lnT>
-                    <a:lnB w="12700" cap="flat" cmpd="sng" algn="ctr">
-                      <a:solidFill>
-                        <a:srgbClr val="CBCBCB"/>
-                      </a:solidFill>
-                      <a:prstDash val="solid"/>
-                      <a:round/>
-                      <a:headEnd type="none" w="med" len="med"/>
-                      <a:tailEnd type="none" w="med" len="med"/>
-                    </a:lnB>
-                  </a:tcPr>
-                </a:tc>
-              </a:tr>
-              <a:tr h="332647">
-                <a:tc>
-                  <a:txBody>
-                    <a:bodyPr/>
-                    <a:lstStyle/>
-                    <a:p>
-                      <a:pPr indent="0" marL="0">
-                        <a:lnSpc>
-                          <a:spcPts val="1680"/>
-                        </a:lnSpc>
-                        <a:buNone/>
-                      </a:pPr>
-                      <a:r>
-                        <a:rPr lang="en-US" sz="1200" dirty="0">
-                          <a:solidFill>
-                            <a:srgbClr val="233441"/>
-                          </a:solidFill>
-                          <a:latin typeface="Arial" pitchFamily="34" charset="0"/>
-                          <a:ea typeface="Arial" pitchFamily="34" charset="-122"/>
-                          <a:cs typeface="Arial" pitchFamily="34" charset="-120"/>
-                        </a:rPr>
-                        <a:t>Desarrollo backend y frontend</a:t>
-                      </a:r>
-                      <a:endParaRPr lang="en-US" sz="1200" dirty="0">
-                        <a:latin typeface="Arial" charset="0"/>
-                        <a:ea typeface="Arial" charset="0"/>
-                        <a:cs typeface="Arial" charset="0"/>
-                      </a:endParaRPr>
-                    </a:p>
-                  </a:txBody>
-                  <a:tcPr marL="53340" marR="53340" marT="53340" marB="53340" anchor="t">
-                    <a:lnL w="12700" cap="flat" cmpd="sng" algn="ctr">
-                      <a:solidFill>
-                        <a:srgbClr val="CBCBCB"/>
-                      </a:solidFill>
-                      <a:prstDash val="solid"/>
-                      <a:round/>
-                      <a:headEnd type="none" w="med" len="med"/>
-                      <a:tailEnd type="none" w="med" len="med"/>
-                    </a:lnL>
-                    <a:lnR w="12700" cap="flat" cmpd="sng" algn="ctr">
-                      <a:solidFill>
-                        <a:srgbClr val="C8C8C7"/>
-                      </a:solidFill>
-                      <a:prstDash val="solid"/>
-                      <a:round/>
-                      <a:headEnd type="none" w="med" len="med"/>
-                      <a:tailEnd type="none" w="med" len="med"/>
-                    </a:lnR>
-                    <a:lnT w="12700" cap="flat" cmpd="sng" algn="ctr">
-                      <a:solidFill>
-                        <a:srgbClr val="CBCBCB"/>
-                      </a:solidFill>
-                      <a:prstDash val="solid"/>
-                      <a:round/>
-                      <a:headEnd type="none" w="med" len="med"/>
-                      <a:tailEnd type="none" w="med" len="med"/>
-                    </a:lnT>
-                    <a:lnB w="12700" cap="flat" cmpd="sng" algn="ctr">
-                      <a:solidFill>
-                        <a:srgbClr val="C8C8C7"/>
-                      </a:solidFill>
-                      <a:prstDash val="solid"/>
-                      <a:round/>
-                      <a:headEnd type="none" w="med" len="med"/>
-                      <a:tailEnd type="none" w="med" len="med"/>
-                    </a:lnB>
-                    <a:solidFill>
-                      <a:srgbClr val="FBFBFA"/>
-                    </a:solidFill>
-                  </a:tcPr>
-                </a:tc>
-                <a:tc>
-                  <a:txBody>
-                    <a:bodyPr/>
-                    <a:lstStyle/>
-                    <a:p>
-                      <a:pPr algn="r" indent="0" marL="0">
-                        <a:lnSpc>
-                          <a:spcPts val="1680"/>
-                        </a:lnSpc>
-                        <a:buNone/>
-                      </a:pPr>
-                      <a:r>
-                        <a:rPr lang="en-US" sz="1200" dirty="0">
-                          <a:solidFill>
-                            <a:srgbClr val="233441"/>
-                          </a:solidFill>
-                          <a:latin typeface="Arial" pitchFamily="34" charset="0"/>
-                          <a:ea typeface="Arial" pitchFamily="34" charset="-122"/>
-                          <a:cs typeface="Arial" pitchFamily="34" charset="-120"/>
-                        </a:rPr>
-                        <a:t>180</a:t>
-                      </a:r>
-                      <a:endParaRPr lang="en-US" sz="1200" dirty="0">
-                        <a:latin typeface="Arial" charset="0"/>
-                        <a:ea typeface="Arial" charset="0"/>
-                        <a:cs typeface="Arial" charset="0"/>
-                      </a:endParaRPr>
-                    </a:p>
-                  </a:txBody>
-                  <a:tcPr marL="53340" marR="53340" marT="53340" marB="53340" anchor="t">
-                    <a:lnL w="12700" cap="flat" cmpd="sng" algn="ctr">
-                      <a:solidFill>
-                        <a:srgbClr val="C8C8C7"/>
-                      </a:solidFill>
-                      <a:prstDash val="solid"/>
-                      <a:round/>
-                      <a:headEnd type="none" w="med" len="med"/>
-                      <a:tailEnd type="none" w="med" len="med"/>
-                    </a:lnL>
-                    <a:lnR w="12700" cap="flat" cmpd="sng" algn="ctr">
-                      <a:solidFill>
-                        <a:srgbClr val="C8C8C7"/>
-                      </a:solidFill>
-                      <a:prstDash val="solid"/>
-                      <a:round/>
-                      <a:headEnd type="none" w="med" len="med"/>
-                      <a:tailEnd type="none" w="med" len="med"/>
-                    </a:lnR>
-                    <a:lnT w="12700" cap="flat" cmpd="sng" algn="ctr">
-                      <a:solidFill>
-                        <a:srgbClr val="CBCBCB"/>
-                      </a:solidFill>
-                      <a:prstDash val="solid"/>
-                      <a:round/>
-                      <a:headEnd type="none" w="med" len="med"/>
-                      <a:tailEnd type="none" w="med" len="med"/>
-                    </a:lnT>
-                    <a:lnB w="12700" cap="flat" cmpd="sng" algn="ctr">
-                      <a:solidFill>
-                        <a:srgbClr val="C8C8C7"/>
-                      </a:solidFill>
-                      <a:prstDash val="solid"/>
-                      <a:round/>
-                      <a:headEnd type="none" w="med" len="med"/>
-                      <a:tailEnd type="none" w="med" len="med"/>
-                    </a:lnB>
-                    <a:solidFill>
-                      <a:srgbClr val="FBFBFA"/>
-                    </a:solidFill>
-                  </a:tcPr>
-                </a:tc>
-              </a:tr>
-              <a:tr h="332647">
-                <a:tc>
-                  <a:txBody>
-                    <a:bodyPr/>
-                    <a:lstStyle/>
-                    <a:p>
-                      <a:pPr indent="0" marL="0">
-                        <a:lnSpc>
-                          <a:spcPts val="1680"/>
-                        </a:lnSpc>
-                        <a:buNone/>
-                      </a:pPr>
-                      <a:r>
-                        <a:rPr lang="en-US" sz="1200" dirty="0">
-                          <a:solidFill>
-                            <a:srgbClr val="233441"/>
-                          </a:solidFill>
-                          <a:latin typeface="Arial" pitchFamily="34" charset="0"/>
-                          <a:ea typeface="Arial" pitchFamily="34" charset="-122"/>
-                          <a:cs typeface="Arial" pitchFamily="34" charset="-120"/>
-                        </a:rPr>
-                        <a:t>Validación y evals</a:t>
-                      </a:r>
-                      <a:endParaRPr lang="en-US" sz="1200" dirty="0">
-                        <a:latin typeface="Arial" charset="0"/>
-                        <a:ea typeface="Arial" charset="0"/>
-                        <a:cs typeface="Arial" charset="0"/>
-                      </a:endParaRPr>
-                    </a:p>
-                  </a:txBody>
-                  <a:tcPr marL="53340" marR="53340" marT="53340" marB="53340" anchor="t">
-                    <a:lnL w="12700" cap="flat" cmpd="sng" algn="ctr">
-                      <a:solidFill>
-                        <a:srgbClr val="CBCBCB"/>
-                      </a:solidFill>
-                      <a:prstDash val="solid"/>
-                      <a:round/>
-                      <a:headEnd type="none" w="med" len="med"/>
-                      <a:tailEnd type="none" w="med" len="med"/>
-                    </a:lnL>
-                    <a:lnR w="12700" cap="flat" cmpd="sng" algn="ctr">
-                      <a:solidFill>
-                        <a:srgbClr val="CBCBCB"/>
-                      </a:solidFill>
-                      <a:prstDash val="solid"/>
-                      <a:round/>
-                      <a:headEnd type="none" w="med" len="med"/>
-                      <a:tailEnd type="none" w="med" len="med"/>
-                    </a:lnR>
-                    <a:lnT w="12700" cap="flat" cmpd="sng" algn="ctr">
-                      <a:solidFill>
-                        <a:srgbClr val="C8C8C7"/>
-                      </a:solidFill>
-                      <a:prstDash val="solid"/>
-                      <a:round/>
-                      <a:headEnd type="none" w="med" len="med"/>
-                      <a:tailEnd type="none" w="med" len="med"/>
-                    </a:lnT>
-                    <a:lnB w="12700" cap="flat" cmpd="sng" algn="ctr">
-                      <a:solidFill>
-                        <a:srgbClr val="CBCBCB"/>
-                      </a:solidFill>
-                      <a:prstDash val="solid"/>
-                      <a:round/>
-                      <a:headEnd type="none" w="med" len="med"/>
-                      <a:tailEnd type="none" w="med" len="med"/>
-                    </a:lnB>
-                  </a:tcPr>
-                </a:tc>
-                <a:tc>
-                  <a:txBody>
-                    <a:bodyPr/>
-                    <a:lstStyle/>
-                    <a:p>
-                      <a:pPr algn="r" indent="0" marL="0">
-                        <a:lnSpc>
-                          <a:spcPts val="1680"/>
-                        </a:lnSpc>
-                        <a:buNone/>
-                      </a:pPr>
-                      <a:r>
-                        <a:rPr lang="en-US" sz="1200" dirty="0">
-                          <a:solidFill>
-                            <a:srgbClr val="233441"/>
-                          </a:solidFill>
-                          <a:latin typeface="Arial" pitchFamily="34" charset="0"/>
-                          <a:ea typeface="Arial" pitchFamily="34" charset="-122"/>
-                          <a:cs typeface="Arial" pitchFamily="34" charset="-120"/>
-                        </a:rPr>
-                        <a:t>70</a:t>
-                      </a:r>
-                      <a:endParaRPr lang="en-US" sz="1200" dirty="0">
-                        <a:latin typeface="Arial" charset="0"/>
-                        <a:ea typeface="Arial" charset="0"/>
-                        <a:cs typeface="Arial" charset="0"/>
-                      </a:endParaRPr>
-                    </a:p>
-                  </a:txBody>
-                  <a:tcPr marL="53340" marR="53340" marT="53340" marB="53340" anchor="t">
-                    <a:lnL w="12700" cap="flat" cmpd="sng" algn="ctr">
-                      <a:solidFill>
-                        <a:srgbClr val="CBCBCB"/>
-                      </a:solidFill>
-                      <a:prstDash val="solid"/>
-                      <a:round/>
-                      <a:headEnd type="none" w="med" len="med"/>
-                      <a:tailEnd type="none" w="med" len="med"/>
-                    </a:lnL>
-                    <a:lnR w="12700" cap="flat" cmpd="sng" algn="ctr">
-                      <a:solidFill>
-                        <a:srgbClr val="CBCBCB"/>
-                      </a:solidFill>
-                      <a:prstDash val="solid"/>
-                      <a:round/>
-                      <a:headEnd type="none" w="med" len="med"/>
-                      <a:tailEnd type="none" w="med" len="med"/>
-                    </a:lnR>
-                    <a:lnT w="12700" cap="flat" cmpd="sng" algn="ctr">
-                      <a:solidFill>
-                        <a:srgbClr val="C8C8C7"/>
-                      </a:solidFill>
-                      <a:prstDash val="solid"/>
-                      <a:round/>
-                      <a:headEnd type="none" w="med" len="med"/>
-                      <a:tailEnd type="none" w="med" len="med"/>
-                    </a:lnT>
-                    <a:lnB w="12700" cap="flat" cmpd="sng" algn="ctr">
-                      <a:solidFill>
-                        <a:srgbClr val="CBCBCB"/>
-                      </a:solidFill>
-                      <a:prstDash val="solid"/>
-                      <a:round/>
-                      <a:headEnd type="none" w="med" len="med"/>
-                      <a:tailEnd type="none" w="med" len="med"/>
-                    </a:lnB>
-                  </a:tcPr>
-                </a:tc>
-              </a:tr>
-              <a:tr h="332647">
-                <a:tc>
-                  <a:txBody>
-                    <a:bodyPr/>
-                    <a:lstStyle/>
-                    <a:p>
-                      <a:pPr indent="0" marL="0">
-                        <a:lnSpc>
-                          <a:spcPts val="1680"/>
-                        </a:lnSpc>
-                        <a:buNone/>
-                      </a:pPr>
-                      <a:r>
-                        <a:rPr lang="en-US" sz="1200" dirty="0">
-                          <a:solidFill>
-                            <a:srgbClr val="233441"/>
-                          </a:solidFill>
-                          <a:latin typeface="Arial" pitchFamily="34" charset="0"/>
-                          <a:ea typeface="Arial" pitchFamily="34" charset="-122"/>
-                          <a:cs typeface="Arial" pitchFamily="34" charset="-120"/>
-                        </a:rPr>
-                        <a:t>Despliegue</a:t>
-                      </a:r>
-                      <a:endParaRPr lang="en-US" sz="1200" dirty="0">
-                        <a:latin typeface="Arial" charset="0"/>
-                        <a:ea typeface="Arial" charset="0"/>
-                        <a:cs typeface="Arial" charset="0"/>
-                      </a:endParaRPr>
-                    </a:p>
-                  </a:txBody>
-                  <a:tcPr marL="53340" marR="53340" marT="53340" marB="53340" anchor="t">
-                    <a:lnL w="12700" cap="flat" cmpd="sng" algn="ctr">
-                      <a:solidFill>
-                        <a:srgbClr val="CBCBCB"/>
-                      </a:solidFill>
-                      <a:prstDash val="solid"/>
-                      <a:round/>
-                      <a:headEnd type="none" w="med" len="med"/>
-                      <a:tailEnd type="none" w="med" len="med"/>
-                    </a:lnL>
-                    <a:lnR w="12700" cap="flat" cmpd="sng" algn="ctr">
-                      <a:solidFill>
-                        <a:srgbClr val="C8C8C7"/>
-                      </a:solidFill>
-                      <a:prstDash val="solid"/>
-                      <a:round/>
-                      <a:headEnd type="none" w="med" len="med"/>
-                      <a:tailEnd type="none" w="med" len="med"/>
-                    </a:lnR>
-                    <a:lnT w="12700" cap="flat" cmpd="sng" algn="ctr">
-                      <a:solidFill>
-                        <a:srgbClr val="CBCBCB"/>
-                      </a:solidFill>
-                      <a:prstDash val="solid"/>
-                      <a:round/>
-                      <a:headEnd type="none" w="med" len="med"/>
-                      <a:tailEnd type="none" w="med" len="med"/>
-                    </a:lnT>
-                    <a:lnB w="12700" cap="flat" cmpd="sng" algn="ctr">
-                      <a:solidFill>
-                        <a:srgbClr val="C8C8C7"/>
-                      </a:solidFill>
-                      <a:prstDash val="solid"/>
-                      <a:round/>
-                      <a:headEnd type="none" w="med" len="med"/>
-                      <a:tailEnd type="none" w="med" len="med"/>
-                    </a:lnB>
-                    <a:solidFill>
-                      <a:srgbClr val="FBFBFA"/>
-                    </a:solidFill>
-                  </a:tcPr>
-                </a:tc>
-                <a:tc>
-                  <a:txBody>
-                    <a:bodyPr/>
-                    <a:lstStyle/>
-                    <a:p>
-                      <a:pPr algn="r" indent="0" marL="0">
-                        <a:lnSpc>
-                          <a:spcPts val="1680"/>
-                        </a:lnSpc>
-                        <a:buNone/>
-                      </a:pPr>
-                      <a:r>
-                        <a:rPr lang="en-US" sz="1200" dirty="0">
-                          <a:solidFill>
-                            <a:srgbClr val="233441"/>
-                          </a:solidFill>
-                          <a:latin typeface="Arial" pitchFamily="34" charset="0"/>
-                          <a:ea typeface="Arial" pitchFamily="34" charset="-122"/>
-                          <a:cs typeface="Arial" pitchFamily="34" charset="-120"/>
-                        </a:rPr>
-                        <a:t>30</a:t>
-                      </a:r>
-                      <a:endParaRPr lang="en-US" sz="1200" dirty="0">
-                        <a:latin typeface="Arial" charset="0"/>
-                        <a:ea typeface="Arial" charset="0"/>
-                        <a:cs typeface="Arial" charset="0"/>
-                      </a:endParaRPr>
-                    </a:p>
-                  </a:txBody>
-                  <a:tcPr marL="53340" marR="53340" marT="53340" marB="53340" anchor="t">
-                    <a:lnL w="12700" cap="flat" cmpd="sng" algn="ctr">
-                      <a:solidFill>
-                        <a:srgbClr val="C8C8C7"/>
-                      </a:solidFill>
-                      <a:prstDash val="solid"/>
-                      <a:round/>
-                      <a:headEnd type="none" w="med" len="med"/>
-                      <a:tailEnd type="none" w="med" len="med"/>
-                    </a:lnL>
-                    <a:lnR w="12700" cap="flat" cmpd="sng" algn="ctr">
-                      <a:solidFill>
-                        <a:srgbClr val="C8C8C7"/>
-                      </a:solidFill>
-                      <a:prstDash val="solid"/>
-                      <a:round/>
-                      <a:headEnd type="none" w="med" len="med"/>
-                      <a:tailEnd type="none" w="med" len="med"/>
-                    </a:lnR>
-                    <a:lnT w="12700" cap="flat" cmpd="sng" algn="ctr">
-                      <a:solidFill>
-                        <a:srgbClr val="CBCBCB"/>
-                      </a:solidFill>
-                      <a:prstDash val="solid"/>
-                      <a:round/>
-                      <a:headEnd type="none" w="med" len="med"/>
-                      <a:tailEnd type="none" w="med" len="med"/>
-                    </a:lnT>
-                    <a:lnB w="12700" cap="flat" cmpd="sng" algn="ctr">
-                      <a:solidFill>
-                        <a:srgbClr val="C8C8C7"/>
-                      </a:solidFill>
-                      <a:prstDash val="solid"/>
-                      <a:round/>
-                      <a:headEnd type="none" w="med" len="med"/>
-                      <a:tailEnd type="none" w="med" len="med"/>
-                    </a:lnB>
-                    <a:solidFill>
-                      <a:srgbClr val="FBFBFA"/>
-                    </a:solidFill>
-                  </a:tcPr>
-                </a:tc>
-              </a:tr>
-              <a:tr h="332647">
-                <a:tc>
-                  <a:txBody>
-                    <a:bodyPr/>
-                    <a:lstStyle/>
-                    <a:p>
-                      <a:pPr indent="0" marL="0">
-                        <a:lnSpc>
-                          <a:spcPts val="1680"/>
-                        </a:lnSpc>
-                        <a:buNone/>
-                      </a:pPr>
-                      <a:r>
-                        <a:rPr lang="en-US" sz="1200" dirty="0">
-                          <a:solidFill>
-                            <a:srgbClr val="233441"/>
-                          </a:solidFill>
-                          <a:latin typeface="Arial" pitchFamily="34" charset="0"/>
-                          <a:ea typeface="Arial" pitchFamily="34" charset="-122"/>
-                          <a:cs typeface="Arial" pitchFamily="34" charset="-120"/>
-                        </a:rPr>
-                        <a:t>Total a 55 €/h</a:t>
-                      </a:r>
-                      <a:endParaRPr lang="en-US" sz="1200" dirty="0">
-                        <a:latin typeface="Arial" charset="0"/>
-                        <a:ea typeface="Arial" charset="0"/>
-                        <a:cs typeface="Arial" charset="0"/>
-                      </a:endParaRPr>
-                    </a:p>
-                  </a:txBody>
-                  <a:tcPr marL="53340" marR="53340" marT="53340" marB="53340" anchor="t">
-                    <a:lnL w="12700" cap="flat" cmpd="sng" algn="ctr">
-                      <a:solidFill>
-                        <a:srgbClr val="CBCBCB"/>
-                      </a:solidFill>
-                      <a:prstDash val="solid"/>
-                      <a:round/>
-                      <a:headEnd type="none" w="med" len="med"/>
-                      <a:tailEnd type="none" w="med" len="med"/>
-                    </a:lnL>
-                    <a:lnR w="12700" cap="flat" cmpd="sng" algn="ctr">
-                      <a:solidFill>
-                        <a:srgbClr val="CBCBCB"/>
-                      </a:solidFill>
-                      <a:prstDash val="solid"/>
-                      <a:round/>
-                      <a:headEnd type="none" w="med" len="med"/>
-                      <a:tailEnd type="none" w="med" len="med"/>
-                    </a:lnR>
-                    <a:lnT w="12700" cap="flat" cmpd="sng" algn="ctr">
-                      <a:solidFill>
-                        <a:srgbClr val="C8C8C7"/>
-                      </a:solidFill>
-                      <a:prstDash val="solid"/>
-                      <a:round/>
-                      <a:headEnd type="none" w="med" len="med"/>
-                      <a:tailEnd type="none" w="med" len="med"/>
-                    </a:lnT>
-                    <a:lnB w="12700" cap="flat" cmpd="sng" algn="ctr">
-                      <a:solidFill>
-                        <a:srgbClr val="CBCBCB"/>
-                      </a:solidFill>
-                      <a:prstDash val="solid"/>
-                      <a:round/>
-                      <a:headEnd type="none" w="med" len="med"/>
-                      <a:tailEnd type="none" w="med" len="med"/>
-                    </a:lnB>
-                  </a:tcPr>
-                </a:tc>
-                <a:tc>
-                  <a:txBody>
-                    <a:bodyPr/>
-                    <a:lstStyle/>
-                    <a:p>
-                      <a:pPr algn="r" indent="0" marL="0">
-                        <a:lnSpc>
-                          <a:spcPts val="1680"/>
-                        </a:lnSpc>
-                        <a:buNone/>
-                      </a:pPr>
-                      <a:r>
-                        <a:rPr lang="en-US" sz="1200" dirty="0">
-                          <a:solidFill>
-                            <a:srgbClr val="233441"/>
-                          </a:solidFill>
-                          <a:latin typeface="Arial" pitchFamily="34" charset="0"/>
-                          <a:ea typeface="Arial" pitchFamily="34" charset="-122"/>
-                          <a:cs typeface="Arial" pitchFamily="34" charset="-120"/>
-                        </a:rPr>
-                        <a:t>340 h</a:t>
-                      </a:r>
-                      <a:endParaRPr lang="en-US" sz="1200" dirty="0">
-                        <a:latin typeface="Arial" charset="0"/>
-                        <a:ea typeface="Arial" charset="0"/>
-                        <a:cs typeface="Arial" charset="0"/>
-                      </a:endParaRPr>
-                    </a:p>
-                  </a:txBody>
-                  <a:tcPr marL="53340" marR="53340" marT="53340" marB="53340" anchor="t">
-                    <a:lnL w="12700" cap="flat" cmpd="sng" algn="ctr">
-                      <a:solidFill>
-                        <a:srgbClr val="CBCBCB"/>
-                      </a:solidFill>
-                      <a:prstDash val="solid"/>
-                      <a:round/>
-                      <a:headEnd type="none" w="med" len="med"/>
-                      <a:tailEnd type="none" w="med" len="med"/>
-                    </a:lnL>
-                    <a:lnR w="12700" cap="flat" cmpd="sng" algn="ctr">
-                      <a:solidFill>
-                        <a:srgbClr val="CBCBCB"/>
-                      </a:solidFill>
-                      <a:prstDash val="solid"/>
-                      <a:round/>
-                      <a:headEnd type="none" w="med" len="med"/>
-                      <a:tailEnd type="none" w="med" len="med"/>
-                    </a:lnR>
-                    <a:lnT w="12700" cap="flat" cmpd="sng" algn="ctr">
-                      <a:solidFill>
-                        <a:srgbClr val="C8C8C7"/>
-                      </a:solidFill>
-                      <a:prstDash val="solid"/>
-                      <a:round/>
-                      <a:headEnd type="none" w="med" len="med"/>
-                      <a:tailEnd type="none" w="med" len="med"/>
-                    </a:lnT>
-                    <a:lnB w="12700" cap="flat" cmpd="sng" algn="ctr">
-                      <a:solidFill>
-                        <a:srgbClr val="CBCBCB"/>
-                      </a:solidFill>
-                      <a:prstDash val="solid"/>
-                      <a:round/>
-                      <a:headEnd type="none" w="med" len="med"/>
-                      <a:tailEnd type="none" w="med" len="med"/>
-                    </a:lnB>
-                  </a:tcPr>
-                </a:tc>
-              </a:tr>
-              <a:tr h="332647">
-                <a:tc>
-                  <a:txBody>
-                    <a:bodyPr/>
-                    <a:lstStyle/>
-                    <a:p>
-                      <a:pPr indent="0" marL="0">
-                        <a:lnSpc>
-                          <a:spcPts val="1680"/>
-                        </a:lnSpc>
-                        <a:buNone/>
-                      </a:pPr>
-                      <a:r>
-                        <a:rPr lang="en-US" sz="1200" dirty="0">
-                          <a:solidFill>
-                            <a:srgbClr val="233441"/>
-                          </a:solidFill>
-                          <a:latin typeface="Arial" pitchFamily="34" charset="0"/>
-                          <a:ea typeface="Arial" pitchFamily="34" charset="-122"/>
-                          <a:cs typeface="Arial" pitchFamily="34" charset="-120"/>
-                        </a:rPr>
-                        <a:t>Coste del proyecto</a:t>
-                      </a:r>
-                      <a:endParaRPr lang="en-US" sz="1200" dirty="0">
-                        <a:latin typeface="Arial" charset="0"/>
-                        <a:ea typeface="Arial" charset="0"/>
-                        <a:cs typeface="Arial" charset="0"/>
-                      </a:endParaRPr>
-                    </a:p>
-                  </a:txBody>
-                  <a:tcPr marL="53340" marR="53340" marT="53340" marB="53340" anchor="t">
-                    <a:lnL w="12700" cap="flat" cmpd="sng" algn="ctr">
-                      <a:solidFill>
-                        <a:srgbClr val="CBCBCB"/>
+                        <a:srgbClr val="CBC5C1"/>
                       </a:solidFill>
                       <a:prstDash val="solid"/>
                       <a:round/>
@@ -6514,7 +6287,7 @@
                           <a:ea typeface="Arial" pitchFamily="34" charset="-122"/>
                           <a:cs typeface="Arial" pitchFamily="34" charset="-120"/>
                         </a:rPr>
-                        <a:t>18.700 €</a:t>
+                        <a:t>40,83 · 83 %</a:t>
                       </a:r>
                       <a:endParaRPr lang="en-US" sz="1200" dirty="0">
                         <a:latin typeface="Arial" charset="0"/>
@@ -6570,9 +6343,130 @@
           </a:graphicData>
         </a:graphic>
       </p:graphicFrame>
+      <p:sp>
+        <p:nvSpPr>
+          <p:cNvPr id="5" name="Shape 2"/>
+          <p:cNvSpPr/>
+          <p:nvPr/>
+        </p:nvSpPr>
+        <p:spPr>
+          <a:xfrm>
+            <a:off x="971550" y="4195502"/>
+            <a:ext cx="10248900" cy="467320"/>
+          </a:xfrm>
+          <a:prstGeom prst="roundRect">
+            <a:avLst>
+              <a:gd name="adj" fmla="val 19023"/>
+            </a:avLst>
+          </a:prstGeom>
+          <a:solidFill>
+            <a:srgbClr val="F5F5F5"/>
+          </a:solidFill>
+          <a:ln/>
+        </p:spPr>
+      </p:sp>
+      <p:sp>
+        <p:nvSpPr>
+          <p:cNvPr id="6" name="Text 3"/>
+          <p:cNvSpPr/>
+          <p:nvPr/>
+        </p:nvSpPr>
+        <p:spPr>
+          <a:xfrm>
+            <a:off x="1149350" y="4322502"/>
+            <a:ext cx="1144521" cy="238720"/>
+          </a:xfrm>
+          <a:prstGeom prst="rect">
+            <a:avLst/>
+          </a:prstGeom>
+          <a:noFill/>
+          <a:ln/>
+        </p:spPr>
+        <p:txBody>
+          <a:bodyPr wrap="none" lIns="0" tIns="0" rIns="0" bIns="0" rtlCol="0" anchor="t">
+            <a:normAutofit/>
+          </a:bodyPr>
+          <a:lstStyle/>
+          <a:p>
+            <a:pPr algn="l" indent="0" marL="0">
+              <a:lnSpc>
+                <a:spcPts val="1680"/>
+              </a:lnSpc>
+              <a:buNone/>
+            </a:pPr>
+            <a:r>
+              <a:rPr lang="en-US" sz="1200" b="1" spc="100" kern="0" dirty="0">
+                <a:solidFill>
+                  <a:srgbClr val="F4631E"/>
+                </a:solidFill>
+                <a:latin typeface="Arial" pitchFamily="34" charset="0"/>
+                <a:ea typeface="Arial" pitchFamily="34" charset="-122"/>
+                <a:cs typeface="Arial" pitchFamily="34" charset="-120"/>
+              </a:rPr>
+              <a:t>DESARROLLO</a:t>
+            </a:r>
+            <a:endParaRPr lang="en-US" sz="1200" dirty="0"/>
+          </a:p>
+        </p:txBody>
+      </p:sp>
+      <p:sp>
+        <p:nvSpPr>
+          <p:cNvPr id="7" name="Text 4"/>
+          <p:cNvSpPr/>
+          <p:nvPr/>
+        </p:nvSpPr>
+        <p:spPr>
+          <a:xfrm>
+            <a:off x="2420871" y="4326272"/>
+            <a:ext cx="8726185" cy="231114"/>
+          </a:xfrm>
+          <a:prstGeom prst="rect">
+            <a:avLst/>
+          </a:prstGeom>
+          <a:noFill/>
+          <a:ln/>
+        </p:spPr>
+        <p:txBody>
+          <a:bodyPr wrap="square" lIns="0" tIns="0" rIns="0" bIns="0" rtlCol="0" anchor="t">
+            <a:normAutofit/>
+          </a:bodyPr>
+          <a:lstStyle/>
+          <a:p>
+            <a:pPr algn="l" indent="0" marL="0">
+              <a:lnSpc>
+                <a:spcPts val="1620"/>
+              </a:lnSpc>
+              <a:buNone/>
+            </a:pPr>
+            <a:r>
+              <a:rPr lang="en-US" sz="1200" dirty="0">
+                <a:solidFill>
+                  <a:srgbClr val="233441"/>
+                </a:solidFill>
+                <a:latin typeface="Arial" pitchFamily="34" charset="0"/>
+                <a:ea typeface="Arial" pitchFamily="34" charset="-122"/>
+                <a:cs typeface="Arial" pitchFamily="34" charset="-120"/>
+              </a:rPr>
+              <a:t>Diseño y specs 60 h · Backend y frontend 180 h · Validación y evals 70 h · Despliegue 30 h = </a:t>
+            </a:r>
+            <a:r>
+              <a:rPr lang="en-US" sz="1200" b="1" dirty="0">
+                <a:solidFill>
+                  <a:srgbClr val="233441"/>
+                </a:solidFill>
+                <a:latin typeface="Arial" pitchFamily="34" charset="0"/>
+                <a:ea typeface="Arial" pitchFamily="34" charset="-122"/>
+                <a:cs typeface="Arial" pitchFamily="34" charset="-120"/>
+              </a:rPr>
+              <a:t>340 h × 45 USD/h = 15.300 USD</a:t>
+            </a:r>
+            <a:endParaRPr lang="en-US" sz="1200" dirty="0"/>
+          </a:p>
+        </p:txBody>
+      </p:sp>
       <p:pic>
         <p:nvPicPr>
-          <p:cNvPr id="6" name="Image 0" descr="preencoded.png">    </p:cNvPr>
+          <p:cNvPr id="8" name="Image 0" descr="preencoded.png">    </p:cNvPr>
           <p:cNvPicPr>
             <a:picLocks noChangeAspect="1"/>
           </p:cNvPicPr>
@@ -6595,7 +6489,7 @@
       </p:pic>
       <p:sp>
         <p:nvSpPr>
-          <p:cNvPr id="7" name="Text 2"/>
+          <p:cNvPr id="9" name="Text 5"/>
           <p:cNvSpPr/>
           <p:nvPr/>
         </p:nvSpPr>
@@ -6631,7 +6525,7 @@
                 <a:ea typeface="Arial" pitchFamily="34" charset="-122"/>
                 <a:cs typeface="Arial" pitchFamily="34" charset="-120"/>
               </a:rPr>
-              <a:t>© Qaracter group, all rights reserved 2026 · Tokens: medido en Langfuse, 3,45 USD en 7 capítulos · resto: supuestos razonados</a:t>
+              <a:t>© Qaracter group, all rights reserved 2026 · Mercado: México · 1 USD ≈ 17,6 MXN (DOF, 25-09-2026) · fuentes en las notas</a:t>
             </a:r>
             <a:endParaRPr lang="en-US" sz="1200" dirty="0"/>
           </a:p>
@@ -6772,7 +6666,7 @@
           </p:nvPr>
         </p:nvGraphicFramePr>
         <p:xfrm>
-          <a:off x="984250" y="1529029"/>
+          <a:off x="984250" y="1503629"/>
           <a:ext cx="10236200" cy="1330590"/>
         </p:xfrm>
         <a:graphic>
@@ -6780,11 +6674,11 @@
             <a:tbl>
               <a:tblPr/>
               <a:tblGrid>
-                <a:gridCol w="2866136"/>
+                <a:gridCol w="2251964"/>
+                <a:gridCol w="1944878"/>
+                <a:gridCol w="1944878"/>
                 <a:gridCol w="1842516"/>
-                <a:gridCol w="1842516"/>
-                <a:gridCol w="1842516"/>
-                <a:gridCol w="1842516"/>
+                <a:gridCol w="2251964"/>
               </a:tblGrid>
               <a:tr h="332647">
                 <a:tc>
@@ -7232,7 +7126,7 @@
                           <a:ea typeface="Arial" pitchFamily="34" charset="-122"/>
                           <a:cs typeface="Arial" pitchFamily="34" charset="-120"/>
                         </a:rPr>
-                        <a:t>4.900 €</a:t>
+                        <a:t>4.900 USD</a:t>
                       </a:r>
                       <a:endParaRPr lang="en-US" sz="1200" dirty="0">
                         <a:latin typeface="Arial" charset="0"/>
@@ -7300,7 +7194,7 @@
                           <a:ea typeface="Arial" pitchFamily="34" charset="-122"/>
                           <a:cs typeface="Arial" pitchFamily="34" charset="-120"/>
                         </a:rPr>
-                        <a:t>720 €</a:t>
+                        <a:t>817 USD</a:t>
                       </a:r>
                       <a:endParaRPr lang="en-US" sz="1200" dirty="0">
                         <a:latin typeface="Arial" charset="0"/>
@@ -7368,7 +7262,7 @@
                           <a:ea typeface="Arial" pitchFamily="34" charset="-122"/>
                           <a:cs typeface="Arial" pitchFamily="34" charset="-120"/>
                         </a:rPr>
-                        <a:t>1.650 €</a:t>
+                        <a:t>978 USD</a:t>
                       </a:r>
                       <a:endParaRPr lang="en-US" sz="1200" dirty="0">
                         <a:latin typeface="Arial" charset="0"/>
@@ -7436,7 +7330,7 @@
                           <a:ea typeface="Arial" pitchFamily="34" charset="-122"/>
                           <a:cs typeface="Arial" pitchFamily="34" charset="-120"/>
                         </a:rPr>
-                        <a:t>2.530 € · 52 %</a:t>
+                        <a:t>3.105 USD · 63 %</a:t>
                       </a:r>
                       <a:endParaRPr lang="en-US" sz="1200" dirty="0">
                         <a:latin typeface="Arial" charset="0"/>
@@ -7577,7 +7471,7 @@
                           <a:ea typeface="Arial" pitchFamily="34" charset="-122"/>
                           <a:cs typeface="Arial" pitchFamily="34" charset="-120"/>
                         </a:rPr>
-                        <a:t>24.500 €</a:t>
+                        <a:t>24.500 USD</a:t>
                       </a:r>
                       <a:endParaRPr lang="en-US" sz="1200" dirty="0">
                         <a:latin typeface="Arial" charset="0"/>
@@ -7648,7 +7542,7 @@
                           <a:ea typeface="Arial" pitchFamily="34" charset="-122"/>
                           <a:cs typeface="Arial" pitchFamily="34" charset="-120"/>
                         </a:rPr>
-                        <a:t>3.600 €</a:t>
+                        <a:t>4.085 USD</a:t>
                       </a:r>
                       <a:endParaRPr lang="en-US" sz="1200" dirty="0">
                         <a:latin typeface="Arial" charset="0"/>
@@ -7719,7 +7613,7 @@
                           <a:ea typeface="Arial" pitchFamily="34" charset="-122"/>
                           <a:cs typeface="Arial" pitchFamily="34" charset="-120"/>
                         </a:rPr>
-                        <a:t>1.650 €</a:t>
+                        <a:t>978 USD</a:t>
                       </a:r>
                       <a:endParaRPr lang="en-US" sz="1200" dirty="0">
                         <a:latin typeface="Arial" charset="0"/>
@@ -7790,7 +7684,7 @@
                           <a:ea typeface="Arial" pitchFamily="34" charset="-122"/>
                           <a:cs typeface="Arial" pitchFamily="34" charset="-120"/>
                         </a:rPr>
-                        <a:t>19.250 € · 79 %</a:t>
+                        <a:t>19.437 USD · 79 %</a:t>
                       </a:r>
                       <a:endParaRPr lang="en-US" sz="1200" dirty="0">
                         <a:latin typeface="Arial" charset="0"/>
@@ -7931,7 +7825,7 @@
                           <a:ea typeface="Arial" pitchFamily="34" charset="-122"/>
                           <a:cs typeface="Arial" pitchFamily="34" charset="-120"/>
                         </a:rPr>
-                        <a:t>98.000 €</a:t>
+                        <a:t>98.000 USD</a:t>
                       </a:r>
                       <a:endParaRPr lang="en-US" sz="1200" dirty="0">
                         <a:latin typeface="Arial" charset="0"/>
@@ -7999,7 +7893,7 @@
                           <a:ea typeface="Arial" pitchFamily="34" charset="-122"/>
                           <a:cs typeface="Arial" pitchFamily="34" charset="-120"/>
                         </a:rPr>
-                        <a:t>14.400 €</a:t>
+                        <a:t>16.340 USD</a:t>
                       </a:r>
                       <a:endParaRPr lang="en-US" sz="1200" dirty="0">
                         <a:latin typeface="Arial" charset="0"/>
@@ -8067,7 +7961,7 @@
                           <a:ea typeface="Arial" pitchFamily="34" charset="-122"/>
                           <a:cs typeface="Arial" pitchFamily="34" charset="-120"/>
                         </a:rPr>
-                        <a:t>3.000 €</a:t>
+                        <a:t>2.000 USD</a:t>
                       </a:r>
                       <a:endParaRPr lang="en-US" sz="1200" dirty="0">
                         <a:latin typeface="Arial" charset="0"/>
@@ -8135,7 +8029,7 @@
                           <a:ea typeface="Arial" pitchFamily="34" charset="-122"/>
                           <a:cs typeface="Arial" pitchFamily="34" charset="-120"/>
                         </a:rPr>
-                        <a:t>80.600 € · 82 %</a:t>
+                        <a:t>79.660 USD · 81 %</a:t>
                       </a:r>
                       <a:endParaRPr lang="en-US" sz="1200" dirty="0">
                         <a:latin typeface="Arial" charset="0"/>
@@ -8190,18 +8084,117 @@
       </p:graphicFrame>
       <p:sp>
         <p:nvSpPr>
-          <p:cNvPr id="5" name="Shape 2"/>
-          <p:cNvSpPr/>
-          <p:nvPr/>
-        </p:nvSpPr>
-        <p:spPr>
-          <a:xfrm>
-            <a:off x="977900" y="3043771"/>
-            <a:ext cx="5048250" cy="1074341"/>
+          <p:cNvPr id="5" name="Text 2"/>
+          <p:cNvSpPr/>
+          <p:nvPr/>
+        </p:nvSpPr>
+        <p:spPr>
+          <a:xfrm>
+            <a:off x="971550" y="2986621"/>
+            <a:ext cx="10556367" cy="452041"/>
+          </a:xfrm>
+          <a:prstGeom prst="rect">
+            <a:avLst/>
+          </a:prstGeom>
+          <a:noFill/>
+          <a:ln/>
+        </p:spPr>
+        <p:txBody>
+          <a:bodyPr wrap="square" lIns="0" tIns="0" rIns="0" bIns="0" rtlCol="0" anchor="t">
+            <a:normAutofit/>
+          </a:bodyPr>
+          <a:lstStyle/>
+          <a:p>
+            <a:pPr algn="l" indent="0" marL="0">
+              <a:lnSpc>
+                <a:spcPts val="1680"/>
+              </a:lnSpc>
+              <a:buNone/>
+            </a:pPr>
+            <a:r>
+              <a:rPr lang="en-US" sz="1200" b="1" dirty="0">
+                <a:solidFill>
+                  <a:srgbClr val="3C4645"/>
+                </a:solidFill>
+                <a:latin typeface="Arial" pitchFamily="34" charset="0"/>
+                <a:ea typeface="Arial" pitchFamily="34" charset="-122"/>
+                <a:cs typeface="Arial" pitchFamily="34" charset="-120"/>
+              </a:rPr>
+              <a:t>Ingresos</a:t>
+            </a:r>
+            <a:r>
+              <a:rPr lang="en-US" sz="1200" dirty="0">
+                <a:solidFill>
+                  <a:srgbClr val="3C4645"/>
+                </a:solidFill>
+                <a:latin typeface="Arial" pitchFamily="34" charset="0"/>
+                <a:ea typeface="Arial" pitchFamily="34" charset="-122"/>
+                <a:cs typeface="Arial" pitchFamily="34" charset="-120"/>
+              </a:rPr>
+              <a:t> = novelas × 49 USD · </a:t>
+            </a:r>
+            <a:r>
+              <a:rPr lang="en-US" sz="1200" b="1" dirty="0">
+                <a:solidFill>
+                  <a:srgbClr val="3C4645"/>
+                </a:solidFill>
+                <a:latin typeface="Arial" pitchFamily="34" charset="0"/>
+                <a:ea typeface="Arial" pitchFamily="34" charset="-122"/>
+                <a:cs typeface="Arial" pitchFamily="34" charset="-120"/>
+              </a:rPr>
+              <a:t>Variable</a:t>
+            </a:r>
+            <a:r>
+              <a:rPr lang="en-US" sz="1200" dirty="0">
+                <a:solidFill>
+                  <a:srgbClr val="3C4645"/>
+                </a:solidFill>
+                <a:latin typeface="Arial" pitchFamily="34" charset="0"/>
+                <a:ea typeface="Arial" pitchFamily="34" charset="-122"/>
+                <a:cs typeface="Arial" pitchFamily="34" charset="-120"/>
+              </a:rPr>
+              <a:t> = novelas × 8,17 USD (tokens, pasarela, soporte) · </a:t>
+            </a:r>
+            <a:r>
+              <a:rPr lang="en-US" sz="1200" b="1" dirty="0">
+                <a:solidFill>
+                  <a:srgbClr val="3C4645"/>
+                </a:solidFill>
+                <a:latin typeface="Arial" pitchFamily="34" charset="0"/>
+                <a:ea typeface="Arial" pitchFamily="34" charset="-122"/>
+                <a:cs typeface="Arial" pitchFamily="34" charset="-120"/>
+              </a:rPr>
+              <a:t>Fijo</a:t>
+            </a:r>
+            <a:r>
+              <a:rPr lang="en-US" sz="1200" dirty="0">
+                <a:solidFill>
+                  <a:srgbClr val="3C4645"/>
+                </a:solidFill>
+                <a:latin typeface="Arial" pitchFamily="34" charset="0"/>
+                <a:ea typeface="Arial" pitchFamily="34" charset="-122"/>
+                <a:cs typeface="Arial" pitchFamily="34" charset="-120"/>
+              </a:rPr>
+              <a:t> al mes = servidor 29 + Langfuse Core 29 + dominio y correo 20 + mantenimiento 20 h × 45 = 978 USD. A 2.000 novelas: servidor con Postgres gestionado (150) y 40 h de mantenimiento.</a:t>
+            </a:r>
+            <a:endParaRPr lang="en-US" sz="1200" dirty="0"/>
+          </a:p>
+        </p:txBody>
+      </p:sp>
+      <p:sp>
+        <p:nvSpPr>
+          <p:cNvPr id="6" name="Shape 3"/>
+          <p:cNvSpPr/>
+          <p:nvPr/>
+        </p:nvSpPr>
+        <p:spPr>
+          <a:xfrm>
+            <a:off x="977900" y="3572011"/>
+            <a:ext cx="5048250" cy="1023541"/>
           </a:xfrm>
           <a:prstGeom prst="roundRect">
             <a:avLst>
-              <a:gd name="adj" fmla="val 7684"/>
+              <a:gd name="adj" fmla="val 8065"/>
             </a:avLst>
           </a:prstGeom>
           <a:noFill/>
@@ -8215,13 +8208,13 @@
       </p:sp>
       <p:sp>
         <p:nvSpPr>
-          <p:cNvPr id="6" name="Text 3"/>
-          <p:cNvSpPr/>
-          <p:nvPr/>
-        </p:nvSpPr>
-        <p:spPr>
-          <a:xfrm>
-            <a:off x="1162050" y="3227921"/>
+          <p:cNvPr id="7" name="Text 4"/>
+          <p:cNvSpPr/>
+          <p:nvPr/>
+        </p:nvSpPr>
+        <p:spPr>
+          <a:xfrm>
+            <a:off x="1162050" y="3730761"/>
             <a:ext cx="4820349" cy="254000"/>
           </a:xfrm>
           <a:prstGeom prst="rect">
@@ -8259,13 +8252,13 @@
       </p:sp>
       <p:sp>
         <p:nvSpPr>
-          <p:cNvPr id="7" name="Text 4"/>
-          <p:cNvSpPr/>
-          <p:nvPr/>
-        </p:nvSpPr>
-        <p:spPr>
-          <a:xfrm>
-            <a:off x="1162050" y="3507321"/>
+          <p:cNvPr id="8" name="Text 5"/>
+          <p:cNvSpPr/>
+          <p:nvPr/>
+        </p:nvSpPr>
+        <p:spPr>
+          <a:xfrm>
+            <a:off x="1162050" y="4010161"/>
             <a:ext cx="4820349" cy="452041"/>
           </a:xfrm>
           <a:prstGeom prst="rect">
@@ -8295,7 +8288,7 @@
                 <a:ea typeface="Arial" pitchFamily="34" charset="-122"/>
                 <a:cs typeface="Arial" pitchFamily="34" charset="-120"/>
               </a:rPr>
-              <a:t>+2,25 € por novela; el margen unitario baja del 85 % al 81 %. Sigue siendo rentable, pero el modelo ya pesa.</a:t>
+              <a:t>+2,45 USD por novela: el coste unitario pasa a 10,62 y el margen baja del 83 % al 78 %.</a:t>
             </a:r>
             <a:endParaRPr lang="en-US" sz="1200" dirty="0"/>
           </a:p>
@@ -8303,18 +8296,18 @@
       </p:sp>
       <p:sp>
         <p:nvSpPr>
-          <p:cNvPr id="8" name="Shape 5"/>
-          <p:cNvSpPr/>
-          <p:nvPr/>
-        </p:nvSpPr>
-        <p:spPr>
-          <a:xfrm>
-            <a:off x="6165850" y="3043771"/>
-            <a:ext cx="5048250" cy="1074341"/>
+          <p:cNvPr id="9" name="Shape 6"/>
+          <p:cNvSpPr/>
+          <p:nvPr/>
+        </p:nvSpPr>
+        <p:spPr>
+          <a:xfrm>
+            <a:off x="6165850" y="3572011"/>
+            <a:ext cx="5048250" cy="1023541"/>
           </a:xfrm>
           <a:prstGeom prst="roundRect">
             <a:avLst>
-              <a:gd name="adj" fmla="val 7684"/>
+              <a:gd name="adj" fmla="val 8065"/>
             </a:avLst>
           </a:prstGeom>
           <a:noFill/>
@@ -8328,13 +8321,13 @@
       </p:sp>
       <p:sp>
         <p:nvSpPr>
-          <p:cNvPr id="9" name="Text 6"/>
-          <p:cNvSpPr/>
-          <p:nvPr/>
-        </p:nvSpPr>
-        <p:spPr>
-          <a:xfrm>
-            <a:off x="6350000" y="3227921"/>
+          <p:cNvPr id="10" name="Text 7"/>
+          <p:cNvSpPr/>
+          <p:nvPr/>
+        </p:nvSpPr>
+        <p:spPr>
+          <a:xfrm>
+            <a:off x="6350000" y="3730761"/>
             <a:ext cx="4820349" cy="254000"/>
           </a:xfrm>
           <a:prstGeom prst="rect">
@@ -8372,13 +8365,13 @@
       </p:sp>
       <p:sp>
         <p:nvSpPr>
-          <p:cNvPr id="10" name="Text 7"/>
-          <p:cNvSpPr/>
-          <p:nvPr/>
-        </p:nvSpPr>
-        <p:spPr>
-          <a:xfrm>
-            <a:off x="6350000" y="3507321"/>
+          <p:cNvPr id="11" name="Text 8"/>
+          <p:cNvSpPr/>
+          <p:nvPr/>
+        </p:nvSpPr>
+        <p:spPr>
+          <a:xfrm>
+            <a:off x="6350000" y="4010161"/>
             <a:ext cx="4820349" cy="452041"/>
           </a:xfrm>
           <a:prstGeom prst="rect">
@@ -8408,7 +8401,7 @@
                 <a:ea typeface="Arial" pitchFamily="34" charset="-122"/>
                 <a:cs typeface="Arial" pitchFamily="34" charset="-120"/>
               </a:rPr>
-              <a:t>Cada revisión regenera solo los capítulos afectados: unos 0,45 € por capítulo afectado. Tres incluidas; desde la cuarta, 4,90 €.</a:t>
+              <a:t>Cada una regenera solo los capítulos afectados, a 0,49 USD cada uno. Tres incluidas; desde la cuarta, 4,90 USD.</a:t>
             </a:r>
             <a:endParaRPr lang="en-US" sz="1200" dirty="0"/>
           </a:p>
@@ -8416,7 +8409,7 @@
       </p:sp>
       <p:pic>
         <p:nvPicPr>
-          <p:cNvPr id="11" name="Image 0" descr="preencoded.png">    </p:cNvPr>
+          <p:cNvPr id="12" name="Image 0" descr="preencoded.png">    </p:cNvPr>
           <p:cNvPicPr>
             <a:picLocks noChangeAspect="1"/>
           </p:cNvPicPr>
@@ -8439,7 +8432,7 @@
       </p:pic>
       <p:sp>
         <p:nvSpPr>
-          <p:cNvPr id="12" name="Text 8"/>
+          <p:cNvPr id="13" name="Text 9"/>
           <p:cNvSpPr/>
           <p:nvPr/>
         </p:nvSpPr>
@@ -8475,7 +8468,7 @@
                 <a:ea typeface="Arial" pitchFamily="34" charset="-122"/>
                 <a:cs typeface="Arial" pitchFamily="34" charset="-120"/>
               </a:rPr>
-              <a:t>© Qaracter group, all rights reserved 2026 · Variable 7,20 €/novela · fijo: infraestructura y mantenimiento</a:t>
+              <a:t>© Qaracter group, all rights reserved 2026 · Mercado: México · fuentes del fijo en las notas</a:t>
             </a:r>
             <a:endParaRPr lang="en-US" sz="1200" dirty="0"/>
           </a:p>
@@ -8513,6 +8506,1702 @@
           <a:chExt cx="0" cy="0"/>
         </a:xfrm>
       </p:grpSpPr>
+      <p:sp>
+        <p:nvSpPr>
+          <p:cNvPr id="2" name="Text 0"/>
+          <p:cNvSpPr/>
+          <p:nvPr/>
+        </p:nvSpPr>
+        <p:spPr>
+          <a:xfrm>
+            <a:off x="971550" y="711200"/>
+            <a:ext cx="10556367" cy="238720"/>
+          </a:xfrm>
+          <a:prstGeom prst="rect">
+            <a:avLst/>
+          </a:prstGeom>
+          <a:noFill/>
+          <a:ln/>
+        </p:spPr>
+        <p:txBody>
+          <a:bodyPr wrap="square" lIns="0" tIns="0" rIns="0" bIns="0" rtlCol="0" anchor="t">
+            <a:normAutofit/>
+          </a:bodyPr>
+          <a:lstStyle/>
+          <a:p>
+            <a:pPr algn="l" indent="0" marL="0">
+              <a:lnSpc>
+                <a:spcPts val="1680"/>
+              </a:lnSpc>
+              <a:buNone/>
+            </a:pPr>
+            <a:r>
+              <a:rPr lang="en-US" sz="1200" b="1" spc="150" kern="0" dirty="0">
+                <a:solidFill>
+                  <a:srgbClr val="FF7932"/>
+                </a:solidFill>
+                <a:latin typeface="Arial" pitchFamily="34" charset="0"/>
+                <a:ea typeface="Arial" pitchFamily="34" charset="-122"/>
+                <a:cs typeface="Arial" pitchFamily="34" charset="-120"/>
+              </a:rPr>
+              <a:t>12 · RIESGOS Y SIGUIENTES PASOS</a:t>
+            </a:r>
+            <a:endParaRPr lang="en-US" sz="1200" dirty="0"/>
+          </a:p>
+        </p:txBody>
+      </p:sp>
+      <p:sp>
+        <p:nvSpPr>
+          <p:cNvPr id="3" name="Text 1"/>
+          <p:cNvSpPr/>
+          <p:nvPr/>
+        </p:nvSpPr>
+        <p:spPr>
+          <a:xfrm>
+            <a:off x="971550" y="975320"/>
+            <a:ext cx="10556367" cy="388607"/>
+          </a:xfrm>
+          <a:prstGeom prst="rect">
+            <a:avLst/>
+          </a:prstGeom>
+          <a:noFill/>
+          <a:ln/>
+        </p:spPr>
+        <p:txBody>
+          <a:bodyPr wrap="square" lIns="0" tIns="0" rIns="0" bIns="0" rtlCol="0" anchor="t">
+            <a:normAutofit/>
+          </a:bodyPr>
+          <a:lstStyle/>
+          <a:p>
+            <a:pPr algn="l" indent="0" marL="0">
+              <a:lnSpc>
+                <a:spcPts val="2860"/>
+              </a:lnSpc>
+              <a:buNone/>
+            </a:pPr>
+            <a:r>
+              <a:rPr lang="en-US" sz="2600" b="1" spc="-50" kern="0" dirty="0">
+                <a:solidFill>
+                  <a:srgbClr val="233441"/>
+                </a:solidFill>
+                <a:latin typeface="Arial" pitchFamily="34" charset="0"/>
+                <a:ea typeface="Arial" pitchFamily="34" charset="-122"/>
+                <a:cs typeface="Arial" pitchFamily="34" charset="-120"/>
+              </a:rPr>
+              <a:t>Los riesgos que vimos en la corrida real, y qué haríamos después</a:t>
+            </a:r>
+            <a:endParaRPr lang="en-US" sz="2600" dirty="0"/>
+          </a:p>
+        </p:txBody>
+      </p:sp>
+      <p:graphicFrame>
+        <p:nvGraphicFramePr>
+          <p:cNvPr id="4" name="Table 0"/>
+          <p:cNvGraphicFramePr>
+            <a:graphicFrameLocks noGrp="1"/>
+          </p:cNvGraphicFramePr>
+          <p:nvPr>
+            <p:extLst>
+              <p:ext uri="{D42A27DB-BD31-4B8C-83A1-F6EECF244321}">
+                <p14:modId xmlns:p14="http://schemas.microsoft.com/office/powerpoint/2010/main" val="1579011935"/>
+              </p:ext>
+            </p:extLst>
+          </p:nvPr>
+        </p:nvGraphicFramePr>
+        <p:xfrm>
+          <a:off x="984250" y="1529029"/>
+          <a:ext cx="10236200" cy="3410678"/>
+        </p:xfrm>
+        <a:graphic>
+          <a:graphicData uri="http://schemas.openxmlformats.org/drawingml/2006/table">
+            <a:tbl>
+              <a:tblPr/>
+              <a:tblGrid>
+                <a:gridCol w="2456688"/>
+                <a:gridCol w="3889756"/>
+                <a:gridCol w="3889756"/>
+              </a:tblGrid>
+              <a:tr h="317434">
+                <a:tc>
+                  <a:txBody>
+                    <a:bodyPr/>
+                    <a:lstStyle/>
+                    <a:p>
+                      <a:pPr indent="0" marL="0">
+                        <a:lnSpc>
+                          <a:spcPts val="1680"/>
+                        </a:lnSpc>
+                        <a:buNone/>
+                      </a:pPr>
+                      <a:r>
+                        <a:rPr lang="en-US" sz="1200" b="1" dirty="0">
+                          <a:solidFill>
+                            <a:srgbClr val="FFFFFF"/>
+                          </a:solidFill>
+                          <a:latin typeface="Arial" pitchFamily="34" charset="0"/>
+                          <a:ea typeface="Arial" pitchFamily="34" charset="-122"/>
+                          <a:cs typeface="Arial" pitchFamily="34" charset="-120"/>
+                        </a:rPr>
+                        <a:t>Riesgo</a:t>
+                      </a:r>
+                      <a:endParaRPr lang="en-US" sz="1200" dirty="0">
+                        <a:latin typeface="Arial" charset="0"/>
+                        <a:ea typeface="Arial" charset="0"/>
+                        <a:cs typeface="Arial" charset="0"/>
+                      </a:endParaRPr>
+                    </a:p>
+                  </a:txBody>
+                  <a:tcPr marL="53340" marR="53340" marT="53340" marB="53340" anchor="t">
+                    <a:lnL w="12700" cap="flat" cmpd="sng" algn="ctr">
+                      <a:solidFill>
+                        <a:srgbClr val="CBCBCB"/>
+                      </a:solidFill>
+                      <a:prstDash val="solid"/>
+                      <a:round/>
+                      <a:headEnd type="none" w="med" len="med"/>
+                      <a:tailEnd type="none" w="med" len="med"/>
+                    </a:lnL>
+                    <a:lnR w="12700" cap="flat" cmpd="sng" algn="ctr">
+                      <a:solidFill>
+                        <a:srgbClr val="1C2834"/>
+                      </a:solidFill>
+                      <a:prstDash val="solid"/>
+                      <a:round/>
+                      <a:headEnd type="none" w="med" len="med"/>
+                      <a:tailEnd type="none" w="med" len="med"/>
+                    </a:lnR>
+                    <a:lnT w="12700" cap="flat" cmpd="sng" algn="ctr">
+                      <a:solidFill>
+                        <a:srgbClr val="CBCBCB"/>
+                      </a:solidFill>
+                      <a:prstDash val="solid"/>
+                      <a:round/>
+                      <a:headEnd type="none" w="med" len="med"/>
+                      <a:tailEnd type="none" w="med" len="med"/>
+                    </a:lnT>
+                    <a:lnB w="12700" cap="flat" cmpd="sng" algn="ctr">
+                      <a:solidFill>
+                        <a:srgbClr val="1C2834"/>
+                      </a:solidFill>
+                      <a:prstDash val="solid"/>
+                      <a:round/>
+                      <a:headEnd type="none" w="med" len="med"/>
+                      <a:tailEnd type="none" w="med" len="med"/>
+                    </a:lnB>
+                    <a:solidFill>
+                      <a:srgbClr val="1E2D3D"/>
+                    </a:solidFill>
+                  </a:tcPr>
+                </a:tc>
+                <a:tc>
+                  <a:txBody>
+                    <a:bodyPr/>
+                    <a:lstStyle/>
+                    <a:p>
+                      <a:pPr indent="0" marL="0">
+                        <a:lnSpc>
+                          <a:spcPts val="1680"/>
+                        </a:lnSpc>
+                        <a:buNone/>
+                      </a:pPr>
+                      <a:r>
+                        <a:rPr lang="en-US" sz="1200" b="1" dirty="0">
+                          <a:solidFill>
+                            <a:srgbClr val="FFFFFF"/>
+                          </a:solidFill>
+                          <a:latin typeface="Arial" pitchFamily="34" charset="0"/>
+                          <a:ea typeface="Arial" pitchFamily="34" charset="-122"/>
+                          <a:cs typeface="Arial" pitchFamily="34" charset="-120"/>
+                        </a:rPr>
+                        <a:t>Lo que ya lo contiene</a:t>
+                      </a:r>
+                      <a:endParaRPr lang="en-US" sz="1200" dirty="0">
+                        <a:latin typeface="Arial" charset="0"/>
+                        <a:ea typeface="Arial" charset="0"/>
+                        <a:cs typeface="Arial" charset="0"/>
+                      </a:endParaRPr>
+                    </a:p>
+                  </a:txBody>
+                  <a:tcPr marL="53340" marR="53340" marT="53340" marB="53340" anchor="t">
+                    <a:lnL w="12700" cap="flat" cmpd="sng" algn="ctr">
+                      <a:solidFill>
+                        <a:srgbClr val="1C2834"/>
+                      </a:solidFill>
+                      <a:prstDash val="solid"/>
+                      <a:round/>
+                      <a:headEnd type="none" w="med" len="med"/>
+                      <a:tailEnd type="none" w="med" len="med"/>
+                    </a:lnL>
+                    <a:lnR w="12700" cap="flat" cmpd="sng" algn="ctr">
+                      <a:solidFill>
+                        <a:srgbClr val="1C2834"/>
+                      </a:solidFill>
+                      <a:prstDash val="solid"/>
+                      <a:round/>
+                      <a:headEnd type="none" w="med" len="med"/>
+                      <a:tailEnd type="none" w="med" len="med"/>
+                    </a:lnR>
+                    <a:lnT w="12700" cap="flat" cmpd="sng" algn="ctr">
+                      <a:solidFill>
+                        <a:srgbClr val="CBCBCB"/>
+                      </a:solidFill>
+                      <a:prstDash val="solid"/>
+                      <a:round/>
+                      <a:headEnd type="none" w="med" len="med"/>
+                      <a:tailEnd type="none" w="med" len="med"/>
+                    </a:lnT>
+                    <a:lnB w="12700" cap="flat" cmpd="sng" algn="ctr">
+                      <a:solidFill>
+                        <a:srgbClr val="1C2834"/>
+                      </a:solidFill>
+                      <a:prstDash val="solid"/>
+                      <a:round/>
+                      <a:headEnd type="none" w="med" len="med"/>
+                      <a:tailEnd type="none" w="med" len="med"/>
+                    </a:lnB>
+                    <a:solidFill>
+                      <a:srgbClr val="1E2D3D"/>
+                    </a:solidFill>
+                  </a:tcPr>
+                </a:tc>
+                <a:tc>
+                  <a:txBody>
+                    <a:bodyPr/>
+                    <a:lstStyle/>
+                    <a:p>
+                      <a:pPr indent="0" marL="0">
+                        <a:lnSpc>
+                          <a:spcPts val="1680"/>
+                        </a:lnSpc>
+                        <a:buNone/>
+                      </a:pPr>
+                      <a:r>
+                        <a:rPr lang="en-US" sz="1200" b="1" dirty="0">
+                          <a:solidFill>
+                            <a:srgbClr val="FFFFFF"/>
+                          </a:solidFill>
+                          <a:latin typeface="Arial" pitchFamily="34" charset="0"/>
+                          <a:ea typeface="Arial" pitchFamily="34" charset="-122"/>
+                          <a:cs typeface="Arial" pitchFamily="34" charset="-120"/>
+                        </a:rPr>
+                        <a:t>Siguiente paso</a:t>
+                      </a:r>
+                      <a:endParaRPr lang="en-US" sz="1200" dirty="0">
+                        <a:latin typeface="Arial" charset="0"/>
+                        <a:ea typeface="Arial" charset="0"/>
+                        <a:cs typeface="Arial" charset="0"/>
+                      </a:endParaRPr>
+                    </a:p>
+                  </a:txBody>
+                  <a:tcPr marL="53340" marR="53340" marT="53340" marB="53340" anchor="t">
+                    <a:lnL w="12700" cap="flat" cmpd="sng" algn="ctr">
+                      <a:solidFill>
+                        <a:srgbClr val="1C2834"/>
+                      </a:solidFill>
+                      <a:prstDash val="solid"/>
+                      <a:round/>
+                      <a:headEnd type="none" w="med" len="med"/>
+                      <a:tailEnd type="none" w="med" len="med"/>
+                    </a:lnL>
+                    <a:lnR w="12700" cap="flat" cmpd="sng" algn="ctr">
+                      <a:solidFill>
+                        <a:srgbClr val="1C2834"/>
+                      </a:solidFill>
+                      <a:prstDash val="solid"/>
+                      <a:round/>
+                      <a:headEnd type="none" w="med" len="med"/>
+                      <a:tailEnd type="none" w="med" len="med"/>
+                    </a:lnR>
+                    <a:lnT w="12700" cap="flat" cmpd="sng" algn="ctr">
+                      <a:solidFill>
+                        <a:srgbClr val="CBCBCB"/>
+                      </a:solidFill>
+                      <a:prstDash val="solid"/>
+                      <a:round/>
+                      <a:headEnd type="none" w="med" len="med"/>
+                      <a:tailEnd type="none" w="med" len="med"/>
+                    </a:lnT>
+                    <a:lnB w="12700" cap="flat" cmpd="sng" algn="ctr">
+                      <a:solidFill>
+                        <a:srgbClr val="1C2834"/>
+                      </a:solidFill>
+                      <a:prstDash val="solid"/>
+                      <a:round/>
+                      <a:headEnd type="none" w="med" len="med"/>
+                      <a:tailEnd type="none" w="med" len="med"/>
+                    </a:lnB>
+                    <a:solidFill>
+                      <a:srgbClr val="1E2D3D"/>
+                    </a:solidFill>
+                  </a:tcPr>
+                </a:tc>
+              </a:tr>
+              <a:tr h="515541">
+                <a:tc>
+                  <a:txBody>
+                    <a:bodyPr/>
+                    <a:lstStyle/>
+                    <a:p>
+                      <a:pPr indent="0" marL="0">
+                        <a:lnSpc>
+                          <a:spcPts val="1680"/>
+                        </a:lnSpc>
+                        <a:buNone/>
+                      </a:pPr>
+                      <a:r>
+                        <a:rPr lang="en-US" sz="1200" dirty="0">
+                          <a:solidFill>
+                            <a:srgbClr val="233441"/>
+                          </a:solidFill>
+                          <a:latin typeface="Arial" pitchFamily="34" charset="0"/>
+                          <a:ea typeface="Arial" pitchFamily="34" charset="-122"/>
+                          <a:cs typeface="Arial" pitchFamily="34" charset="-120"/>
+                        </a:rPr>
+                        <a:t>Límites de uso del proveedor</a:t>
+                      </a:r>
+                      <a:endParaRPr lang="en-US" sz="1200" dirty="0">
+                        <a:latin typeface="Arial" charset="0"/>
+                        <a:ea typeface="Arial" charset="0"/>
+                        <a:cs typeface="Arial" charset="0"/>
+                      </a:endParaRPr>
+                    </a:p>
+                  </a:txBody>
+                  <a:tcPr marL="53340" marR="53340" marT="53340" marB="53340" anchor="t">
+                    <a:lnL w="12700" cap="flat" cmpd="sng" algn="ctr">
+                      <a:solidFill>
+                        <a:srgbClr val="CBCBCB"/>
+                      </a:solidFill>
+                      <a:prstDash val="solid"/>
+                      <a:round/>
+                      <a:headEnd type="none" w="med" len="med"/>
+                      <a:tailEnd type="none" w="med" len="med"/>
+                    </a:lnL>
+                    <a:lnR w="12700" cap="flat" cmpd="sng" algn="ctr">
+                      <a:solidFill>
+                        <a:srgbClr val="CBCBCB"/>
+                      </a:solidFill>
+                      <a:prstDash val="solid"/>
+                      <a:round/>
+                      <a:headEnd type="none" w="med" len="med"/>
+                      <a:tailEnd type="none" w="med" len="med"/>
+                    </a:lnR>
+                    <a:lnT w="12700" cap="flat" cmpd="sng" algn="ctr">
+                      <a:solidFill>
+                        <a:srgbClr val="1C2834"/>
+                      </a:solidFill>
+                      <a:prstDash val="solid"/>
+                      <a:round/>
+                      <a:headEnd type="none" w="med" len="med"/>
+                      <a:tailEnd type="none" w="med" len="med"/>
+                    </a:lnT>
+                    <a:lnB w="12700" cap="flat" cmpd="sng" algn="ctr">
+                      <a:solidFill>
+                        <a:srgbClr val="CBCBCB"/>
+                      </a:solidFill>
+                      <a:prstDash val="solid"/>
+                      <a:round/>
+                      <a:headEnd type="none" w="med" len="med"/>
+                      <a:tailEnd type="none" w="med" len="med"/>
+                    </a:lnB>
+                  </a:tcPr>
+                </a:tc>
+                <a:tc>
+                  <a:txBody>
+                    <a:bodyPr/>
+                    <a:lstStyle/>
+                    <a:p>
+                      <a:pPr indent="0" marL="0">
+                        <a:lnSpc>
+                          <a:spcPts val="1680"/>
+                        </a:lnSpc>
+                        <a:buNone/>
+                      </a:pPr>
+                      <a:r>
+                        <a:rPr lang="en-US" sz="1200" dirty="0">
+                          <a:solidFill>
+                            <a:srgbClr val="233441"/>
+                          </a:solidFill>
+                          <a:latin typeface="Arial" pitchFamily="34" charset="0"/>
+                          <a:ea typeface="Arial" pitchFamily="34" charset="-122"/>
+                          <a:cs typeface="Arial" pitchFamily="34" charset="-120"/>
+                        </a:rPr>
+                        <a:t>La cuota paró la novela en el capítulo 4; el checkpoint la retomó sin perder nada</a:t>
+                      </a:r>
+                      <a:endParaRPr lang="en-US" sz="1200" dirty="0">
+                        <a:latin typeface="Arial" charset="0"/>
+                        <a:ea typeface="Arial" charset="0"/>
+                        <a:cs typeface="Arial" charset="0"/>
+                      </a:endParaRPr>
+                    </a:p>
+                  </a:txBody>
+                  <a:tcPr marL="53340" marR="53340" marT="53340" marB="53340" anchor="t">
+                    <a:lnL w="12700" cap="flat" cmpd="sng" algn="ctr">
+                      <a:solidFill>
+                        <a:srgbClr val="CBCBCB"/>
+                      </a:solidFill>
+                      <a:prstDash val="solid"/>
+                      <a:round/>
+                      <a:headEnd type="none" w="med" len="med"/>
+                      <a:tailEnd type="none" w="med" len="med"/>
+                    </a:lnL>
+                    <a:lnR w="12700" cap="flat" cmpd="sng" algn="ctr">
+                      <a:solidFill>
+                        <a:srgbClr val="CBCBCB"/>
+                      </a:solidFill>
+                      <a:prstDash val="solid"/>
+                      <a:round/>
+                      <a:headEnd type="none" w="med" len="med"/>
+                      <a:tailEnd type="none" w="med" len="med"/>
+                    </a:lnR>
+                    <a:lnT w="12700" cap="flat" cmpd="sng" algn="ctr">
+                      <a:solidFill>
+                        <a:srgbClr val="1C2834"/>
+                      </a:solidFill>
+                      <a:prstDash val="solid"/>
+                      <a:round/>
+                      <a:headEnd type="none" w="med" len="med"/>
+                      <a:tailEnd type="none" w="med" len="med"/>
+                    </a:lnT>
+                    <a:lnB w="12700" cap="flat" cmpd="sng" algn="ctr">
+                      <a:solidFill>
+                        <a:srgbClr val="CBCBCB"/>
+                      </a:solidFill>
+                      <a:prstDash val="solid"/>
+                      <a:round/>
+                      <a:headEnd type="none" w="med" len="med"/>
+                      <a:tailEnd type="none" w="med" len="med"/>
+                    </a:lnB>
+                  </a:tcPr>
+                </a:tc>
+                <a:tc>
+                  <a:txBody>
+                    <a:bodyPr/>
+                    <a:lstStyle/>
+                    <a:p>
+                      <a:pPr indent="0" marL="0">
+                        <a:lnSpc>
+                          <a:spcPts val="1680"/>
+                        </a:lnSpc>
+                        <a:buNone/>
+                      </a:pPr>
+                      <a:r>
+                        <a:rPr lang="en-US" sz="1200" dirty="0">
+                          <a:solidFill>
+                            <a:srgbClr val="233441"/>
+                          </a:solidFill>
+                          <a:latin typeface="Arial" pitchFamily="34" charset="0"/>
+                          <a:ea typeface="Arial" pitchFamily="34" charset="-122"/>
+                          <a:cs typeface="Arial" pitchFamily="34" charset="-120"/>
+                        </a:rPr>
+                        <a:t>Plan con cuota garantizada y una cola que reparta las novelas en el tiempo</a:t>
+                      </a:r>
+                      <a:endParaRPr lang="en-US" sz="1200" dirty="0">
+                        <a:latin typeface="Arial" charset="0"/>
+                        <a:ea typeface="Arial" charset="0"/>
+                        <a:cs typeface="Arial" charset="0"/>
+                      </a:endParaRPr>
+                    </a:p>
+                  </a:txBody>
+                  <a:tcPr marL="53340" marR="53340" marT="53340" marB="53340" anchor="t">
+                    <a:lnL w="12700" cap="flat" cmpd="sng" algn="ctr">
+                      <a:solidFill>
+                        <a:srgbClr val="CBCBCB"/>
+                      </a:solidFill>
+                      <a:prstDash val="solid"/>
+                      <a:round/>
+                      <a:headEnd type="none" w="med" len="med"/>
+                      <a:tailEnd type="none" w="med" len="med"/>
+                    </a:lnL>
+                    <a:lnR w="12700" cap="flat" cmpd="sng" algn="ctr">
+                      <a:solidFill>
+                        <a:srgbClr val="CBCBCB"/>
+                      </a:solidFill>
+                      <a:prstDash val="solid"/>
+                      <a:round/>
+                      <a:headEnd type="none" w="med" len="med"/>
+                      <a:tailEnd type="none" w="med" len="med"/>
+                    </a:lnR>
+                    <a:lnT w="12700" cap="flat" cmpd="sng" algn="ctr">
+                      <a:solidFill>
+                        <a:srgbClr val="1C2834"/>
+                      </a:solidFill>
+                      <a:prstDash val="solid"/>
+                      <a:round/>
+                      <a:headEnd type="none" w="med" len="med"/>
+                      <a:tailEnd type="none" w="med" len="med"/>
+                    </a:lnT>
+                    <a:lnB w="12700" cap="flat" cmpd="sng" algn="ctr">
+                      <a:solidFill>
+                        <a:srgbClr val="CBCBCB"/>
+                      </a:solidFill>
+                      <a:prstDash val="solid"/>
+                      <a:round/>
+                      <a:headEnd type="none" w="med" len="med"/>
+                      <a:tailEnd type="none" w="med" len="med"/>
+                    </a:lnB>
+                  </a:tcPr>
+                </a:tc>
+              </a:tr>
+              <a:tr h="515541">
+                <a:tc>
+                  <a:txBody>
+                    <a:bodyPr/>
+                    <a:lstStyle/>
+                    <a:p>
+                      <a:pPr indent="0" marL="0">
+                        <a:lnSpc>
+                          <a:spcPts val="1680"/>
+                        </a:lnSpc>
+                        <a:buNone/>
+                      </a:pPr>
+                      <a:r>
+                        <a:rPr lang="en-US" sz="1200" dirty="0">
+                          <a:solidFill>
+                            <a:srgbClr val="233441"/>
+                          </a:solidFill>
+                          <a:latin typeface="Arial" pitchFamily="34" charset="0"/>
+                          <a:ea typeface="Arial" pitchFamily="34" charset="-122"/>
+                          <a:cs typeface="Arial" pitchFamily="34" charset="-120"/>
+                        </a:rPr>
+                        <a:t>SQLite admite un solo escritor</a:t>
+                      </a:r>
+                      <a:endParaRPr lang="en-US" sz="1200" dirty="0">
+                        <a:latin typeface="Arial" charset="0"/>
+                        <a:ea typeface="Arial" charset="0"/>
+                        <a:cs typeface="Arial" charset="0"/>
+                      </a:endParaRPr>
+                    </a:p>
+                  </a:txBody>
+                  <a:tcPr marL="53340" marR="53340" marT="53340" marB="53340" anchor="t">
+                    <a:lnL w="12700" cap="flat" cmpd="sng" algn="ctr">
+                      <a:solidFill>
+                        <a:srgbClr val="CBCBCB"/>
+                      </a:solidFill>
+                      <a:prstDash val="solid"/>
+                      <a:round/>
+                      <a:headEnd type="none" w="med" len="med"/>
+                      <a:tailEnd type="none" w="med" len="med"/>
+                    </a:lnL>
+                    <a:lnR w="12700" cap="flat" cmpd="sng" algn="ctr">
+                      <a:solidFill>
+                        <a:srgbClr val="C8C8C7"/>
+                      </a:solidFill>
+                      <a:prstDash val="solid"/>
+                      <a:round/>
+                      <a:headEnd type="none" w="med" len="med"/>
+                      <a:tailEnd type="none" w="med" len="med"/>
+                    </a:lnR>
+                    <a:lnT w="12700" cap="flat" cmpd="sng" algn="ctr">
+                      <a:solidFill>
+                        <a:srgbClr val="CBCBCB"/>
+                      </a:solidFill>
+                      <a:prstDash val="solid"/>
+                      <a:round/>
+                      <a:headEnd type="none" w="med" len="med"/>
+                      <a:tailEnd type="none" w="med" len="med"/>
+                    </a:lnT>
+                    <a:lnB w="12700" cap="flat" cmpd="sng" algn="ctr">
+                      <a:solidFill>
+                        <a:srgbClr val="C8C8C7"/>
+                      </a:solidFill>
+                      <a:prstDash val="solid"/>
+                      <a:round/>
+                      <a:headEnd type="none" w="med" len="med"/>
+                      <a:tailEnd type="none" w="med" len="med"/>
+                    </a:lnB>
+                    <a:solidFill>
+                      <a:srgbClr val="FBFBFA"/>
+                    </a:solidFill>
+                  </a:tcPr>
+                </a:tc>
+                <a:tc>
+                  <a:txBody>
+                    <a:bodyPr/>
+                    <a:lstStyle/>
+                    <a:p>
+                      <a:pPr indent="0" marL="0">
+                        <a:lnSpc>
+                          <a:spcPts val="1680"/>
+                        </a:lnSpc>
+                        <a:buNone/>
+                      </a:pPr>
+                      <a:r>
+                        <a:rPr lang="en-US" sz="1200" dirty="0">
+                          <a:solidFill>
+                            <a:srgbClr val="233441"/>
+                          </a:solidFill>
+                          <a:latin typeface="Arial" pitchFamily="34" charset="0"/>
+                          <a:ea typeface="Arial" pitchFamily="34" charset="-122"/>
+                          <a:cs typeface="Arial" pitchFamily="34" charset="-120"/>
+                        </a:rPr>
+                        <a:t>Commit antes de cada llamada, espera de 30 s y reanudación automática</a:t>
+                      </a:r>
+                      <a:endParaRPr lang="en-US" sz="1200" dirty="0">
+                        <a:latin typeface="Arial" charset="0"/>
+                        <a:ea typeface="Arial" charset="0"/>
+                        <a:cs typeface="Arial" charset="0"/>
+                      </a:endParaRPr>
+                    </a:p>
+                  </a:txBody>
+                  <a:tcPr marL="53340" marR="53340" marT="53340" marB="53340" anchor="t">
+                    <a:lnL w="12700" cap="flat" cmpd="sng" algn="ctr">
+                      <a:solidFill>
+                        <a:srgbClr val="C8C8C7"/>
+                      </a:solidFill>
+                      <a:prstDash val="solid"/>
+                      <a:round/>
+                      <a:headEnd type="none" w="med" len="med"/>
+                      <a:tailEnd type="none" w="med" len="med"/>
+                    </a:lnL>
+                    <a:lnR w="12700" cap="flat" cmpd="sng" algn="ctr">
+                      <a:solidFill>
+                        <a:srgbClr val="C8C8C7"/>
+                      </a:solidFill>
+                      <a:prstDash val="solid"/>
+                      <a:round/>
+                      <a:headEnd type="none" w="med" len="med"/>
+                      <a:tailEnd type="none" w="med" len="med"/>
+                    </a:lnR>
+                    <a:lnT w="12700" cap="flat" cmpd="sng" algn="ctr">
+                      <a:solidFill>
+                        <a:srgbClr val="CBCBCB"/>
+                      </a:solidFill>
+                      <a:prstDash val="solid"/>
+                      <a:round/>
+                      <a:headEnd type="none" w="med" len="med"/>
+                      <a:tailEnd type="none" w="med" len="med"/>
+                    </a:lnT>
+                    <a:lnB w="12700" cap="flat" cmpd="sng" algn="ctr">
+                      <a:solidFill>
+                        <a:srgbClr val="C8C8C7"/>
+                      </a:solidFill>
+                      <a:prstDash val="solid"/>
+                      <a:round/>
+                      <a:headEnd type="none" w="med" len="med"/>
+                      <a:tailEnd type="none" w="med" len="med"/>
+                    </a:lnB>
+                    <a:solidFill>
+                      <a:srgbClr val="FBFBFA"/>
+                    </a:solidFill>
+                  </a:tcPr>
+                </a:tc>
+                <a:tc>
+                  <a:txBody>
+                    <a:bodyPr/>
+                    <a:lstStyle/>
+                    <a:p>
+                      <a:pPr indent="0" marL="0">
+                        <a:lnSpc>
+                          <a:spcPts val="1680"/>
+                        </a:lnSpc>
+                        <a:buNone/>
+                      </a:pPr>
+                      <a:r>
+                        <a:rPr lang="en-US" sz="1200" dirty="0">
+                          <a:solidFill>
+                            <a:srgbClr val="233441"/>
+                          </a:solidFill>
+                          <a:latin typeface="Arial" pitchFamily="34" charset="0"/>
+                          <a:ea typeface="Arial" pitchFamily="34" charset="-122"/>
+                          <a:cs typeface="Arial" pitchFamily="34" charset="-120"/>
+                        </a:rPr>
+                        <a:t>Postgres al escalar: el acceso a datos ya está aislado en repositorios</a:t>
+                      </a:r>
+                      <a:endParaRPr lang="en-US" sz="1200" dirty="0">
+                        <a:latin typeface="Arial" charset="0"/>
+                        <a:ea typeface="Arial" charset="0"/>
+                        <a:cs typeface="Arial" charset="0"/>
+                      </a:endParaRPr>
+                    </a:p>
+                  </a:txBody>
+                  <a:tcPr marL="53340" marR="53340" marT="53340" marB="53340" anchor="t">
+                    <a:lnL w="12700" cap="flat" cmpd="sng" algn="ctr">
+                      <a:solidFill>
+                        <a:srgbClr val="C8C8C7"/>
+                      </a:solidFill>
+                      <a:prstDash val="solid"/>
+                      <a:round/>
+                      <a:headEnd type="none" w="med" len="med"/>
+                      <a:tailEnd type="none" w="med" len="med"/>
+                    </a:lnL>
+                    <a:lnR w="12700" cap="flat" cmpd="sng" algn="ctr">
+                      <a:solidFill>
+                        <a:srgbClr val="C8C8C7"/>
+                      </a:solidFill>
+                      <a:prstDash val="solid"/>
+                      <a:round/>
+                      <a:headEnd type="none" w="med" len="med"/>
+                      <a:tailEnd type="none" w="med" len="med"/>
+                    </a:lnR>
+                    <a:lnT w="12700" cap="flat" cmpd="sng" algn="ctr">
+                      <a:solidFill>
+                        <a:srgbClr val="CBCBCB"/>
+                      </a:solidFill>
+                      <a:prstDash val="solid"/>
+                      <a:round/>
+                      <a:headEnd type="none" w="med" len="med"/>
+                      <a:tailEnd type="none" w="med" len="med"/>
+                    </a:lnT>
+                    <a:lnB w="12700" cap="flat" cmpd="sng" algn="ctr">
+                      <a:solidFill>
+                        <a:srgbClr val="C8C8C7"/>
+                      </a:solidFill>
+                      <a:prstDash val="solid"/>
+                      <a:round/>
+                      <a:headEnd type="none" w="med" len="med"/>
+                      <a:tailEnd type="none" w="med" len="med"/>
+                    </a:lnB>
+                    <a:solidFill>
+                      <a:srgbClr val="FBFBFA"/>
+                    </a:solidFill>
+                  </a:tcPr>
+                </a:tc>
+              </a:tr>
+              <a:tr h="515541">
+                <a:tc>
+                  <a:txBody>
+                    <a:bodyPr/>
+                    <a:lstStyle/>
+                    <a:p>
+                      <a:pPr indent="0" marL="0">
+                        <a:lnSpc>
+                          <a:spcPts val="1680"/>
+                        </a:lnSpc>
+                        <a:buNone/>
+                      </a:pPr>
+                      <a:r>
+                        <a:rPr lang="en-US" sz="1200" dirty="0">
+                          <a:solidFill>
+                            <a:srgbClr val="233441"/>
+                          </a:solidFill>
+                          <a:latin typeface="Arial" pitchFamily="34" charset="0"/>
+                          <a:ea typeface="Arial" pitchFamily="34" charset="-122"/>
+                          <a:cs typeface="Arial" pitchFamily="34" charset="-120"/>
+                        </a:rPr>
+                        <a:t>El juez comparte modelo con el Escritor</a:t>
+                      </a:r>
+                      <a:endParaRPr lang="en-US" sz="1200" dirty="0">
+                        <a:latin typeface="Arial" charset="0"/>
+                        <a:ea typeface="Arial" charset="0"/>
+                        <a:cs typeface="Arial" charset="0"/>
+                      </a:endParaRPr>
+                    </a:p>
+                  </a:txBody>
+                  <a:tcPr marL="53340" marR="53340" marT="53340" marB="53340" anchor="t">
+                    <a:lnL w="12700" cap="flat" cmpd="sng" algn="ctr">
+                      <a:solidFill>
+                        <a:srgbClr val="CBCBCB"/>
+                      </a:solidFill>
+                      <a:prstDash val="solid"/>
+                      <a:round/>
+                      <a:headEnd type="none" w="med" len="med"/>
+                      <a:tailEnd type="none" w="med" len="med"/>
+                    </a:lnL>
+                    <a:lnR w="12700" cap="flat" cmpd="sng" algn="ctr">
+                      <a:solidFill>
+                        <a:srgbClr val="CBCBCB"/>
+                      </a:solidFill>
+                      <a:prstDash val="solid"/>
+                      <a:round/>
+                      <a:headEnd type="none" w="med" len="med"/>
+                      <a:tailEnd type="none" w="med" len="med"/>
+                    </a:lnR>
+                    <a:lnT w="12700" cap="flat" cmpd="sng" algn="ctr">
+                      <a:solidFill>
+                        <a:srgbClr val="C8C8C7"/>
+                      </a:solidFill>
+                      <a:prstDash val="solid"/>
+                      <a:round/>
+                      <a:headEnd type="none" w="med" len="med"/>
+                      <a:tailEnd type="none" w="med" len="med"/>
+                    </a:lnT>
+                    <a:lnB w="12700" cap="flat" cmpd="sng" algn="ctr">
+                      <a:solidFill>
+                        <a:srgbClr val="CBCBCB"/>
+                      </a:solidFill>
+                      <a:prstDash val="solid"/>
+                      <a:round/>
+                      <a:headEnd type="none" w="med" len="med"/>
+                      <a:tailEnd type="none" w="med" len="med"/>
+                    </a:lnB>
+                  </a:tcPr>
+                </a:tc>
+                <a:tc>
+                  <a:txBody>
+                    <a:bodyPr/>
+                    <a:lstStyle/>
+                    <a:p>
+                      <a:pPr indent="0" marL="0">
+                        <a:lnSpc>
+                          <a:spcPts val="1680"/>
+                        </a:lnSpc>
+                        <a:buNone/>
+                      </a:pPr>
+                      <a:r>
+                        <a:rPr lang="en-US" sz="1200" dirty="0">
+                          <a:solidFill>
+                            <a:srgbClr val="233441"/>
+                          </a:solidFill>
+                          <a:latin typeface="Arial" pitchFamily="34" charset="0"/>
+                          <a:ea typeface="Arial" pitchFamily="34" charset="-122"/>
+                          <a:cs typeface="Arial" pitchFamily="34" charset="-120"/>
+                        </a:rPr>
+                        <a:t>Revisión humana con la misma rúbrica del juez</a:t>
+                      </a:r>
+                      <a:endParaRPr lang="en-US" sz="1200" dirty="0">
+                        <a:latin typeface="Arial" charset="0"/>
+                        <a:ea typeface="Arial" charset="0"/>
+                        <a:cs typeface="Arial" charset="0"/>
+                      </a:endParaRPr>
+                    </a:p>
+                  </a:txBody>
+                  <a:tcPr marL="53340" marR="53340" marT="53340" marB="53340" anchor="t">
+                    <a:lnL w="12700" cap="flat" cmpd="sng" algn="ctr">
+                      <a:solidFill>
+                        <a:srgbClr val="CBCBCB"/>
+                      </a:solidFill>
+                      <a:prstDash val="solid"/>
+                      <a:round/>
+                      <a:headEnd type="none" w="med" len="med"/>
+                      <a:tailEnd type="none" w="med" len="med"/>
+                    </a:lnL>
+                    <a:lnR w="12700" cap="flat" cmpd="sng" algn="ctr">
+                      <a:solidFill>
+                        <a:srgbClr val="CBCBCB"/>
+                      </a:solidFill>
+                      <a:prstDash val="solid"/>
+                      <a:round/>
+                      <a:headEnd type="none" w="med" len="med"/>
+                      <a:tailEnd type="none" w="med" len="med"/>
+                    </a:lnR>
+                    <a:lnT w="12700" cap="flat" cmpd="sng" algn="ctr">
+                      <a:solidFill>
+                        <a:srgbClr val="C8C8C7"/>
+                      </a:solidFill>
+                      <a:prstDash val="solid"/>
+                      <a:round/>
+                      <a:headEnd type="none" w="med" len="med"/>
+                      <a:tailEnd type="none" w="med" len="med"/>
+                    </a:lnT>
+                    <a:lnB w="12700" cap="flat" cmpd="sng" algn="ctr">
+                      <a:solidFill>
+                        <a:srgbClr val="CBCBCB"/>
+                      </a:solidFill>
+                      <a:prstDash val="solid"/>
+                      <a:round/>
+                      <a:headEnd type="none" w="med" len="med"/>
+                      <a:tailEnd type="none" w="med" len="med"/>
+                    </a:lnB>
+                  </a:tcPr>
+                </a:tc>
+                <a:tc>
+                  <a:txBody>
+                    <a:bodyPr/>
+                    <a:lstStyle/>
+                    <a:p>
+                      <a:pPr indent="0" marL="0">
+                        <a:lnSpc>
+                          <a:spcPts val="1680"/>
+                        </a:lnSpc>
+                        <a:buNone/>
+                      </a:pPr>
+                      <a:r>
+                        <a:rPr lang="en-US" sz="1200" dirty="0">
+                          <a:solidFill>
+                            <a:srgbClr val="233441"/>
+                          </a:solidFill>
+                          <a:latin typeface="Arial" pitchFamily="34" charset="0"/>
+                          <a:ea typeface="Arial" pitchFamily="34" charset="-122"/>
+                          <a:cs typeface="Arial" pitchFamily="34" charset="-120"/>
+                        </a:rPr>
+                        <a:t>Juez en otro modelo: una constante; unos 8,8 USD por novela con Opus</a:t>
+                      </a:r>
+                      <a:endParaRPr lang="en-US" sz="1200" dirty="0">
+                        <a:latin typeface="Arial" charset="0"/>
+                        <a:ea typeface="Arial" charset="0"/>
+                        <a:cs typeface="Arial" charset="0"/>
+                      </a:endParaRPr>
+                    </a:p>
+                  </a:txBody>
+                  <a:tcPr marL="53340" marR="53340" marT="53340" marB="53340" anchor="t">
+                    <a:lnL w="12700" cap="flat" cmpd="sng" algn="ctr">
+                      <a:solidFill>
+                        <a:srgbClr val="CBCBCB"/>
+                      </a:solidFill>
+                      <a:prstDash val="solid"/>
+                      <a:round/>
+                      <a:headEnd type="none" w="med" len="med"/>
+                      <a:tailEnd type="none" w="med" len="med"/>
+                    </a:lnL>
+                    <a:lnR w="12700" cap="flat" cmpd="sng" algn="ctr">
+                      <a:solidFill>
+                        <a:srgbClr val="CBCBCB"/>
+                      </a:solidFill>
+                      <a:prstDash val="solid"/>
+                      <a:round/>
+                      <a:headEnd type="none" w="med" len="med"/>
+                      <a:tailEnd type="none" w="med" len="med"/>
+                    </a:lnR>
+                    <a:lnT w="12700" cap="flat" cmpd="sng" algn="ctr">
+                      <a:solidFill>
+                        <a:srgbClr val="C8C8C7"/>
+                      </a:solidFill>
+                      <a:prstDash val="solid"/>
+                      <a:round/>
+                      <a:headEnd type="none" w="med" len="med"/>
+                      <a:tailEnd type="none" w="med" len="med"/>
+                    </a:lnT>
+                    <a:lnB w="12700" cap="flat" cmpd="sng" algn="ctr">
+                      <a:solidFill>
+                        <a:srgbClr val="CBCBCB"/>
+                      </a:solidFill>
+                      <a:prstDash val="solid"/>
+                      <a:round/>
+                      <a:headEnd type="none" w="med" len="med"/>
+                      <a:tailEnd type="none" w="med" len="med"/>
+                    </a:lnB>
+                  </a:tcPr>
+                </a:tc>
+              </a:tr>
+              <a:tr h="515541">
+                <a:tc>
+                  <a:txBody>
+                    <a:bodyPr/>
+                    <a:lstStyle/>
+                    <a:p>
+                      <a:pPr indent="0" marL="0">
+                        <a:lnSpc>
+                          <a:spcPts val="1680"/>
+                        </a:lnSpc>
+                        <a:buNone/>
+                      </a:pPr>
+                      <a:r>
+                        <a:rPr lang="en-US" sz="1200" dirty="0">
+                          <a:solidFill>
+                            <a:srgbClr val="233441"/>
+                          </a:solidFill>
+                          <a:latin typeface="Arial" pitchFamily="34" charset="0"/>
+                          <a:ea typeface="Arial" pitchFamily="34" charset="-122"/>
+                          <a:cs typeface="Arial" pitchFamily="34" charset="-120"/>
+                        </a:rPr>
+                        <a:t>Datos personales del destinatario</a:t>
+                      </a:r>
+                      <a:endParaRPr lang="en-US" sz="1200" dirty="0">
+                        <a:latin typeface="Arial" charset="0"/>
+                        <a:ea typeface="Arial" charset="0"/>
+                        <a:cs typeface="Arial" charset="0"/>
+                      </a:endParaRPr>
+                    </a:p>
+                  </a:txBody>
+                  <a:tcPr marL="53340" marR="53340" marT="53340" marB="53340" anchor="t">
+                    <a:lnL w="12700" cap="flat" cmpd="sng" algn="ctr">
+                      <a:solidFill>
+                        <a:srgbClr val="CBCBCB"/>
+                      </a:solidFill>
+                      <a:prstDash val="solid"/>
+                      <a:round/>
+                      <a:headEnd type="none" w="med" len="med"/>
+                      <a:tailEnd type="none" w="med" len="med"/>
+                    </a:lnL>
+                    <a:lnR w="12700" cap="flat" cmpd="sng" algn="ctr">
+                      <a:solidFill>
+                        <a:srgbClr val="C8C8C7"/>
+                      </a:solidFill>
+                      <a:prstDash val="solid"/>
+                      <a:round/>
+                      <a:headEnd type="none" w="med" len="med"/>
+                      <a:tailEnd type="none" w="med" len="med"/>
+                    </a:lnR>
+                    <a:lnT w="12700" cap="flat" cmpd="sng" algn="ctr">
+                      <a:solidFill>
+                        <a:srgbClr val="CBCBCB"/>
+                      </a:solidFill>
+                      <a:prstDash val="solid"/>
+                      <a:round/>
+                      <a:headEnd type="none" w="med" len="med"/>
+                      <a:tailEnd type="none" w="med" len="med"/>
+                    </a:lnT>
+                    <a:lnB w="12700" cap="flat" cmpd="sng" algn="ctr">
+                      <a:solidFill>
+                        <a:srgbClr val="C8C8C7"/>
+                      </a:solidFill>
+                      <a:prstDash val="solid"/>
+                      <a:round/>
+                      <a:headEnd type="none" w="med" len="med"/>
+                      <a:tailEnd type="none" w="med" len="med"/>
+                    </a:lnB>
+                    <a:solidFill>
+                      <a:srgbClr val="FBFBFA"/>
+                    </a:solidFill>
+                  </a:tcPr>
+                </a:tc>
+                <a:tc>
+                  <a:txBody>
+                    <a:bodyPr/>
+                    <a:lstStyle/>
+                    <a:p>
+                      <a:pPr indent="0" marL="0">
+                        <a:lnSpc>
+                          <a:spcPts val="1680"/>
+                        </a:lnSpc>
+                        <a:buNone/>
+                      </a:pPr>
+                      <a:r>
+                        <a:rPr lang="en-US" sz="1200" dirty="0">
+                          <a:solidFill>
+                            <a:srgbClr val="233441"/>
+                          </a:solidFill>
+                          <a:latin typeface="Arial" pitchFamily="34" charset="0"/>
+                          <a:ea typeface="Arial" pitchFamily="34" charset="-122"/>
+                          <a:cs typeface="Arial" pitchFamily="34" charset="-120"/>
+                        </a:rPr>
+                        <a:t>Solo salen al proveedor y a Langfuse; la base no sale de la máquina</a:t>
+                      </a:r>
+                      <a:endParaRPr lang="en-US" sz="1200" dirty="0">
+                        <a:latin typeface="Arial" charset="0"/>
+                        <a:ea typeface="Arial" charset="0"/>
+                        <a:cs typeface="Arial" charset="0"/>
+                      </a:endParaRPr>
+                    </a:p>
+                  </a:txBody>
+                  <a:tcPr marL="53340" marR="53340" marT="53340" marB="53340" anchor="t">
+                    <a:lnL w="12700" cap="flat" cmpd="sng" algn="ctr">
+                      <a:solidFill>
+                        <a:srgbClr val="C8C8C7"/>
+                      </a:solidFill>
+                      <a:prstDash val="solid"/>
+                      <a:round/>
+                      <a:headEnd type="none" w="med" len="med"/>
+                      <a:tailEnd type="none" w="med" len="med"/>
+                    </a:lnL>
+                    <a:lnR w="12700" cap="flat" cmpd="sng" algn="ctr">
+                      <a:solidFill>
+                        <a:srgbClr val="C8C8C7"/>
+                      </a:solidFill>
+                      <a:prstDash val="solid"/>
+                      <a:round/>
+                      <a:headEnd type="none" w="med" len="med"/>
+                      <a:tailEnd type="none" w="med" len="med"/>
+                    </a:lnR>
+                    <a:lnT w="12700" cap="flat" cmpd="sng" algn="ctr">
+                      <a:solidFill>
+                        <a:srgbClr val="CBCBCB"/>
+                      </a:solidFill>
+                      <a:prstDash val="solid"/>
+                      <a:round/>
+                      <a:headEnd type="none" w="med" len="med"/>
+                      <a:tailEnd type="none" w="med" len="med"/>
+                    </a:lnT>
+                    <a:lnB w="12700" cap="flat" cmpd="sng" algn="ctr">
+                      <a:solidFill>
+                        <a:srgbClr val="C8C8C7"/>
+                      </a:solidFill>
+                      <a:prstDash val="solid"/>
+                      <a:round/>
+                      <a:headEnd type="none" w="med" len="med"/>
+                      <a:tailEnd type="none" w="med" len="med"/>
+                    </a:lnB>
+                    <a:solidFill>
+                      <a:srgbClr val="FBFBFA"/>
+                    </a:solidFill>
+                  </a:tcPr>
+                </a:tc>
+                <a:tc>
+                  <a:txBody>
+                    <a:bodyPr/>
+                    <a:lstStyle/>
+                    <a:p>
+                      <a:pPr indent="0" marL="0">
+                        <a:lnSpc>
+                          <a:spcPts val="1680"/>
+                        </a:lnSpc>
+                        <a:buNone/>
+                      </a:pPr>
+                      <a:r>
+                        <a:rPr lang="en-US" sz="1200" dirty="0">
+                          <a:solidFill>
+                            <a:srgbClr val="233441"/>
+                          </a:solidFill>
+                          <a:latin typeface="Arial" pitchFamily="34" charset="0"/>
+                          <a:ea typeface="Arial" pitchFamily="34" charset="-122"/>
+                          <a:cs typeface="Arial" pitchFamily="34" charset="-120"/>
+                        </a:rPr>
+                        <a:t>DPA con el proveedor y aviso de privacidad (LFPDPPP), con retención y borrado</a:t>
+                      </a:r>
+                      <a:endParaRPr lang="en-US" sz="1200" dirty="0">
+                        <a:latin typeface="Arial" charset="0"/>
+                        <a:ea typeface="Arial" charset="0"/>
+                        <a:cs typeface="Arial" charset="0"/>
+                      </a:endParaRPr>
+                    </a:p>
+                  </a:txBody>
+                  <a:tcPr marL="53340" marR="53340" marT="53340" marB="53340" anchor="t">
+                    <a:lnL w="12700" cap="flat" cmpd="sng" algn="ctr">
+                      <a:solidFill>
+                        <a:srgbClr val="C8C8C7"/>
+                      </a:solidFill>
+                      <a:prstDash val="solid"/>
+                      <a:round/>
+                      <a:headEnd type="none" w="med" len="med"/>
+                      <a:tailEnd type="none" w="med" len="med"/>
+                    </a:lnL>
+                    <a:lnR w="12700" cap="flat" cmpd="sng" algn="ctr">
+                      <a:solidFill>
+                        <a:srgbClr val="C8C8C7"/>
+                      </a:solidFill>
+                      <a:prstDash val="solid"/>
+                      <a:round/>
+                      <a:headEnd type="none" w="med" len="med"/>
+                      <a:tailEnd type="none" w="med" len="med"/>
+                    </a:lnR>
+                    <a:lnT w="12700" cap="flat" cmpd="sng" algn="ctr">
+                      <a:solidFill>
+                        <a:srgbClr val="CBCBCB"/>
+                      </a:solidFill>
+                      <a:prstDash val="solid"/>
+                      <a:round/>
+                      <a:headEnd type="none" w="med" len="med"/>
+                      <a:tailEnd type="none" w="med" len="med"/>
+                    </a:lnT>
+                    <a:lnB w="12700" cap="flat" cmpd="sng" algn="ctr">
+                      <a:solidFill>
+                        <a:srgbClr val="C8C8C7"/>
+                      </a:solidFill>
+                      <a:prstDash val="solid"/>
+                      <a:round/>
+                      <a:headEnd type="none" w="med" len="med"/>
+                      <a:tailEnd type="none" w="med" len="med"/>
+                    </a:lnB>
+                    <a:solidFill>
+                      <a:srgbClr val="FBFBFA"/>
+                    </a:solidFill>
+                  </a:tcPr>
+                </a:tc>
+              </a:tr>
+              <a:tr h="515541">
+                <a:tc>
+                  <a:txBody>
+                    <a:bodyPr/>
+                    <a:lstStyle/>
+                    <a:p>
+                      <a:pPr indent="0" marL="0">
+                        <a:lnSpc>
+                          <a:spcPts val="1680"/>
+                        </a:lnSpc>
+                        <a:buNone/>
+                      </a:pPr>
+                      <a:r>
+                        <a:rPr lang="en-US" sz="1200" dirty="0">
+                          <a:solidFill>
+                            <a:srgbClr val="233441"/>
+                          </a:solidFill>
+                          <a:latin typeface="Arial" pitchFamily="34" charset="0"/>
+                          <a:ea typeface="Arial" pitchFamily="34" charset="-122"/>
+                          <a:cs typeface="Arial" pitchFamily="34" charset="-120"/>
+                        </a:rPr>
+                        <a:t>El Extractor escribe mal el canon</a:t>
+                      </a:r>
+                      <a:endParaRPr lang="en-US" sz="1200" dirty="0">
+                        <a:latin typeface="Arial" charset="0"/>
+                        <a:ea typeface="Arial" charset="0"/>
+                        <a:cs typeface="Arial" charset="0"/>
+                      </a:endParaRPr>
+                    </a:p>
+                  </a:txBody>
+                  <a:tcPr marL="53340" marR="53340" marT="53340" marB="53340" anchor="t">
+                    <a:lnL w="12700" cap="flat" cmpd="sng" algn="ctr">
+                      <a:solidFill>
+                        <a:srgbClr val="CBCBCB"/>
+                      </a:solidFill>
+                      <a:prstDash val="solid"/>
+                      <a:round/>
+                      <a:headEnd type="none" w="med" len="med"/>
+                      <a:tailEnd type="none" w="med" len="med"/>
+                    </a:lnL>
+                    <a:lnR w="12700" cap="flat" cmpd="sng" algn="ctr">
+                      <a:solidFill>
+                        <a:srgbClr val="CBCBCB"/>
+                      </a:solidFill>
+                      <a:prstDash val="solid"/>
+                      <a:round/>
+                      <a:headEnd type="none" w="med" len="med"/>
+                      <a:tailEnd type="none" w="med" len="med"/>
+                    </a:lnR>
+                    <a:lnT w="12700" cap="flat" cmpd="sng" algn="ctr">
+                      <a:solidFill>
+                        <a:srgbClr val="C8C8C7"/>
+                      </a:solidFill>
+                      <a:prstDash val="solid"/>
+                      <a:round/>
+                      <a:headEnd type="none" w="med" len="med"/>
+                      <a:tailEnd type="none" w="med" len="med"/>
+                    </a:lnT>
+                    <a:lnB w="12700" cap="flat" cmpd="sng" algn="ctr">
+                      <a:solidFill>
+                        <a:srgbClr val="CBCBCB"/>
+                      </a:solidFill>
+                      <a:prstDash val="solid"/>
+                      <a:round/>
+                      <a:headEnd type="none" w="med" len="med"/>
+                      <a:tailEnd type="none" w="med" len="med"/>
+                    </a:lnB>
+                  </a:tcPr>
+                </a:tc>
+                <a:tc>
+                  <a:txBody>
+                    <a:bodyPr/>
+                    <a:lstStyle/>
+                    <a:p>
+                      <a:pPr indent="0" marL="0">
+                        <a:lnSpc>
+                          <a:spcPts val="1680"/>
+                        </a:lnSpc>
+                        <a:buNone/>
+                      </a:pPr>
+                      <a:r>
+                        <a:rPr lang="en-US" sz="1200" dirty="0">
+                          <a:solidFill>
+                            <a:srgbClr val="233441"/>
+                          </a:solidFill>
+                          <a:latin typeface="Arial" pitchFamily="34" charset="0"/>
+                          <a:ea typeface="Arial" pitchFamily="34" charset="-122"/>
+                          <a:cs typeface="Arial" pitchFamily="34" charset="-120"/>
+                        </a:rPr>
+                        <a:t>Validadores tolerantes y Lean como red: cazó un error real</a:t>
+                      </a:r>
+                      <a:endParaRPr lang="en-US" sz="1200" dirty="0">
+                        <a:latin typeface="Arial" charset="0"/>
+                        <a:ea typeface="Arial" charset="0"/>
+                        <a:cs typeface="Arial" charset="0"/>
+                      </a:endParaRPr>
+                    </a:p>
+                  </a:txBody>
+                  <a:tcPr marL="53340" marR="53340" marT="53340" marB="53340" anchor="t">
+                    <a:lnL w="12700" cap="flat" cmpd="sng" algn="ctr">
+                      <a:solidFill>
+                        <a:srgbClr val="CBCBCB"/>
+                      </a:solidFill>
+                      <a:prstDash val="solid"/>
+                      <a:round/>
+                      <a:headEnd type="none" w="med" len="med"/>
+                      <a:tailEnd type="none" w="med" len="med"/>
+                    </a:lnL>
+                    <a:lnR w="12700" cap="flat" cmpd="sng" algn="ctr">
+                      <a:solidFill>
+                        <a:srgbClr val="CBCBCB"/>
+                      </a:solidFill>
+                      <a:prstDash val="solid"/>
+                      <a:round/>
+                      <a:headEnd type="none" w="med" len="med"/>
+                      <a:tailEnd type="none" w="med" len="med"/>
+                    </a:lnR>
+                    <a:lnT w="12700" cap="flat" cmpd="sng" algn="ctr">
+                      <a:solidFill>
+                        <a:srgbClr val="C8C8C7"/>
+                      </a:solidFill>
+                      <a:prstDash val="solid"/>
+                      <a:round/>
+                      <a:headEnd type="none" w="med" len="med"/>
+                      <a:tailEnd type="none" w="med" len="med"/>
+                    </a:lnT>
+                    <a:lnB w="12700" cap="flat" cmpd="sng" algn="ctr">
+                      <a:solidFill>
+                        <a:srgbClr val="CBCBCB"/>
+                      </a:solidFill>
+                      <a:prstDash val="solid"/>
+                      <a:round/>
+                      <a:headEnd type="none" w="med" len="med"/>
+                      <a:tailEnd type="none" w="med" len="med"/>
+                    </a:lnB>
+                  </a:tcPr>
+                </a:tc>
+                <a:tc>
+                  <a:txBody>
+                    <a:bodyPr/>
+                    <a:lstStyle/>
+                    <a:p>
+                      <a:pPr indent="0" marL="0">
+                        <a:lnSpc>
+                          <a:spcPts val="1680"/>
+                        </a:lnSpc>
+                        <a:buNone/>
+                      </a:pPr>
+                      <a:r>
+                        <a:rPr lang="en-US" sz="1200" dirty="0">
+                          <a:solidFill>
+                            <a:srgbClr val="233441"/>
+                          </a:solidFill>
+                          <a:latin typeface="Arial" pitchFamily="34" charset="0"/>
+                          <a:ea typeface="Arial" pitchFamily="34" charset="-122"/>
+                          <a:cs typeface="Arial" pitchFamily="34" charset="-120"/>
+                        </a:rPr>
+                        <a:t>Prompt y esquema que distingan personaje, objeto y lugar</a:t>
+                      </a:r>
+                      <a:endParaRPr lang="en-US" sz="1200" dirty="0">
+                        <a:latin typeface="Arial" charset="0"/>
+                        <a:ea typeface="Arial" charset="0"/>
+                        <a:cs typeface="Arial" charset="0"/>
+                      </a:endParaRPr>
+                    </a:p>
+                  </a:txBody>
+                  <a:tcPr marL="53340" marR="53340" marT="53340" marB="53340" anchor="t">
+                    <a:lnL w="12700" cap="flat" cmpd="sng" algn="ctr">
+                      <a:solidFill>
+                        <a:srgbClr val="CBCBCB"/>
+                      </a:solidFill>
+                      <a:prstDash val="solid"/>
+                      <a:round/>
+                      <a:headEnd type="none" w="med" len="med"/>
+                      <a:tailEnd type="none" w="med" len="med"/>
+                    </a:lnL>
+                    <a:lnR w="12700" cap="flat" cmpd="sng" algn="ctr">
+                      <a:solidFill>
+                        <a:srgbClr val="CBCBCB"/>
+                      </a:solidFill>
+                      <a:prstDash val="solid"/>
+                      <a:round/>
+                      <a:headEnd type="none" w="med" len="med"/>
+                      <a:tailEnd type="none" w="med" len="med"/>
+                    </a:lnR>
+                    <a:lnT w="12700" cap="flat" cmpd="sng" algn="ctr">
+                      <a:solidFill>
+                        <a:srgbClr val="C8C8C7"/>
+                      </a:solidFill>
+                      <a:prstDash val="solid"/>
+                      <a:round/>
+                      <a:headEnd type="none" w="med" len="med"/>
+                      <a:tailEnd type="none" w="med" len="med"/>
+                    </a:lnT>
+                    <a:lnB w="12700" cap="flat" cmpd="sng" algn="ctr">
+                      <a:solidFill>
+                        <a:srgbClr val="CBCBCB"/>
+                      </a:solidFill>
+                      <a:prstDash val="solid"/>
+                      <a:round/>
+                      <a:headEnd type="none" w="med" len="med"/>
+                      <a:tailEnd type="none" w="med" len="med"/>
+                    </a:lnB>
+                  </a:tcPr>
+                </a:tc>
+              </a:tr>
+              <a:tr h="515541">
+                <a:tc>
+                  <a:txBody>
+                    <a:bodyPr/>
+                    <a:lstStyle/>
+                    <a:p>
+                      <a:pPr indent="0" marL="0">
+                        <a:lnSpc>
+                          <a:spcPts val="1680"/>
+                        </a:lnSpc>
+                        <a:buNone/>
+                      </a:pPr>
+                      <a:r>
+                        <a:rPr lang="en-US" sz="1200" dirty="0">
+                          <a:solidFill>
+                            <a:srgbClr val="233441"/>
+                          </a:solidFill>
+                          <a:latin typeface="Arial" pitchFamily="34" charset="0"/>
+                          <a:ea typeface="Arial" pitchFamily="34" charset="-122"/>
+                          <a:cs typeface="Arial" pitchFamily="34" charset="-120"/>
+                        </a:rPr>
+                        <a:t>El coste triplica la estimación</a:t>
+                      </a:r>
+                      <a:endParaRPr lang="en-US" sz="1200" dirty="0">
+                        <a:latin typeface="Arial" charset="0"/>
+                        <a:ea typeface="Arial" charset="0"/>
+                        <a:cs typeface="Arial" charset="0"/>
+                      </a:endParaRPr>
+                    </a:p>
+                  </a:txBody>
+                  <a:tcPr marL="53340" marR="53340" marT="53340" marB="53340" anchor="t">
+                    <a:lnL w="12700" cap="flat" cmpd="sng" algn="ctr">
+                      <a:solidFill>
+                        <a:srgbClr val="CBCBCB"/>
+                      </a:solidFill>
+                      <a:prstDash val="solid"/>
+                      <a:round/>
+                      <a:headEnd type="none" w="med" len="med"/>
+                      <a:tailEnd type="none" w="med" len="med"/>
+                    </a:lnL>
+                    <a:lnR w="12700" cap="flat" cmpd="sng" algn="ctr">
+                      <a:solidFill>
+                        <a:srgbClr val="C8C8C7"/>
+                      </a:solidFill>
+                      <a:prstDash val="solid"/>
+                      <a:round/>
+                      <a:headEnd type="none" w="med" len="med"/>
+                      <a:tailEnd type="none" w="med" len="med"/>
+                    </a:lnR>
+                    <a:lnT w="12700" cap="flat" cmpd="sng" algn="ctr">
+                      <a:solidFill>
+                        <a:srgbClr val="CBCBCB"/>
+                      </a:solidFill>
+                      <a:prstDash val="solid"/>
+                      <a:round/>
+                      <a:headEnd type="none" w="med" len="med"/>
+                      <a:tailEnd type="none" w="med" len="med"/>
+                    </a:lnT>
+                    <a:lnB w="12700" cap="flat" cmpd="sng" algn="ctr">
+                      <a:solidFill>
+                        <a:srgbClr val="C8C8C7"/>
+                      </a:solidFill>
+                      <a:prstDash val="solid"/>
+                      <a:round/>
+                      <a:headEnd type="none" w="med" len="med"/>
+                      <a:tailEnd type="none" w="med" len="med"/>
+                    </a:lnB>
+                    <a:solidFill>
+                      <a:srgbClr val="FBFBFA"/>
+                    </a:solidFill>
+                  </a:tcPr>
+                </a:tc>
+                <a:tc>
+                  <a:txBody>
+                    <a:bodyPr/>
+                    <a:lstStyle/>
+                    <a:p>
+                      <a:pPr indent="0" marL="0">
+                        <a:lnSpc>
+                          <a:spcPts val="1680"/>
+                        </a:lnSpc>
+                        <a:buNone/>
+                      </a:pPr>
+                      <a:r>
+                        <a:rPr lang="en-US" sz="1200" dirty="0">
+                          <a:solidFill>
+                            <a:srgbClr val="233441"/>
+                          </a:solidFill>
+                          <a:latin typeface="Arial" pitchFamily="34" charset="0"/>
+                          <a:ea typeface="Arial" pitchFamily="34" charset="-122"/>
+                          <a:cs typeface="Arial" pitchFamily="34" charset="-120"/>
+                        </a:rPr>
+                        <a:t>El margen del 83 % lo absorbe</a:t>
+                      </a:r>
+                      <a:endParaRPr lang="en-US" sz="1200" dirty="0">
+                        <a:latin typeface="Arial" charset="0"/>
+                        <a:ea typeface="Arial" charset="0"/>
+                        <a:cs typeface="Arial" charset="0"/>
+                      </a:endParaRPr>
+                    </a:p>
+                  </a:txBody>
+                  <a:tcPr marL="53340" marR="53340" marT="53340" marB="53340" anchor="t">
+                    <a:lnL w="12700" cap="flat" cmpd="sng" algn="ctr">
+                      <a:solidFill>
+                        <a:srgbClr val="C8C8C7"/>
+                      </a:solidFill>
+                      <a:prstDash val="solid"/>
+                      <a:round/>
+                      <a:headEnd type="none" w="med" len="med"/>
+                      <a:tailEnd type="none" w="med" len="med"/>
+                    </a:lnL>
+                    <a:lnR w="12700" cap="flat" cmpd="sng" algn="ctr">
+                      <a:solidFill>
+                        <a:srgbClr val="C8C8C7"/>
+                      </a:solidFill>
+                      <a:prstDash val="solid"/>
+                      <a:round/>
+                      <a:headEnd type="none" w="med" len="med"/>
+                      <a:tailEnd type="none" w="med" len="med"/>
+                    </a:lnR>
+                    <a:lnT w="12700" cap="flat" cmpd="sng" algn="ctr">
+                      <a:solidFill>
+                        <a:srgbClr val="CBCBCB"/>
+                      </a:solidFill>
+                      <a:prstDash val="solid"/>
+                      <a:round/>
+                      <a:headEnd type="none" w="med" len="med"/>
+                      <a:tailEnd type="none" w="med" len="med"/>
+                    </a:lnT>
+                    <a:lnB w="12700" cap="flat" cmpd="sng" algn="ctr">
+                      <a:solidFill>
+                        <a:srgbClr val="C8C8C7"/>
+                      </a:solidFill>
+                      <a:prstDash val="solid"/>
+                      <a:round/>
+                      <a:headEnd type="none" w="med" len="med"/>
+                      <a:tailEnd type="none" w="med" len="med"/>
+                    </a:lnB>
+                    <a:solidFill>
+                      <a:srgbClr val="FBFBFA"/>
+                    </a:solidFill>
+                  </a:tcPr>
+                </a:tc>
+                <a:tc>
+                  <a:txBody>
+                    <a:bodyPr/>
+                    <a:lstStyle/>
+                    <a:p>
+                      <a:pPr indent="0" marL="0">
+                        <a:lnSpc>
+                          <a:spcPts val="1680"/>
+                        </a:lnSpc>
+                        <a:buNone/>
+                      </a:pPr>
+                      <a:r>
+                        <a:rPr lang="en-US" sz="1200" dirty="0">
+                          <a:solidFill>
+                            <a:srgbClr val="233441"/>
+                          </a:solidFill>
+                          <a:latin typeface="Arial" pitchFamily="34" charset="0"/>
+                          <a:ea typeface="Arial" pitchFamily="34" charset="-122"/>
+                          <a:cs typeface="Arial" pitchFamily="34" charset="-120"/>
+                        </a:rPr>
+                        <a:t>Menos reparaciones y un Continuista más barato: es el 43 % del coste</a:t>
+                      </a:r>
+                      <a:endParaRPr lang="en-US" sz="1200" dirty="0">
+                        <a:latin typeface="Arial" charset="0"/>
+                        <a:ea typeface="Arial" charset="0"/>
+                        <a:cs typeface="Arial" charset="0"/>
+                      </a:endParaRPr>
+                    </a:p>
+                  </a:txBody>
+                  <a:tcPr marL="53340" marR="53340" marT="53340" marB="53340" anchor="t">
+                    <a:lnL w="12700" cap="flat" cmpd="sng" algn="ctr">
+                      <a:solidFill>
+                        <a:srgbClr val="C8C8C7"/>
+                      </a:solidFill>
+                      <a:prstDash val="solid"/>
+                      <a:round/>
+                      <a:headEnd type="none" w="med" len="med"/>
+                      <a:tailEnd type="none" w="med" len="med"/>
+                    </a:lnL>
+                    <a:lnR w="12700" cap="flat" cmpd="sng" algn="ctr">
+                      <a:solidFill>
+                        <a:srgbClr val="C8C8C7"/>
+                      </a:solidFill>
+                      <a:prstDash val="solid"/>
+                      <a:round/>
+                      <a:headEnd type="none" w="med" len="med"/>
+                      <a:tailEnd type="none" w="med" len="med"/>
+                    </a:lnR>
+                    <a:lnT w="12700" cap="flat" cmpd="sng" algn="ctr">
+                      <a:solidFill>
+                        <a:srgbClr val="CBCBCB"/>
+                      </a:solidFill>
+                      <a:prstDash val="solid"/>
+                      <a:round/>
+                      <a:headEnd type="none" w="med" len="med"/>
+                      <a:tailEnd type="none" w="med" len="med"/>
+                    </a:lnT>
+                    <a:lnB w="12700" cap="flat" cmpd="sng" algn="ctr">
+                      <a:solidFill>
+                        <a:srgbClr val="C8C8C7"/>
+                      </a:solidFill>
+                      <a:prstDash val="solid"/>
+                      <a:round/>
+                      <a:headEnd type="none" w="med" len="med"/>
+                      <a:tailEnd type="none" w="med" len="med"/>
+                    </a:lnB>
+                    <a:solidFill>
+                      <a:srgbClr val="FBFBFA"/>
+                    </a:solidFill>
+                  </a:tcPr>
+                </a:tc>
+              </a:tr>
+            </a:tbl>
+          </a:graphicData>
+        </a:graphic>
+      </p:graphicFrame>
+      <p:pic>
+        <p:nvPicPr>
+          <p:cNvPr id="5" name="Image 0" descr="preencoded.png">    </p:cNvPr>
+          <p:cNvPicPr>
+            <a:picLocks noChangeAspect="1"/>
+          </p:cNvPicPr>
+          <p:nvPr/>
+        </p:nvPicPr>
+        <p:blipFill>
+          <a:blip r:embed="rId1"/>
+          <a:srcRect l="0" r="0" t="-7895" b="-7895"/>
+          <a:stretch/>
+        </p:blipFill>
+        <p:spPr>
+          <a:xfrm>
+            <a:off x="11049000" y="609600"/>
+            <a:ext cx="361950" cy="419100"/>
+          </a:xfrm>
+          <a:prstGeom prst="rect">
+            <a:avLst/>
+          </a:prstGeom>
+        </p:spPr>
+      </p:pic>
+      <p:sp>
+        <p:nvSpPr>
+          <p:cNvPr id="6" name="Text 2"/>
+          <p:cNvSpPr/>
+          <p:nvPr/>
+        </p:nvSpPr>
+        <p:spPr>
+          <a:xfrm>
+            <a:off x="971550" y="6289080"/>
+            <a:ext cx="10556367" cy="238720"/>
+          </a:xfrm>
+          <a:prstGeom prst="rect">
+            <a:avLst/>
+          </a:prstGeom>
+          <a:noFill/>
+          <a:ln/>
+        </p:spPr>
+        <p:txBody>
+          <a:bodyPr wrap="square" lIns="0" tIns="0" rIns="0" bIns="0" rtlCol="0" anchor="t">
+            <a:normAutofit/>
+          </a:bodyPr>
+          <a:lstStyle/>
+          <a:p>
+            <a:pPr algn="l" indent="0" marL="0">
+              <a:lnSpc>
+                <a:spcPts val="1680"/>
+              </a:lnSpc>
+              <a:buNone/>
+            </a:pPr>
+            <a:r>
+              <a:rPr lang="en-US" sz="1200" i="1" dirty="0">
+                <a:solidFill>
+                  <a:srgbClr val="93A0AB"/>
+                </a:solidFill>
+                <a:latin typeface="Arial" pitchFamily="34" charset="0"/>
+                <a:ea typeface="Arial" pitchFamily="34" charset="-122"/>
+                <a:cs typeface="Arial" pitchFamily="34" charset="-120"/>
+              </a:rPr>
+              <a:t>© Qaracter group, all rights reserved 2026 · Detalle en el anexo A5 y en specs/problemas-abiertos.md</a:t>
+            </a:r>
+            <a:endParaRPr lang="en-US" sz="1200" dirty="0"/>
+          </a:p>
+        </p:txBody>
+      </p:sp>
+    </p:spTree>
+  </p:cSld>
+  <p:clrMapOvr>
+    <a:masterClrMapping/>
+  </p:clrMapOvr>
+</p:sld>
+</file>
+
+<file path=ppt/slides/slide15.xml><?xml version="1.0" encoding="utf-8"?>
+<p:sld xmlns:a="http://schemas.openxmlformats.org/drawingml/2006/main" xmlns:r="http://schemas.openxmlformats.org/officeDocument/2006/relationships" xmlns:p="http://schemas.openxmlformats.org/presentationml/2006/main">
+  <p:cSld name="Slide 15">
+    <p:bg>
+      <p:bgPr>
+        <a:solidFill>
+          <a:srgbClr val="FFFFFF"/>
+        </a:solidFill>
+      </p:bgPr>
+    </p:bg>
+    <p:spTree>
+      <p:nvGrpSpPr>
+        <p:cNvPr id="1" name=""/>
+        <p:cNvGrpSpPr/>
+        <p:nvPr/>
+      </p:nvGrpSpPr>
+      <p:grpSpPr>
+        <a:xfrm>
+          <a:off x="0" y="0"/>
+          <a:ext cx="0" cy="0"/>
+          <a:chOff x="0" y="0"/>
+          <a:chExt cx="0" cy="0"/>
+        </a:xfrm>
+      </p:grpSpPr>
       <p:pic>
         <p:nvPicPr>
           <p:cNvPr id="2" name="Image 0" descr="preencoded.png">    </p:cNvPr>
@@ -8618,7 +10307,7 @@
                 <a:ea typeface="Arial" pitchFamily="34" charset="-122"/>
                 <a:cs typeface="Arial" pitchFamily="34" charset="-120"/>
               </a:rPr>
-              <a:t>12 · DEMO Y CIERRE</a:t>
+              <a:t>13 · DEMO Y CIERRE</a:t>
             </a:r>
             <a:endParaRPr lang="en-US" sz="1200" dirty="0"/>
           </a:p>
@@ -8662,7 +10351,7 @@
                 <a:ea typeface="Arial" pitchFamily="34" charset="-122"/>
                 <a:cs typeface="Arial" pitchFamily="34" charset="-120"/>
               </a:rPr>
-              <a:t>Un cambio del lector que se propaga, y lo que viene después</a:t>
+              <a:t>Un cambio del lector que se propaga, y lo que proponemos</a:t>
             </a:r>
             <a:endParaRPr lang="en-US" sz="2600" dirty="0"/>
           </a:p>
@@ -8706,7 +10395,7 @@
                 <a:ea typeface="Arial" pitchFamily="34" charset="-122"/>
                 <a:cs typeface="Arial" pitchFamily="34" charset="-120"/>
               </a:rPr>
-              <a:t>Riesgos</a:t>
+              <a:t>Qué se ve</a:t>
             </a:r>
             <a:endParaRPr lang="en-US" sz="1600" dirty="0"/>
           </a:p>
@@ -8720,8 +10409,8 @@
         </p:nvSpPr>
         <p:spPr>
           <a:xfrm>
-            <a:off x="971550" y="1913868"/>
-            <a:ext cx="4185920" cy="665361"/>
+            <a:off x="971550" y="1901168"/>
+            <a:ext cx="4185920" cy="878681"/>
           </a:xfrm>
           <a:prstGeom prst="rect">
             <a:avLst/>
@@ -8750,7 +10439,47 @@
                 <a:ea typeface="Arial" pitchFamily="34" charset="-122"/>
                 <a:cs typeface="Arial" pitchFamily="34" charset="-120"/>
               </a:rPr>
-              <a:t>Límites de uso del proveedor · SQLite es de un escritor · el juez comparte modelo con el Escritor · tratamiento de datos personales.</a:t>
+              <a:t>1 · El lector corrige un hecho desde «Quién es quién».</a:t>
+            </a:r>
+            <a:endParaRPr lang="en-US" sz="1200" dirty="0"/>
+          </a:p>
+          <a:p>
+            <a:pPr algn="l" indent="0" marL="0">
+              <a:lnSpc>
+                <a:spcPts val="1680"/>
+              </a:lnSpc>
+              <a:buNone/>
+            </a:pPr>
+            <a:r>
+              <a:rPr lang="en-US" sz="1200" dirty="0">
+                <a:solidFill>
+                  <a:srgbClr val="3C4645"/>
+                </a:solidFill>
+                <a:latin typeface="Arial" pitchFamily="34" charset="0"/>
+                <a:ea typeface="Arial" pitchFamily="34" charset="-122"/>
+                <a:cs typeface="Arial" pitchFamily="34" charset="-120"/>
+              </a:rPr>
+              <a:t>2 · Solo se regeneran los capítulos que lo usan.</a:t>
+            </a:r>
+            <a:endParaRPr lang="en-US" sz="1200" dirty="0"/>
+          </a:p>
+          <a:p>
+            <a:pPr algn="l" indent="0" marL="0">
+              <a:lnSpc>
+                <a:spcPts val="1680"/>
+              </a:lnSpc>
+              <a:buNone/>
+            </a:pPr>
+            <a:r>
+              <a:rPr lang="en-US" sz="1200" dirty="0">
+                <a:solidFill>
+                  <a:srgbClr val="3C4645"/>
+                </a:solidFill>
+                <a:latin typeface="Arial" pitchFamily="34" charset="0"/>
+                <a:ea typeface="Arial" pitchFamily="34" charset="-122"/>
+                <a:cs typeface="Arial" pitchFamily="34" charset="-120"/>
+              </a:rPr>
+              <a:t>3 · Versión nueva, con los capítulos marcados; la anterior se conserva.</a:t>
             </a:r>
             <a:endParaRPr lang="en-US" sz="1200" dirty="0"/>
           </a:p>
@@ -8764,7 +10493,7 @@
         </p:nvSpPr>
         <p:spPr>
           <a:xfrm>
-            <a:off x="971550" y="2680829"/>
+            <a:off x="971550" y="2868749"/>
             <a:ext cx="4185920" cy="269214"/>
           </a:xfrm>
           <a:prstGeom prst="rect">
@@ -8794,7 +10523,7 @@
                 <a:ea typeface="Arial" pitchFamily="34" charset="-122"/>
                 <a:cs typeface="Arial" pitchFamily="34" charset="-120"/>
               </a:rPr>
-              <a:t>Siguientes pasos</a:t>
+              <a:t>Hoja de ruta</a:t>
             </a:r>
             <a:endParaRPr lang="en-US" sz="1600" dirty="0"/>
           </a:p>
@@ -8808,8 +10537,8 @@
         </p:nvSpPr>
         <p:spPr>
           <a:xfrm>
-            <a:off x="971550" y="3051640"/>
-            <a:ext cx="4185920" cy="452041"/>
+            <a:off x="971550" y="3226860"/>
+            <a:ext cx="4185920" cy="665361"/>
           </a:xfrm>
           <a:prstGeom prst="rect">
             <a:avLst/>
@@ -8838,15 +10567,128 @@
                 <a:ea typeface="Arial" pitchFamily="34" charset="-122"/>
                 <a:cs typeface="Arial" pitchFamily="34" charset="-120"/>
               </a:rPr>
-              <a:t>Postgres al escalar · juez en otro modelo · feedback de Lean al editor · linters de prosa · servidor MCP de lectura.</a:t>
+              <a:t>Feedback de Lean al Escritor · linters de prosa · servidor MCP de lectura · decisión sobre escalados en la app · dedicatoria en la entrevista.</a:t>
             </a:r>
             <a:endParaRPr lang="en-US" sz="1200" dirty="0"/>
           </a:p>
         </p:txBody>
       </p:sp>
+      <p:sp>
+        <p:nvSpPr>
+          <p:cNvPr id="10" name="Shape 7"/>
+          <p:cNvSpPr/>
+          <p:nvPr/>
+        </p:nvSpPr>
+        <p:spPr>
+          <a:xfrm>
+            <a:off x="977900" y="3987471"/>
+            <a:ext cx="4051300" cy="1005747"/>
+          </a:xfrm>
+          <a:prstGeom prst="roundRect">
+            <a:avLst>
+              <a:gd name="adj" fmla="val 8208"/>
+            </a:avLst>
+          </a:prstGeom>
+          <a:noFill/>
+          <a:ln w="12700">
+            <a:solidFill>
+              <a:srgbClr val="F87936"/>
+            </a:solidFill>
+            <a:prstDash val="solid"/>
+          </a:ln>
+        </p:spPr>
+      </p:sp>
+      <p:sp>
+        <p:nvSpPr>
+          <p:cNvPr id="11" name="Text 8"/>
+          <p:cNvSpPr/>
+          <p:nvPr/>
+        </p:nvSpPr>
+        <p:spPr>
+          <a:xfrm>
+            <a:off x="1149350" y="4133521"/>
+            <a:ext cx="3819652" cy="238720"/>
+          </a:xfrm>
+          <a:prstGeom prst="rect">
+            <a:avLst/>
+          </a:prstGeom>
+          <a:noFill/>
+          <a:ln/>
+        </p:spPr>
+        <p:txBody>
+          <a:bodyPr wrap="square" lIns="0" tIns="0" rIns="0" bIns="0" rtlCol="0" anchor="t">
+            <a:normAutofit/>
+          </a:bodyPr>
+          <a:lstStyle/>
+          <a:p>
+            <a:pPr algn="l" indent="0" marL="0">
+              <a:lnSpc>
+                <a:spcPts val="1680"/>
+              </a:lnSpc>
+              <a:buNone/>
+            </a:pPr>
+            <a:r>
+              <a:rPr lang="en-US" sz="1200" b="1" spc="100" kern="0" dirty="0">
+                <a:solidFill>
+                  <a:srgbClr val="F4631E"/>
+                </a:solidFill>
+                <a:latin typeface="Arial" pitchFamily="34" charset="0"/>
+                <a:ea typeface="Arial" pitchFamily="34" charset="-122"/>
+                <a:cs typeface="Arial" pitchFamily="34" charset="-120"/>
+              </a:rPr>
+              <a:t>PROPUESTA</a:t>
+            </a:r>
+            <a:endParaRPr lang="en-US" sz="1200" dirty="0"/>
+          </a:p>
+        </p:txBody>
+      </p:sp>
+      <p:sp>
+        <p:nvSpPr>
+          <p:cNvPr id="12" name="Text 9"/>
+          <p:cNvSpPr/>
+          <p:nvPr/>
+        </p:nvSpPr>
+        <p:spPr>
+          <a:xfrm>
+            <a:off x="1149350" y="4384942"/>
+            <a:ext cx="3819652" cy="487627"/>
+          </a:xfrm>
+          <a:prstGeom prst="rect">
+            <a:avLst/>
+          </a:prstGeom>
+          <a:noFill/>
+          <a:ln/>
+        </p:spPr>
+        <p:txBody>
+          <a:bodyPr wrap="square" lIns="0" tIns="0" rIns="0" bIns="0" rtlCol="0" anchor="t">
+            <a:normAutofit/>
+          </a:bodyPr>
+          <a:lstStyle/>
+          <a:p>
+            <a:pPr algn="l" indent="0" marL="0">
+              <a:lnSpc>
+                <a:spcPts val="1820"/>
+              </a:lnSpc>
+              <a:buNone/>
+            </a:pPr>
+            <a:r>
+              <a:rPr lang="en-US" sz="1400" b="1" dirty="0">
+                <a:solidFill>
+                  <a:srgbClr val="233441"/>
+                </a:solidFill>
+                <a:latin typeface="Arial" pitchFamily="34" charset="0"/>
+                <a:ea typeface="Arial" pitchFamily="34" charset="-122"/>
+                <a:cs typeface="Arial" pitchFamily="34" charset="-120"/>
+              </a:rPr>
+              <a:t>Un piloto de 100 novelas con Regalos con Historia.</a:t>
+            </a:r>
+            <a:endParaRPr lang="en-US" sz="1400" dirty="0"/>
+          </a:p>
+        </p:txBody>
+      </p:sp>
       <p:pic>
         <p:nvPicPr>
-          <p:cNvPr id="10" name="Image 1" descr="image.png">    </p:cNvPr>
+          <p:cNvPr id="13" name="Image 1" descr="image.png">    </p:cNvPr>
           <p:cNvPicPr>
             <a:picLocks noChangeAspect="1"/>
           </p:cNvPicPr>
@@ -8854,14 +10696,13 @@
         </p:nvPicPr>
         <p:blipFill>
           <a:blip r:embed="rId2"/>
-          <a:stretch>
-            <a:fillRect/>
-          </a:stretch>
+          <a:srcRect l="-16215" r="-16215" t="0" b="0"/>
+          <a:stretch/>
         </p:blipFill>
         <p:spPr>
           <a:xfrm>
-            <a:off x="5361604" y="1543050"/>
-            <a:ext cx="6167793" cy="2705100"/>
+            <a:off x="5238750" y="1543050"/>
+            <a:ext cx="5422900" cy="3454400"/>
           </a:xfrm>
           <a:prstGeom prst="rect">
             <a:avLst/>
@@ -8876,9 +10717,9 @@
 </p:sld>
 </file>
 
-<file path=ppt/slides/slide15.xml><?xml version="1.0" encoding="utf-8"?>
+<file path=ppt/slides/slide16.xml><?xml version="1.0" encoding="utf-8"?>
 <p:sld xmlns:a="http://schemas.openxmlformats.org/drawingml/2006/main" xmlns:r="http://schemas.openxmlformats.org/officeDocument/2006/relationships" xmlns:p="http://schemas.openxmlformats.org/presentationml/2006/main">
-  <p:cSld name="Slide 15">
+  <p:cSld name="Slide 16">
     <p:bg>
       <p:bgPr>
         <a:solidFill>
@@ -9181,9 +11022,9 @@
 </p:sld>
 </file>
 
-<file path=ppt/slides/slide16.xml><?xml version="1.0" encoding="utf-8"?>
+<file path=ppt/slides/slide17.xml><?xml version="1.0" encoding="utf-8"?>
 <p:sld xmlns:a="http://schemas.openxmlformats.org/drawingml/2006/main" xmlns:r="http://schemas.openxmlformats.org/officeDocument/2006/relationships" xmlns:p="http://schemas.openxmlformats.org/presentationml/2006/main">
-  <p:cSld name="Slide 16">
+  <p:cSld name="Slide 17">
     <p:bg>
       <p:bgPr>
         <a:solidFill>
@@ -9418,9 +11259,9 @@
 </p:sld>
 </file>
 
-<file path=ppt/slides/slide17.xml><?xml version="1.0" encoding="utf-8"?>
+<file path=ppt/slides/slide18.xml><?xml version="1.0" encoding="utf-8"?>
 <p:sld xmlns:a="http://schemas.openxmlformats.org/drawingml/2006/main" xmlns:r="http://schemas.openxmlformats.org/officeDocument/2006/relationships" xmlns:p="http://schemas.openxmlformats.org/presentationml/2006/main">
-  <p:cSld name="Slide 17">
+  <p:cSld name="Slide 18">
     <p:bg>
       <p:bgPr>
         <a:solidFill>
@@ -10354,9 +12195,9 @@
 </p:sld>
 </file>
 
-<file path=ppt/slides/slide18.xml><?xml version="1.0" encoding="utf-8"?>
+<file path=ppt/slides/slide19.xml><?xml version="1.0" encoding="utf-8"?>
 <p:sld xmlns:a="http://schemas.openxmlformats.org/drawingml/2006/main" xmlns:r="http://schemas.openxmlformats.org/officeDocument/2006/relationships" xmlns:p="http://schemas.openxmlformats.org/presentationml/2006/main">
-  <p:cSld name="Slide 18">
+  <p:cSld name="Slide 19">
     <p:bg>
       <p:bgPr>
         <a:solidFill>
@@ -11537,9 +13378,1552 @@
 </p:sld>
 </file>
 
-<file path=ppt/slides/slide19.xml><?xml version="1.0" encoding="utf-8"?>
+<file path=ppt/slides/slide2.xml><?xml version="1.0" encoding="utf-8"?>
 <p:sld xmlns:a="http://schemas.openxmlformats.org/drawingml/2006/main" xmlns:r="http://schemas.openxmlformats.org/officeDocument/2006/relationships" xmlns:p="http://schemas.openxmlformats.org/presentationml/2006/main">
-  <p:cSld name="Slide 19">
+  <p:cSld name="Slide 2">
+    <p:bg>
+      <p:bgPr>
+        <a:solidFill>
+          <a:srgbClr val="FFFFFF"/>
+        </a:solidFill>
+      </p:bgPr>
+    </p:bg>
+    <p:spTree>
+      <p:nvGrpSpPr>
+        <p:cNvPr id="1" name=""/>
+        <p:cNvGrpSpPr/>
+        <p:nvPr/>
+      </p:nvGrpSpPr>
+      <p:grpSpPr>
+        <a:xfrm>
+          <a:off x="0" y="0"/>
+          <a:ext cx="0" cy="0"/>
+          <a:chOff x="0" y="0"/>
+          <a:chExt cx="0" cy="0"/>
+        </a:xfrm>
+      </p:grpSpPr>
+      <p:sp>
+        <p:nvSpPr>
+          <p:cNvPr id="2" name="Text 0"/>
+          <p:cNvSpPr/>
+          <p:nvPr/>
+        </p:nvSpPr>
+        <p:spPr>
+          <a:xfrm>
+            <a:off x="971550" y="711200"/>
+            <a:ext cx="10203180" cy="238720"/>
+          </a:xfrm>
+          <a:prstGeom prst="rect">
+            <a:avLst/>
+          </a:prstGeom>
+          <a:noFill/>
+          <a:ln/>
+        </p:spPr>
+        <p:txBody>
+          <a:bodyPr wrap="square" lIns="0" tIns="0" rIns="0" bIns="0" rtlCol="0" anchor="t">
+            <a:normAutofit/>
+          </a:bodyPr>
+          <a:lstStyle/>
+          <a:p>
+            <a:pPr algn="l" indent="0" marL="0">
+              <a:lnSpc>
+                <a:spcPts val="1680"/>
+              </a:lnSpc>
+              <a:buNone/>
+            </a:pPr>
+            <a:r>
+              <a:rPr lang="en-US" sz="1200" b="1" spc="150" kern="0" dirty="0">
+                <a:solidFill>
+                  <a:srgbClr val="FF7932"/>
+                </a:solidFill>
+                <a:latin typeface="Arial" pitchFamily="34" charset="0"/>
+                <a:ea typeface="Arial" pitchFamily="34" charset="-122"/>
+                <a:cs typeface="Arial" pitchFamily="34" charset="-120"/>
+              </a:rPr>
+              <a:t>01 · EL PROBLEMA Y EL CLIENTE</a:t>
+            </a:r>
+            <a:endParaRPr lang="en-US" sz="1200" dirty="0"/>
+          </a:p>
+        </p:txBody>
+      </p:sp>
+      <p:sp>
+        <p:nvSpPr>
+          <p:cNvPr id="3" name="Text 1"/>
+          <p:cNvSpPr/>
+          <p:nvPr/>
+        </p:nvSpPr>
+        <p:spPr>
+          <a:xfrm>
+            <a:off x="971550" y="975320"/>
+            <a:ext cx="10203180" cy="388607"/>
+          </a:xfrm>
+          <a:prstGeom prst="rect">
+            <a:avLst/>
+          </a:prstGeom>
+          <a:noFill/>
+          <a:ln/>
+        </p:spPr>
+        <p:txBody>
+          <a:bodyPr wrap="square" lIns="0" tIns="0" rIns="0" bIns="0" rtlCol="0" anchor="t">
+            <a:normAutofit/>
+          </a:bodyPr>
+          <a:lstStyle/>
+          <a:p>
+            <a:pPr algn="l" indent="0" marL="0">
+              <a:lnSpc>
+                <a:spcPts val="2860"/>
+              </a:lnSpc>
+              <a:buNone/>
+            </a:pPr>
+            <a:r>
+              <a:rPr lang="en-US" sz="2600" b="1" spc="-50" kern="0" dirty="0">
+                <a:solidFill>
+                  <a:srgbClr val="233441"/>
+                </a:solidFill>
+                <a:latin typeface="Arial" pitchFamily="34" charset="0"/>
+                <a:ea typeface="Arial" pitchFamily="34" charset="-122"/>
+                <a:cs typeface="Arial" pitchFamily="34" charset="-120"/>
+              </a:rPr>
+              <a:t>Hoy se elige entre que sea suyo o que se lea bien</a:t>
+            </a:r>
+            <a:endParaRPr lang="en-US" sz="2600" dirty="0"/>
+          </a:p>
+        </p:txBody>
+      </p:sp>
+      <p:sp>
+        <p:nvSpPr>
+          <p:cNvPr id="4" name="Shape 2"/>
+          <p:cNvSpPr/>
+          <p:nvPr/>
+        </p:nvSpPr>
+        <p:spPr>
+          <a:xfrm>
+            <a:off x="1225550" y="1778000"/>
+            <a:ext cx="2984500" cy="1841500"/>
+          </a:xfrm>
+          <a:custGeom>
+            <a:avLst/>
+            <a:gdLst/>
+            <a:ahLst/>
+            <a:cxnLst/>
+            <a:rect l="l" t="t" r="r" b="b"/>
+            <a:pathLst>
+              <a:path w="2984500" h="1841500">
+                <a:moveTo>
+                  <a:pt x="88900" y="0"/>
+                </a:moveTo>
+                <a:lnTo>
+                  <a:pt x="2984500" y="0"/>
+                </a:lnTo>
+                <a:lnTo>
+                  <a:pt x="2984500" y="1841500"/>
+                </a:lnTo>
+                <a:lnTo>
+                  <a:pt x="0" y="1841500"/>
+                </a:lnTo>
+                <a:lnTo>
+                  <a:pt x="0" y="88900"/>
+                </a:lnTo>
+                <a:arcTo hR="88900" wR="88900" stAng="10800000" swAng="5400000"/>
+                <a:close/>
+              </a:path>
+            </a:pathLst>
+          </a:custGeom>
+          <a:solidFill>
+            <a:srgbClr val="F7F7F5"/>
+          </a:solidFill>
+          <a:ln/>
+        </p:spPr>
+      </p:sp>
+      <p:sp>
+        <p:nvSpPr>
+          <p:cNvPr id="5" name="Shape 3"/>
+          <p:cNvSpPr/>
+          <p:nvPr/>
+        </p:nvSpPr>
+        <p:spPr>
+          <a:xfrm>
+            <a:off x="4210050" y="1778000"/>
+            <a:ext cx="2984500" cy="1841500"/>
+          </a:xfrm>
+          <a:custGeom>
+            <a:avLst/>
+            <a:gdLst/>
+            <a:ahLst/>
+            <a:cxnLst/>
+            <a:rect l="l" t="t" r="r" b="b"/>
+            <a:pathLst>
+              <a:path w="2984500" h="1841500">
+                <a:moveTo>
+                  <a:pt x="0" y="0"/>
+                </a:moveTo>
+                <a:lnTo>
+                  <a:pt x="2895600" y="0"/>
+                </a:lnTo>
+                <a:arcTo hR="88900" wR="88900" stAng="16200000" swAng="5400000"/>
+                <a:lnTo>
+                  <a:pt x="2984500" y="1841500"/>
+                </a:lnTo>
+                <a:lnTo>
+                  <a:pt x="0" y="1841500"/>
+                </a:lnTo>
+                <a:lnTo>
+                  <a:pt x="0" y="0"/>
+                </a:lnTo>
+                <a:close/>
+              </a:path>
+            </a:pathLst>
+          </a:custGeom>
+          <a:solidFill>
+            <a:srgbClr val="FFF1E8"/>
+          </a:solidFill>
+          <a:ln/>
+        </p:spPr>
+      </p:sp>
+      <p:sp>
+        <p:nvSpPr>
+          <p:cNvPr id="6" name="Shape 4"/>
+          <p:cNvSpPr/>
+          <p:nvPr/>
+        </p:nvSpPr>
+        <p:spPr>
+          <a:xfrm>
+            <a:off x="1225550" y="3619500"/>
+            <a:ext cx="2984500" cy="1841500"/>
+          </a:xfrm>
+          <a:custGeom>
+            <a:avLst/>
+            <a:gdLst/>
+            <a:ahLst/>
+            <a:cxnLst/>
+            <a:rect l="l" t="t" r="r" b="b"/>
+            <a:pathLst>
+              <a:path w="2984500" h="1841500">
+                <a:moveTo>
+                  <a:pt x="0" y="0"/>
+                </a:moveTo>
+                <a:lnTo>
+                  <a:pt x="2984500" y="0"/>
+                </a:lnTo>
+                <a:lnTo>
+                  <a:pt x="2984500" y="1841500"/>
+                </a:lnTo>
+                <a:lnTo>
+                  <a:pt x="88900" y="1841500"/>
+                </a:lnTo>
+                <a:arcTo hR="88900" wR="88900" stAng="5400000" swAng="5400000"/>
+                <a:lnTo>
+                  <a:pt x="0" y="0"/>
+                </a:lnTo>
+                <a:close/>
+              </a:path>
+            </a:pathLst>
+          </a:custGeom>
+          <a:solidFill>
+            <a:srgbClr val="FBFBFA"/>
+          </a:solidFill>
+          <a:ln/>
+        </p:spPr>
+      </p:sp>
+      <p:sp>
+        <p:nvSpPr>
+          <p:cNvPr id="7" name="Shape 5"/>
+          <p:cNvSpPr/>
+          <p:nvPr/>
+        </p:nvSpPr>
+        <p:spPr>
+          <a:xfrm>
+            <a:off x="4210050" y="3619500"/>
+            <a:ext cx="2984500" cy="1841500"/>
+          </a:xfrm>
+          <a:custGeom>
+            <a:avLst/>
+            <a:gdLst/>
+            <a:ahLst/>
+            <a:cxnLst/>
+            <a:rect l="l" t="t" r="r" b="b"/>
+            <a:pathLst>
+              <a:path w="2984500" h="1841500">
+                <a:moveTo>
+                  <a:pt x="0" y="0"/>
+                </a:moveTo>
+                <a:lnTo>
+                  <a:pt x="2984500" y="0"/>
+                </a:lnTo>
+                <a:lnTo>
+                  <a:pt x="2984500" y="1752600"/>
+                </a:lnTo>
+                <a:arcTo hR="88900" wR="88900" stAng="0" swAng="5400000"/>
+                <a:lnTo>
+                  <a:pt x="0" y="1841500"/>
+                </a:lnTo>
+                <a:lnTo>
+                  <a:pt x="0" y="0"/>
+                </a:lnTo>
+                <a:close/>
+              </a:path>
+            </a:pathLst>
+          </a:custGeom>
+          <a:solidFill>
+            <a:srgbClr val="F7F7F5"/>
+          </a:solidFill>
+          <a:ln/>
+        </p:spPr>
+      </p:sp>
+      <p:sp>
+        <p:nvSpPr>
+          <p:cNvPr id="8" name="Shape 6"/>
+          <p:cNvSpPr/>
+          <p:nvPr/>
+        </p:nvSpPr>
+        <p:spPr>
+          <a:xfrm>
+            <a:off x="1212850" y="1778000"/>
+            <a:ext cx="25400" cy="3695700"/>
+          </a:xfrm>
+          <a:prstGeom prst="rect">
+            <a:avLst/>
+          </a:prstGeom>
+          <a:solidFill>
+            <a:srgbClr val="233441"/>
+          </a:solidFill>
+          <a:ln/>
+        </p:spPr>
+      </p:sp>
+      <p:sp>
+        <p:nvSpPr>
+          <p:cNvPr id="9" name="Shape 7"/>
+          <p:cNvSpPr/>
+          <p:nvPr/>
+        </p:nvSpPr>
+        <p:spPr>
+          <a:xfrm>
+            <a:off x="1212850" y="5448300"/>
+            <a:ext cx="5981700" cy="25400"/>
+          </a:xfrm>
+          <a:prstGeom prst="rect">
+            <a:avLst/>
+          </a:prstGeom>
+          <a:solidFill>
+            <a:srgbClr val="233441"/>
+          </a:solidFill>
+          <a:ln/>
+        </p:spPr>
+      </p:sp>
+      <p:sp>
+        <p:nvSpPr>
+          <p:cNvPr id="10" name="Shape 8"/>
+          <p:cNvSpPr/>
+          <p:nvPr/>
+        </p:nvSpPr>
+        <p:spPr>
+          <a:xfrm>
+            <a:off x="1225550" y="3613150"/>
+            <a:ext cx="5969000" cy="12700"/>
+          </a:xfrm>
+          <a:prstGeom prst="rect">
+            <a:avLst/>
+          </a:prstGeom>
+          <a:solidFill>
+            <a:srgbClr val="E6EAEE"/>
+          </a:solidFill>
+          <a:ln/>
+        </p:spPr>
+      </p:sp>
+      <p:sp>
+        <p:nvSpPr>
+          <p:cNvPr id="11" name="Shape 9"/>
+          <p:cNvSpPr/>
+          <p:nvPr/>
+        </p:nvSpPr>
+        <p:spPr>
+          <a:xfrm>
+            <a:off x="4203700" y="1778000"/>
+            <a:ext cx="12700" cy="3683000"/>
+          </a:xfrm>
+          <a:prstGeom prst="rect">
+            <a:avLst/>
+          </a:prstGeom>
+          <a:solidFill>
+            <a:srgbClr val="E6EAEE"/>
+          </a:solidFill>
+          <a:ln/>
+        </p:spPr>
+      </p:sp>
+      <p:sp>
+        <p:nvSpPr>
+          <p:cNvPr id="12" name="Text 10"/>
+          <p:cNvSpPr/>
+          <p:nvPr/>
+        </p:nvSpPr>
+        <p:spPr>
+          <a:xfrm>
+            <a:off x="1352550" y="1879600"/>
+            <a:ext cx="2812415" cy="238720"/>
+          </a:xfrm>
+          <a:prstGeom prst="rect">
+            <a:avLst/>
+          </a:prstGeom>
+          <a:noFill/>
+          <a:ln/>
+        </p:spPr>
+        <p:txBody>
+          <a:bodyPr wrap="square" lIns="0" tIns="0" rIns="0" bIns="0" rtlCol="0" anchor="t">
+            <a:normAutofit/>
+          </a:bodyPr>
+          <a:lstStyle/>
+          <a:p>
+            <a:pPr algn="l" indent="0" marL="0">
+              <a:lnSpc>
+                <a:spcPts val="1680"/>
+              </a:lnSpc>
+              <a:buNone/>
+            </a:pPr>
+            <a:r>
+              <a:rPr lang="en-US" sz="1200" i="1" dirty="0">
+                <a:solidFill>
+                  <a:srgbClr val="93A0AB"/>
+                </a:solidFill>
+                <a:latin typeface="Arial" pitchFamily="34" charset="0"/>
+                <a:ea typeface="Arial" pitchFamily="34" charset="-122"/>
+                <a:cs typeface="Arial" pitchFamily="34" charset="-120"/>
+              </a:rPr>
+              <a:t>Coherente, pero genérico</a:t>
+            </a:r>
+            <a:endParaRPr lang="en-US" sz="1200" dirty="0"/>
+          </a:p>
+        </p:txBody>
+      </p:sp>
+      <p:sp>
+        <p:nvSpPr>
+          <p:cNvPr id="13" name="Text 11"/>
+          <p:cNvSpPr/>
+          <p:nvPr/>
+        </p:nvSpPr>
+        <p:spPr>
+          <a:xfrm>
+            <a:off x="4337050" y="1879600"/>
+            <a:ext cx="2812415" cy="238720"/>
+          </a:xfrm>
+          <a:prstGeom prst="rect">
+            <a:avLst/>
+          </a:prstGeom>
+          <a:noFill/>
+          <a:ln/>
+        </p:spPr>
+        <p:txBody>
+          <a:bodyPr wrap="square" lIns="0" tIns="0" rIns="0" bIns="0" rtlCol="0" anchor="t">
+            <a:normAutofit/>
+          </a:bodyPr>
+          <a:lstStyle/>
+          <a:p>
+            <a:pPr algn="l" indent="0" marL="0">
+              <a:lnSpc>
+                <a:spcPts val="1680"/>
+              </a:lnSpc>
+              <a:buNone/>
+            </a:pPr>
+            <a:r>
+              <a:rPr lang="en-US" sz="1200" b="1" i="1" dirty="0">
+                <a:solidFill>
+                  <a:srgbClr val="F4631E"/>
+                </a:solidFill>
+                <a:latin typeface="Arial" pitchFamily="34" charset="0"/>
+                <a:ea typeface="Arial" pitchFamily="34" charset="-122"/>
+                <a:cs typeface="Arial" pitchFamily="34" charset="-120"/>
+              </a:rPr>
+              <a:t>Personal y coherente</a:t>
+            </a:r>
+            <a:endParaRPr lang="en-US" sz="1200" dirty="0"/>
+          </a:p>
+        </p:txBody>
+      </p:sp>
+      <p:sp>
+        <p:nvSpPr>
+          <p:cNvPr id="14" name="Text 12"/>
+          <p:cNvSpPr/>
+          <p:nvPr/>
+        </p:nvSpPr>
+        <p:spPr>
+          <a:xfrm>
+            <a:off x="1352550" y="5143500"/>
+            <a:ext cx="2812415" cy="238720"/>
+          </a:xfrm>
+          <a:prstGeom prst="rect">
+            <a:avLst/>
+          </a:prstGeom>
+          <a:noFill/>
+          <a:ln/>
+        </p:spPr>
+        <p:txBody>
+          <a:bodyPr wrap="square" lIns="0" tIns="0" rIns="0" bIns="0" rtlCol="0" anchor="t">
+            <a:normAutofit/>
+          </a:bodyPr>
+          <a:lstStyle/>
+          <a:p>
+            <a:pPr algn="l" indent="0" marL="0">
+              <a:lnSpc>
+                <a:spcPts val="1680"/>
+              </a:lnSpc>
+              <a:buNone/>
+            </a:pPr>
+            <a:r>
+              <a:rPr lang="en-US" sz="1200" i="1" dirty="0">
+                <a:solidFill>
+                  <a:srgbClr val="93A0AB"/>
+                </a:solidFill>
+                <a:latin typeface="Arial" pitchFamily="34" charset="0"/>
+                <a:ea typeface="Arial" pitchFamily="34" charset="-122"/>
+                <a:cs typeface="Arial" pitchFamily="34" charset="-120"/>
+              </a:rPr>
+              <a:t>Ni lo uno ni lo otro</a:t>
+            </a:r>
+            <a:endParaRPr lang="en-US" sz="1200" dirty="0"/>
+          </a:p>
+        </p:txBody>
+      </p:sp>
+      <p:sp>
+        <p:nvSpPr>
+          <p:cNvPr id="15" name="Text 13"/>
+          <p:cNvSpPr/>
+          <p:nvPr/>
+        </p:nvSpPr>
+        <p:spPr>
+          <a:xfrm>
+            <a:off x="4337050" y="5143500"/>
+            <a:ext cx="2812415" cy="238720"/>
+          </a:xfrm>
+          <a:prstGeom prst="rect">
+            <a:avLst/>
+          </a:prstGeom>
+          <a:noFill/>
+          <a:ln/>
+        </p:spPr>
+        <p:txBody>
+          <a:bodyPr wrap="square" lIns="0" tIns="0" rIns="0" bIns="0" rtlCol="0" anchor="t">
+            <a:normAutofit/>
+          </a:bodyPr>
+          <a:lstStyle/>
+          <a:p>
+            <a:pPr algn="l" indent="0" marL="0">
+              <a:lnSpc>
+                <a:spcPts val="1680"/>
+              </a:lnSpc>
+              <a:buNone/>
+            </a:pPr>
+            <a:r>
+              <a:rPr lang="en-US" sz="1200" i="1" dirty="0">
+                <a:solidFill>
+                  <a:srgbClr val="93A0AB"/>
+                </a:solidFill>
+                <a:latin typeface="Arial" pitchFamily="34" charset="0"/>
+                <a:ea typeface="Arial" pitchFamily="34" charset="-122"/>
+                <a:cs typeface="Arial" pitchFamily="34" charset="-120"/>
+              </a:rPr>
+              <a:t>Personal, pero se contradice</a:t>
+            </a:r>
+            <a:endParaRPr lang="en-US" sz="1200" dirty="0"/>
+          </a:p>
+        </p:txBody>
+      </p:sp>
+      <p:sp>
+        <p:nvSpPr>
+          <p:cNvPr id="16" name="Shape 14"/>
+          <p:cNvSpPr/>
+          <p:nvPr/>
+        </p:nvSpPr>
+        <p:spPr>
+          <a:xfrm>
+            <a:off x="1676400" y="2482850"/>
+            <a:ext cx="1574800" cy="855861"/>
+          </a:xfrm>
+          <a:prstGeom prst="roundRect">
+            <a:avLst>
+              <a:gd name="adj" fmla="val 50000"/>
+            </a:avLst>
+          </a:prstGeom>
+          <a:solidFill>
+            <a:srgbClr val="FFFFFF"/>
+          </a:solidFill>
+          <a:ln w="12700">
+            <a:solidFill>
+              <a:srgbClr val="93A0AB"/>
+            </a:solidFill>
+            <a:prstDash val="solid"/>
+          </a:ln>
+        </p:spPr>
+      </p:sp>
+      <p:sp>
+        <p:nvSpPr>
+          <p:cNvPr id="17" name="Text 15"/>
+          <p:cNvSpPr/>
+          <p:nvPr/>
+        </p:nvSpPr>
+        <p:spPr>
+          <a:xfrm>
+            <a:off x="1784350" y="2590800"/>
+            <a:ext cx="1358900" cy="452041"/>
+          </a:xfrm>
+          <a:prstGeom prst="rect">
+            <a:avLst/>
+          </a:prstGeom>
+          <a:noFill/>
+          <a:ln/>
+        </p:spPr>
+        <p:txBody>
+          <a:bodyPr wrap="square" lIns="0" tIns="0" rIns="0" bIns="0" rtlCol="0" anchor="t">
+            <a:normAutofit/>
+          </a:bodyPr>
+          <a:lstStyle/>
+          <a:p>
+            <a:pPr algn="ctr" indent="0" marL="0">
+              <a:lnSpc>
+                <a:spcPts val="1680"/>
+              </a:lnSpc>
+              <a:buNone/>
+            </a:pPr>
+            <a:r>
+              <a:rPr lang="en-US" sz="1200" b="1" dirty="0">
+                <a:solidFill>
+                  <a:srgbClr val="233441"/>
+                </a:solidFill>
+                <a:latin typeface="Arial" pitchFamily="34" charset="0"/>
+                <a:ea typeface="Arial" pitchFamily="34" charset="-122"/>
+                <a:cs typeface="Arial" pitchFamily="34" charset="-120"/>
+              </a:rPr>
+              <a:t>Plantilla con el nombre</a:t>
+            </a:r>
+            <a:endParaRPr lang="en-US" sz="1200" dirty="0"/>
+          </a:p>
+        </p:txBody>
+      </p:sp>
+      <p:sp>
+        <p:nvSpPr>
+          <p:cNvPr id="18" name="Text 16"/>
+          <p:cNvSpPr/>
+          <p:nvPr/>
+        </p:nvSpPr>
+        <p:spPr>
+          <a:xfrm>
+            <a:off x="1784350" y="3017441"/>
+            <a:ext cx="1358900" cy="238720"/>
+          </a:xfrm>
+          <a:prstGeom prst="rect">
+            <a:avLst/>
+          </a:prstGeom>
+          <a:noFill/>
+          <a:ln/>
+        </p:spPr>
+        <p:txBody>
+          <a:bodyPr wrap="square" lIns="0" tIns="0" rIns="0" bIns="0" rtlCol="0" anchor="t">
+            <a:normAutofit/>
+          </a:bodyPr>
+          <a:lstStyle/>
+          <a:p>
+            <a:pPr algn="ctr" indent="0" marL="0">
+              <a:lnSpc>
+                <a:spcPts val="1680"/>
+              </a:lnSpc>
+              <a:buNone/>
+            </a:pPr>
+            <a:r>
+              <a:rPr lang="en-US" sz="1200" dirty="0">
+                <a:solidFill>
+                  <a:srgbClr val="6B7682"/>
+                </a:solidFill>
+                <a:latin typeface="Arial" pitchFamily="34" charset="0"/>
+                <a:ea typeface="Arial" pitchFamily="34" charset="-122"/>
+                <a:cs typeface="Arial" pitchFamily="34" charset="-120"/>
+              </a:rPr>
+              <a:t>barata · inmediata</a:t>
+            </a:r>
+            <a:endParaRPr lang="en-US" sz="1200" dirty="0"/>
+          </a:p>
+        </p:txBody>
+      </p:sp>
+      <p:sp>
+        <p:nvSpPr>
+          <p:cNvPr id="19" name="Shape 17"/>
+          <p:cNvSpPr/>
+          <p:nvPr/>
+        </p:nvSpPr>
+        <p:spPr>
+          <a:xfrm>
+            <a:off x="4914900" y="4133850"/>
+            <a:ext cx="1638300" cy="855861"/>
+          </a:xfrm>
+          <a:prstGeom prst="roundRect">
+            <a:avLst>
+              <a:gd name="adj" fmla="val 50000"/>
+            </a:avLst>
+          </a:prstGeom>
+          <a:solidFill>
+            <a:srgbClr val="FFFFFF"/>
+          </a:solidFill>
+          <a:ln w="12700">
+            <a:solidFill>
+              <a:srgbClr val="93A0AB"/>
+            </a:solidFill>
+            <a:prstDash val="solid"/>
+          </a:ln>
+        </p:spPr>
+      </p:sp>
+      <p:sp>
+        <p:nvSpPr>
+          <p:cNvPr id="20" name="Text 18"/>
+          <p:cNvSpPr/>
+          <p:nvPr/>
+        </p:nvSpPr>
+        <p:spPr>
+          <a:xfrm>
+            <a:off x="5022850" y="4241800"/>
+            <a:ext cx="1422400" cy="238720"/>
+          </a:xfrm>
+          <a:prstGeom prst="rect">
+            <a:avLst/>
+          </a:prstGeom>
+          <a:noFill/>
+          <a:ln/>
+        </p:spPr>
+        <p:txBody>
+          <a:bodyPr wrap="square" lIns="0" tIns="0" rIns="0" bIns="0" rtlCol="0" anchor="t">
+            <a:normAutofit/>
+          </a:bodyPr>
+          <a:lstStyle/>
+          <a:p>
+            <a:pPr algn="ctr" indent="0" marL="0">
+              <a:lnSpc>
+                <a:spcPts val="1680"/>
+              </a:lnSpc>
+              <a:buNone/>
+            </a:pPr>
+            <a:r>
+              <a:rPr lang="en-US" sz="1200" b="1" dirty="0">
+                <a:solidFill>
+                  <a:srgbClr val="233441"/>
+                </a:solidFill>
+                <a:latin typeface="Arial" pitchFamily="34" charset="0"/>
+                <a:ea typeface="Arial" pitchFamily="34" charset="-122"/>
+                <a:cs typeface="Arial" pitchFamily="34" charset="-120"/>
+              </a:rPr>
+              <a:t>Chat con IA</a:t>
+            </a:r>
+            <a:endParaRPr lang="en-US" sz="1200" dirty="0"/>
+          </a:p>
+        </p:txBody>
+      </p:sp>
+      <p:sp>
+        <p:nvSpPr>
+          <p:cNvPr id="21" name="Text 19"/>
+          <p:cNvSpPr/>
+          <p:nvPr/>
+        </p:nvSpPr>
+        <p:spPr>
+          <a:xfrm>
+            <a:off x="5022850" y="4455120"/>
+            <a:ext cx="1422400" cy="452041"/>
+          </a:xfrm>
+          <a:prstGeom prst="rect">
+            <a:avLst/>
+          </a:prstGeom>
+          <a:noFill/>
+          <a:ln/>
+        </p:spPr>
+        <p:txBody>
+          <a:bodyPr wrap="square" lIns="0" tIns="0" rIns="0" bIns="0" rtlCol="0" anchor="t">
+            <a:normAutofit/>
+          </a:bodyPr>
+          <a:lstStyle/>
+          <a:p>
+            <a:pPr algn="ctr" indent="0" marL="0">
+              <a:lnSpc>
+                <a:spcPts val="1680"/>
+              </a:lnSpc>
+              <a:buNone/>
+            </a:pPr>
+            <a:r>
+              <a:rPr lang="en-US" sz="1200" dirty="0">
+                <a:solidFill>
+                  <a:srgbClr val="6B7682"/>
+                </a:solidFill>
+                <a:latin typeface="Arial" pitchFamily="34" charset="0"/>
+                <a:ea typeface="Arial" pitchFamily="34" charset="-122"/>
+                <a:cs typeface="Arial" pitchFamily="34" charset="-120"/>
+              </a:rPr>
+              <a:t>sin memoria ni revisión</a:t>
+            </a:r>
+            <a:endParaRPr lang="en-US" sz="1200" dirty="0"/>
+          </a:p>
+        </p:txBody>
+      </p:sp>
+      <p:sp>
+        <p:nvSpPr>
+          <p:cNvPr id="22" name="Shape 20"/>
+          <p:cNvSpPr/>
+          <p:nvPr/>
+        </p:nvSpPr>
+        <p:spPr>
+          <a:xfrm>
+            <a:off x="4438650" y="2228850"/>
+            <a:ext cx="1447800" cy="830461"/>
+          </a:xfrm>
+          <a:prstGeom prst="roundRect">
+            <a:avLst>
+              <a:gd name="adj" fmla="val 50000"/>
+            </a:avLst>
+          </a:prstGeom>
+          <a:solidFill>
+            <a:srgbClr val="FFFFFF"/>
+          </a:solidFill>
+          <a:ln w="12700">
+            <a:solidFill>
+              <a:srgbClr val="93A0AB"/>
+            </a:solidFill>
+            <a:prstDash val="dash"/>
+          </a:ln>
+        </p:spPr>
+      </p:sp>
+      <p:sp>
+        <p:nvSpPr>
+          <p:cNvPr id="23" name="Text 21"/>
+          <p:cNvSpPr/>
+          <p:nvPr/>
+        </p:nvSpPr>
+        <p:spPr>
+          <a:xfrm>
+            <a:off x="4533900" y="2324100"/>
+            <a:ext cx="1257300" cy="452041"/>
+          </a:xfrm>
+          <a:prstGeom prst="rect">
+            <a:avLst/>
+          </a:prstGeom>
+          <a:noFill/>
+          <a:ln/>
+        </p:spPr>
+        <p:txBody>
+          <a:bodyPr wrap="square" lIns="0" tIns="0" rIns="0" bIns="0" rtlCol="0" anchor="t">
+            <a:normAutofit/>
+          </a:bodyPr>
+          <a:lstStyle/>
+          <a:p>
+            <a:pPr algn="ctr" indent="0" marL="0">
+              <a:lnSpc>
+                <a:spcPts val="1680"/>
+              </a:lnSpc>
+              <a:buNone/>
+            </a:pPr>
+            <a:r>
+              <a:rPr lang="en-US" sz="1200" b="1" dirty="0">
+                <a:solidFill>
+                  <a:srgbClr val="6B7682"/>
+                </a:solidFill>
+                <a:latin typeface="Arial" pitchFamily="34" charset="0"/>
+                <a:ea typeface="Arial" pitchFamily="34" charset="-122"/>
+                <a:cs typeface="Arial" pitchFamily="34" charset="-120"/>
+              </a:rPr>
+              <a:t>Escritor a medida</a:t>
+            </a:r>
+            <a:endParaRPr lang="en-US" sz="1200" dirty="0"/>
+          </a:p>
+        </p:txBody>
+      </p:sp>
+      <p:sp>
+        <p:nvSpPr>
+          <p:cNvPr id="24" name="Text 22"/>
+          <p:cNvSpPr/>
+          <p:nvPr/>
+        </p:nvSpPr>
+        <p:spPr>
+          <a:xfrm>
+            <a:off x="4533900" y="2750741"/>
+            <a:ext cx="1257300" cy="238720"/>
+          </a:xfrm>
+          <a:prstGeom prst="rect">
+            <a:avLst/>
+          </a:prstGeom>
+          <a:noFill/>
+          <a:ln/>
+        </p:spPr>
+        <p:txBody>
+          <a:bodyPr wrap="square" lIns="0" tIns="0" rIns="0" bIns="0" rtlCol="0" anchor="t">
+            <a:normAutofit/>
+          </a:bodyPr>
+          <a:lstStyle/>
+          <a:p>
+            <a:pPr algn="ctr" indent="0" marL="0">
+              <a:lnSpc>
+                <a:spcPts val="1680"/>
+              </a:lnSpc>
+              <a:buNone/>
+            </a:pPr>
+            <a:r>
+              <a:rPr lang="en-US" sz="1200" dirty="0">
+                <a:solidFill>
+                  <a:srgbClr val="93A0AB"/>
+                </a:solidFill>
+                <a:latin typeface="Arial" pitchFamily="34" charset="0"/>
+                <a:ea typeface="Arial" pitchFamily="34" charset="-122"/>
+                <a:cs typeface="Arial" pitchFamily="34" charset="-120"/>
+              </a:rPr>
+              <a:t>caro · semanas</a:t>
+            </a:r>
+            <a:endParaRPr lang="en-US" sz="1200" dirty="0"/>
+          </a:p>
+        </p:txBody>
+      </p:sp>
+      <p:sp>
+        <p:nvSpPr>
+          <p:cNvPr id="25" name="Shape 23"/>
+          <p:cNvSpPr/>
+          <p:nvPr/>
+        </p:nvSpPr>
+        <p:spPr>
+          <a:xfrm>
+            <a:off x="5543550" y="2730500"/>
+            <a:ext cx="1524000" cy="734020"/>
+          </a:xfrm>
+          <a:prstGeom prst="roundRect">
+            <a:avLst>
+              <a:gd name="adj" fmla="val 50000"/>
+            </a:avLst>
+          </a:prstGeom>
+          <a:solidFill>
+            <a:srgbClr val="FF7932"/>
+          </a:solidFill>
+          <a:ln/>
+        </p:spPr>
+      </p:sp>
+      <p:sp>
+        <p:nvSpPr>
+          <p:cNvPr id="26" name="Text 24"/>
+          <p:cNvSpPr/>
+          <p:nvPr/>
+        </p:nvSpPr>
+        <p:spPr>
+          <a:xfrm>
+            <a:off x="5645150" y="2857500"/>
+            <a:ext cx="1320800" cy="292100"/>
+          </a:xfrm>
+          <a:prstGeom prst="rect">
+            <a:avLst/>
+          </a:prstGeom>
+          <a:noFill/>
+          <a:ln/>
+        </p:spPr>
+        <p:txBody>
+          <a:bodyPr wrap="square" lIns="0" tIns="0" rIns="0" bIns="0" rtlCol="0" anchor="t">
+            <a:normAutofit/>
+          </a:bodyPr>
+          <a:lstStyle/>
+          <a:p>
+            <a:pPr algn="ctr" indent="0" marL="0">
+              <a:lnSpc>
+                <a:spcPts val="2100"/>
+              </a:lnSpc>
+              <a:buNone/>
+            </a:pPr>
+            <a:r>
+              <a:rPr lang="en-US" sz="1500" b="1" dirty="0">
+                <a:solidFill>
+                  <a:srgbClr val="FFFFFF"/>
+                </a:solidFill>
+                <a:latin typeface="Arial" pitchFamily="34" charset="0"/>
+                <a:ea typeface="Arial" pitchFamily="34" charset="-122"/>
+                <a:cs typeface="Arial" pitchFamily="34" charset="-120"/>
+              </a:rPr>
+              <a:t>StoryMaker</a:t>
+            </a:r>
+            <a:endParaRPr lang="en-US" sz="1500" dirty="0"/>
+          </a:p>
+        </p:txBody>
+      </p:sp>
+      <p:sp>
+        <p:nvSpPr>
+          <p:cNvPr id="27" name="Text 25"/>
+          <p:cNvSpPr/>
+          <p:nvPr/>
+        </p:nvSpPr>
+        <p:spPr>
+          <a:xfrm>
+            <a:off x="5645150" y="3124200"/>
+            <a:ext cx="1320800" cy="238720"/>
+          </a:xfrm>
+          <a:prstGeom prst="rect">
+            <a:avLst/>
+          </a:prstGeom>
+          <a:noFill/>
+          <a:ln/>
+        </p:spPr>
+        <p:txBody>
+          <a:bodyPr wrap="square" lIns="0" tIns="0" rIns="0" bIns="0" rtlCol="0" anchor="t">
+            <a:normAutofit/>
+          </a:bodyPr>
+          <a:lstStyle/>
+          <a:p>
+            <a:pPr algn="ctr" indent="0" marL="0">
+              <a:lnSpc>
+                <a:spcPts val="1680"/>
+              </a:lnSpc>
+              <a:buNone/>
+            </a:pPr>
+            <a:r>
+              <a:rPr lang="en-US" sz="1200" dirty="0">
+                <a:solidFill>
+                  <a:srgbClr val="FFFFFF"/>
+                </a:solidFill>
+                <a:latin typeface="Arial" pitchFamily="34" charset="0"/>
+                <a:ea typeface="Arial" pitchFamily="34" charset="-122"/>
+                <a:cs typeface="Arial" pitchFamily="34" charset="-120"/>
+              </a:rPr>
+              <a:t>49 USD · horas</a:t>
+            </a:r>
+            <a:endParaRPr lang="en-US" sz="1200" dirty="0"/>
+          </a:p>
+        </p:txBody>
+      </p:sp>
+      <p:sp>
+        <p:nvSpPr>
+          <p:cNvPr id="28" name="Text 26"/>
+          <p:cNvSpPr/>
+          <p:nvPr/>
+        </p:nvSpPr>
+        <p:spPr>
+          <a:xfrm>
+            <a:off x="1046480" y="5537200"/>
+            <a:ext cx="6148070" cy="238720"/>
+          </a:xfrm>
+          <a:prstGeom prst="rect">
+            <a:avLst/>
+          </a:prstGeom>
+          <a:noFill/>
+          <a:ln/>
+        </p:spPr>
+        <p:txBody>
+          <a:bodyPr wrap="square" lIns="0" tIns="0" rIns="0" bIns="0" rtlCol="0" anchor="t">
+            <a:normAutofit/>
+          </a:bodyPr>
+          <a:lstStyle/>
+          <a:p>
+            <a:pPr algn="r" indent="0" marL="0">
+              <a:lnSpc>
+                <a:spcPts val="1680"/>
+              </a:lnSpc>
+              <a:buNone/>
+            </a:pPr>
+            <a:r>
+              <a:rPr lang="en-US" sz="1200" b="1" dirty="0">
+                <a:solidFill>
+                  <a:srgbClr val="233441"/>
+                </a:solidFill>
+                <a:latin typeface="Arial" pitchFamily="34" charset="0"/>
+                <a:ea typeface="Arial" pitchFamily="34" charset="-122"/>
+                <a:cs typeface="Arial" pitchFamily="34" charset="-120"/>
+              </a:rPr>
+              <a:t>Personalización: el destinatario se reconoce →</a:t>
+            </a:r>
+            <a:endParaRPr lang="en-US" sz="1200" dirty="0"/>
+          </a:p>
+        </p:txBody>
+      </p:sp>
+      <p:sp>
+        <p:nvSpPr>
+          <p:cNvPr id="29" name="Text 27"/>
+          <p:cNvSpPr/>
+          <p:nvPr/>
+        </p:nvSpPr>
+        <p:spPr>
+          <a:xfrm>
+            <a:off x="7620000" y="1778000"/>
+            <a:ext cx="3708464" cy="238720"/>
+          </a:xfrm>
+          <a:prstGeom prst="rect">
+            <a:avLst/>
+          </a:prstGeom>
+          <a:noFill/>
+          <a:ln/>
+        </p:spPr>
+        <p:txBody>
+          <a:bodyPr wrap="square" lIns="0" tIns="0" rIns="0" bIns="0" rtlCol="0" anchor="t">
+            <a:normAutofit/>
+          </a:bodyPr>
+          <a:lstStyle/>
+          <a:p>
+            <a:pPr algn="l" indent="0" marL="0">
+              <a:lnSpc>
+                <a:spcPts val="1680"/>
+              </a:lnSpc>
+              <a:buNone/>
+            </a:pPr>
+            <a:r>
+              <a:rPr lang="en-US" sz="1200" b="1" spc="150" kern="0" dirty="0">
+                <a:solidFill>
+                  <a:srgbClr val="F4631E"/>
+                </a:solidFill>
+                <a:latin typeface="Arial" pitchFamily="34" charset="0"/>
+                <a:ea typeface="Arial" pitchFamily="34" charset="-122"/>
+                <a:cs typeface="Arial" pitchFamily="34" charset="-120"/>
+              </a:rPr>
+              <a:t>LO QUE NOS DIFERENCIA</a:t>
+            </a:r>
+            <a:endParaRPr lang="en-US" sz="1200" dirty="0"/>
+          </a:p>
+        </p:txBody>
+      </p:sp>
+      <p:sp>
+        <p:nvSpPr>
+          <p:cNvPr id="30" name="Shape 28"/>
+          <p:cNvSpPr/>
+          <p:nvPr/>
+        </p:nvSpPr>
+        <p:spPr>
+          <a:xfrm>
+            <a:off x="7639050" y="2131020"/>
+            <a:ext cx="0" cy="713647"/>
+          </a:xfrm>
+          <a:prstGeom prst="line">
+            <a:avLst/>
+          </a:prstGeom>
+          <a:noFill/>
+          <a:ln w="38100">
+            <a:solidFill>
+              <a:srgbClr val="FF7932"/>
+            </a:solidFill>
+            <a:prstDash val="solid"/>
+          </a:ln>
+        </p:spPr>
+      </p:sp>
+      <p:sp>
+        <p:nvSpPr>
+          <p:cNvPr id="31" name="Text 29"/>
+          <p:cNvSpPr/>
+          <p:nvPr/>
+        </p:nvSpPr>
+        <p:spPr>
+          <a:xfrm>
+            <a:off x="7785100" y="2131020"/>
+            <a:ext cx="3538411" cy="274307"/>
+          </a:xfrm>
+          <a:prstGeom prst="rect">
+            <a:avLst/>
+          </a:prstGeom>
+          <a:noFill/>
+          <a:ln/>
+        </p:spPr>
+        <p:txBody>
+          <a:bodyPr wrap="square" lIns="0" tIns="0" rIns="0" bIns="0" rtlCol="0" anchor="t">
+            <a:normAutofit/>
+          </a:bodyPr>
+          <a:lstStyle/>
+          <a:p>
+            <a:pPr algn="l" indent="0" marL="0">
+              <a:lnSpc>
+                <a:spcPts val="1960"/>
+              </a:lnSpc>
+              <a:buNone/>
+            </a:pPr>
+            <a:r>
+              <a:rPr lang="en-US" sz="1400" b="1" dirty="0">
+                <a:solidFill>
+                  <a:srgbClr val="233441"/>
+                </a:solidFill>
+                <a:latin typeface="Arial" pitchFamily="34" charset="0"/>
+                <a:ea typeface="Arial" pitchFamily="34" charset="-122"/>
+                <a:cs typeface="Arial" pitchFamily="34" charset="-120"/>
+              </a:rPr>
+              <a:t>Personal de verdad</a:t>
+            </a:r>
+            <a:endParaRPr lang="en-US" sz="1400" dirty="0"/>
+          </a:p>
+        </p:txBody>
+      </p:sp>
+      <p:sp>
+        <p:nvSpPr>
+          <p:cNvPr id="32" name="Text 30"/>
+          <p:cNvSpPr/>
+          <p:nvPr/>
+        </p:nvSpPr>
+        <p:spPr>
+          <a:xfrm>
+            <a:off x="7785100" y="2418028"/>
+            <a:ext cx="3538411" cy="452041"/>
+          </a:xfrm>
+          <a:prstGeom prst="rect">
+            <a:avLst/>
+          </a:prstGeom>
+          <a:noFill/>
+          <a:ln/>
+        </p:spPr>
+        <p:txBody>
+          <a:bodyPr wrap="square" lIns="0" tIns="0" rIns="0" bIns="0" rtlCol="0" anchor="t">
+            <a:normAutofit/>
+          </a:bodyPr>
+          <a:lstStyle/>
+          <a:p>
+            <a:pPr algn="l" indent="0" marL="0">
+              <a:lnSpc>
+                <a:spcPts val="1680"/>
+              </a:lnSpc>
+              <a:buNone/>
+            </a:pPr>
+            <a:r>
+              <a:rPr lang="en-US" sz="1200" dirty="0">
+                <a:solidFill>
+                  <a:srgbClr val="3C4645"/>
+                </a:solidFill>
+                <a:latin typeface="Arial" pitchFamily="34" charset="0"/>
+                <a:ea typeface="Arial" pitchFamily="34" charset="-122"/>
+                <a:cs typeface="Arial" pitchFamily="34" charset="-120"/>
+              </a:rPr>
+              <a:t>Recuerdos, rasgos y elementos pedidos, y se comprueba en el texto que están.</a:t>
+            </a:r>
+            <a:endParaRPr lang="en-US" sz="1200" dirty="0"/>
+          </a:p>
+        </p:txBody>
+      </p:sp>
+      <p:sp>
+        <p:nvSpPr>
+          <p:cNvPr id="33" name="Shape 31"/>
+          <p:cNvSpPr/>
+          <p:nvPr/>
+        </p:nvSpPr>
+        <p:spPr>
+          <a:xfrm>
+            <a:off x="7639050" y="2984368"/>
+            <a:ext cx="0" cy="713647"/>
+          </a:xfrm>
+          <a:prstGeom prst="line">
+            <a:avLst/>
+          </a:prstGeom>
+          <a:noFill/>
+          <a:ln w="38100">
+            <a:solidFill>
+              <a:srgbClr val="FF7932"/>
+            </a:solidFill>
+            <a:prstDash val="solid"/>
+          </a:ln>
+        </p:spPr>
+      </p:sp>
+      <p:sp>
+        <p:nvSpPr>
+          <p:cNvPr id="34" name="Text 32"/>
+          <p:cNvSpPr/>
+          <p:nvPr/>
+        </p:nvSpPr>
+        <p:spPr>
+          <a:xfrm>
+            <a:off x="7785100" y="2984368"/>
+            <a:ext cx="3538411" cy="274307"/>
+          </a:xfrm>
+          <a:prstGeom prst="rect">
+            <a:avLst/>
+          </a:prstGeom>
+          <a:noFill/>
+          <a:ln/>
+        </p:spPr>
+        <p:txBody>
+          <a:bodyPr wrap="square" lIns="0" tIns="0" rIns="0" bIns="0" rtlCol="0" anchor="t">
+            <a:normAutofit/>
+          </a:bodyPr>
+          <a:lstStyle/>
+          <a:p>
+            <a:pPr algn="l" indent="0" marL="0">
+              <a:lnSpc>
+                <a:spcPts val="1960"/>
+              </a:lnSpc>
+              <a:buNone/>
+            </a:pPr>
+            <a:r>
+              <a:rPr lang="en-US" sz="1400" b="1" dirty="0">
+                <a:solidFill>
+                  <a:srgbClr val="233441"/>
+                </a:solidFill>
+                <a:latin typeface="Arial" pitchFamily="34" charset="0"/>
+                <a:ea typeface="Arial" pitchFamily="34" charset="-122"/>
+                <a:cs typeface="Arial" pitchFamily="34" charset="-120"/>
+              </a:rPr>
+              <a:t>Coherente por construcción</a:t>
+            </a:r>
+            <a:endParaRPr lang="en-US" sz="1400" dirty="0"/>
+          </a:p>
+        </p:txBody>
+      </p:sp>
+      <p:sp>
+        <p:nvSpPr>
+          <p:cNvPr id="35" name="Text 33"/>
+          <p:cNvSpPr/>
+          <p:nvPr/>
+        </p:nvSpPr>
+        <p:spPr>
+          <a:xfrm>
+            <a:off x="7785100" y="3271375"/>
+            <a:ext cx="3538411" cy="452041"/>
+          </a:xfrm>
+          <a:prstGeom prst="rect">
+            <a:avLst/>
+          </a:prstGeom>
+          <a:noFill/>
+          <a:ln/>
+        </p:spPr>
+        <p:txBody>
+          <a:bodyPr wrap="square" lIns="0" tIns="0" rIns="0" bIns="0" rtlCol="0" anchor="t">
+            <a:normAutofit/>
+          </a:bodyPr>
+          <a:lstStyle/>
+          <a:p>
+            <a:pPr algn="l" indent="0" marL="0">
+              <a:lnSpc>
+                <a:spcPts val="1680"/>
+              </a:lnSpc>
+              <a:buNone/>
+            </a:pPr>
+            <a:r>
+              <a:rPr lang="en-US" sz="1200" dirty="0">
+                <a:solidFill>
+                  <a:srgbClr val="3C4645"/>
+                </a:solidFill>
+                <a:latin typeface="Arial" pitchFamily="34" charset="0"/>
+                <a:ea typeface="Arial" pitchFamily="34" charset="-122"/>
+                <a:cs typeface="Arial" pitchFamily="34" charset="-120"/>
+              </a:rPr>
+              <a:t>Canon, Continuista y Lean: no se publica una historia que se contradice.</a:t>
+            </a:r>
+            <a:endParaRPr lang="en-US" sz="1200" dirty="0"/>
+          </a:p>
+        </p:txBody>
+      </p:sp>
+      <p:sp>
+        <p:nvSpPr>
+          <p:cNvPr id="36" name="Shape 34"/>
+          <p:cNvSpPr/>
+          <p:nvPr/>
+        </p:nvSpPr>
+        <p:spPr>
+          <a:xfrm>
+            <a:off x="7639050" y="3837715"/>
+            <a:ext cx="0" cy="713647"/>
+          </a:xfrm>
+          <a:prstGeom prst="line">
+            <a:avLst/>
+          </a:prstGeom>
+          <a:noFill/>
+          <a:ln w="38100">
+            <a:solidFill>
+              <a:srgbClr val="FF7932"/>
+            </a:solidFill>
+            <a:prstDash val="solid"/>
+          </a:ln>
+        </p:spPr>
+      </p:sp>
+      <p:sp>
+        <p:nvSpPr>
+          <p:cNvPr id="37" name="Text 35"/>
+          <p:cNvSpPr/>
+          <p:nvPr/>
+        </p:nvSpPr>
+        <p:spPr>
+          <a:xfrm>
+            <a:off x="7785100" y="3837715"/>
+            <a:ext cx="3538411" cy="274307"/>
+          </a:xfrm>
+          <a:prstGeom prst="rect">
+            <a:avLst/>
+          </a:prstGeom>
+          <a:noFill/>
+          <a:ln/>
+        </p:spPr>
+        <p:txBody>
+          <a:bodyPr wrap="square" lIns="0" tIns="0" rIns="0" bIns="0" rtlCol="0" anchor="t">
+            <a:normAutofit/>
+          </a:bodyPr>
+          <a:lstStyle/>
+          <a:p>
+            <a:pPr algn="l" indent="0" marL="0">
+              <a:lnSpc>
+                <a:spcPts val="1960"/>
+              </a:lnSpc>
+              <a:buNone/>
+            </a:pPr>
+            <a:r>
+              <a:rPr lang="en-US" sz="1400" b="1" dirty="0">
+                <a:solidFill>
+                  <a:srgbClr val="233441"/>
+                </a:solidFill>
+                <a:latin typeface="Arial" pitchFamily="34" charset="0"/>
+                <a:ea typeface="Arial" pitchFamily="34" charset="-122"/>
+                <a:cs typeface="Arial" pitchFamily="34" charset="-120"/>
+              </a:rPr>
+              <a:t>Al precio de una plantilla</a:t>
+            </a:r>
+            <a:endParaRPr lang="en-US" sz="1400" dirty="0"/>
+          </a:p>
+        </p:txBody>
+      </p:sp>
+      <p:sp>
+        <p:nvSpPr>
+          <p:cNvPr id="38" name="Text 36"/>
+          <p:cNvSpPr/>
+          <p:nvPr/>
+        </p:nvSpPr>
+        <p:spPr>
+          <a:xfrm>
+            <a:off x="7785100" y="4124722"/>
+            <a:ext cx="3538411" cy="452041"/>
+          </a:xfrm>
+          <a:prstGeom prst="rect">
+            <a:avLst/>
+          </a:prstGeom>
+          <a:noFill/>
+          <a:ln/>
+        </p:spPr>
+        <p:txBody>
+          <a:bodyPr wrap="square" lIns="0" tIns="0" rIns="0" bIns="0" rtlCol="0" anchor="t">
+            <a:normAutofit/>
+          </a:bodyPr>
+          <a:lstStyle/>
+          <a:p>
+            <a:pPr algn="l" indent="0" marL="0">
+              <a:lnSpc>
+                <a:spcPts val="1680"/>
+              </a:lnSpc>
+              <a:buNone/>
+            </a:pPr>
+            <a:r>
+              <a:rPr lang="en-US" sz="1200" dirty="0">
+                <a:solidFill>
+                  <a:srgbClr val="3C4645"/>
+                </a:solidFill>
+                <a:latin typeface="Arial" pitchFamily="34" charset="0"/>
+                <a:ea typeface="Arial" pitchFamily="34" charset="-122"/>
+                <a:cs typeface="Arial" pitchFamily="34" charset="-120"/>
+              </a:rPr>
+              <a:t>49 USD, en horas, y una corrección rehace solo lo afectado.</a:t>
+            </a:r>
+            <a:endParaRPr lang="en-US" sz="1200" dirty="0"/>
+          </a:p>
+        </p:txBody>
+      </p:sp>
+      <p:pic>
+        <p:nvPicPr>
+          <p:cNvPr id="39" name="Image 0" descr="preencoded.png">    </p:cNvPr>
+          <p:cNvPicPr>
+            <a:picLocks noChangeAspect="1"/>
+          </p:cNvPicPr>
+          <p:nvPr/>
+        </p:nvPicPr>
+        <p:blipFill>
+          <a:blip r:embed="rId1"/>
+          <a:srcRect l="0" r="0" t="-7895" b="-7895"/>
+          <a:stretch/>
+        </p:blipFill>
+        <p:spPr>
+          <a:xfrm>
+            <a:off x="11049000" y="609600"/>
+            <a:ext cx="361950" cy="419100"/>
+          </a:xfrm>
+          <a:prstGeom prst="rect">
+            <a:avLst/>
+          </a:prstGeom>
+        </p:spPr>
+      </p:pic>
+      <p:sp>
+        <p:nvSpPr>
+          <p:cNvPr id="40" name="Text 37"/>
+          <p:cNvSpPr/>
+          <p:nvPr/>
+        </p:nvSpPr>
+        <p:spPr>
+          <a:xfrm>
+            <a:off x="971550" y="6289080"/>
+            <a:ext cx="10556367" cy="238720"/>
+          </a:xfrm>
+          <a:prstGeom prst="rect">
+            <a:avLst/>
+          </a:prstGeom>
+          <a:noFill/>
+          <a:ln/>
+        </p:spPr>
+        <p:txBody>
+          <a:bodyPr wrap="square" lIns="0" tIns="0" rIns="0" bIns="0" rtlCol="0" anchor="t">
+            <a:normAutofit/>
+          </a:bodyPr>
+          <a:lstStyle/>
+          <a:p>
+            <a:pPr algn="l" indent="0" marL="0">
+              <a:lnSpc>
+                <a:spcPts val="1680"/>
+              </a:lnSpc>
+              <a:buNone/>
+            </a:pPr>
+            <a:r>
+              <a:rPr lang="en-US" sz="1200" i="1" dirty="0">
+                <a:solidFill>
+                  <a:srgbClr val="93A0AB"/>
+                </a:solidFill>
+                <a:latin typeface="Arial" pitchFamily="34" charset="0"/>
+                <a:ea typeface="Arial" pitchFamily="34" charset="-122"/>
+                <a:cs typeface="Arial" pitchFamily="34" charset="-120"/>
+              </a:rPr>
+              <a:t>© Qaracter group, all rights reserved 2026 · StoryMaker</a:t>
+            </a:r>
+            <a:endParaRPr lang="en-US" sz="1200" dirty="0"/>
+          </a:p>
+        </p:txBody>
+      </p:sp>
+      <p:sp>
+        <p:nvSpPr>
+          <p:cNvPr id="41" name="Text 38"/>
+          <p:cNvSpPr/>
+          <p:nvPr/>
+        </p:nvSpPr>
+        <p:spPr>
+          <a:xfrm>
+            <a:off x="971550" y="1574800"/>
+            <a:ext cx="3924300" cy="238720"/>
+          </a:xfrm>
+          <a:prstGeom prst="rect">
+            <a:avLst/>
+          </a:prstGeom>
+          <a:noFill/>
+          <a:ln/>
+        </p:spPr>
+        <p:txBody>
+          <a:bodyPr wrap="square" lIns="0" tIns="0" rIns="0" bIns="0" rtlCol="0" anchor="t">
+            <a:normAutofit/>
+          </a:bodyPr>
+          <a:lstStyle/>
+          <a:p>
+            <a:pPr algn="l" indent="0" marL="0">
+              <a:lnSpc>
+                <a:spcPts val="1680"/>
+              </a:lnSpc>
+              <a:buNone/>
+            </a:pPr>
+            <a:r>
+              <a:rPr lang="en-US" sz="1200" b="1" dirty="0">
+                <a:solidFill>
+                  <a:srgbClr val="233441"/>
+                </a:solidFill>
+                <a:latin typeface="Arial" pitchFamily="34" charset="0"/>
+                <a:ea typeface="Arial" pitchFamily="34" charset="-122"/>
+                <a:cs typeface="Arial" pitchFamily="34" charset="-120"/>
+              </a:rPr>
+              <a:t>↑ Calidad narrativa: se lee de principio a fin</a:t>
+            </a:r>
+            <a:endParaRPr lang="en-US" sz="1200" dirty="0"/>
+          </a:p>
+        </p:txBody>
+      </p:sp>
+    </p:spTree>
+  </p:cSld>
+  <p:clrMapOvr>
+    <a:masterClrMapping/>
+  </p:clrMapOvr>
+</p:sld>
+</file>
+
+<file path=ppt/slides/slide20.xml><?xml version="1.0" encoding="utf-8"?>
+<p:sld xmlns:a="http://schemas.openxmlformats.org/drawingml/2006/main" xmlns:r="http://schemas.openxmlformats.org/officeDocument/2006/relationships" xmlns:p="http://schemas.openxmlformats.org/presentationml/2006/main">
+  <p:cSld name="Slide 20">
     <p:bg>
       <p:bgPr>
         <a:solidFill>
@@ -13051,783 +16435,9 @@
 </p:sld>
 </file>
 
-<file path=ppt/slides/slide2.xml><?xml version="1.0" encoding="utf-8"?>
+<file path=ppt/slides/slide21.xml><?xml version="1.0" encoding="utf-8"?>
 <p:sld xmlns:a="http://schemas.openxmlformats.org/drawingml/2006/main" xmlns:r="http://schemas.openxmlformats.org/officeDocument/2006/relationships" xmlns:p="http://schemas.openxmlformats.org/presentationml/2006/main">
-  <p:cSld name="Slide 2">
-    <p:bg>
-      <p:bgPr>
-        <a:solidFill>
-          <a:srgbClr val="FFFFFF"/>
-        </a:solidFill>
-      </p:bgPr>
-    </p:bg>
-    <p:spTree>
-      <p:nvGrpSpPr>
-        <p:cNvPr id="1" name=""/>
-        <p:cNvGrpSpPr/>
-        <p:nvPr/>
-      </p:nvGrpSpPr>
-      <p:grpSpPr>
-        <a:xfrm>
-          <a:off x="0" y="0"/>
-          <a:ext cx="0" cy="0"/>
-          <a:chOff x="0" y="0"/>
-          <a:chExt cx="0" cy="0"/>
-        </a:xfrm>
-      </p:grpSpPr>
-      <p:sp>
-        <p:nvSpPr>
-          <p:cNvPr id="2" name="Text 0"/>
-          <p:cNvSpPr/>
-          <p:nvPr/>
-        </p:nvSpPr>
-        <p:spPr>
-          <a:xfrm>
-            <a:off x="971550" y="711200"/>
-            <a:ext cx="10556367" cy="238720"/>
-          </a:xfrm>
-          <a:prstGeom prst="rect">
-            <a:avLst/>
-          </a:prstGeom>
-          <a:noFill/>
-          <a:ln/>
-        </p:spPr>
-        <p:txBody>
-          <a:bodyPr wrap="square" lIns="0" tIns="0" rIns="0" bIns="0" rtlCol="0" anchor="t">
-            <a:normAutofit/>
-          </a:bodyPr>
-          <a:lstStyle/>
-          <a:p>
-            <a:pPr algn="l" indent="0" marL="0">
-              <a:lnSpc>
-                <a:spcPts val="1680"/>
-              </a:lnSpc>
-              <a:buNone/>
-            </a:pPr>
-            <a:r>
-              <a:rPr lang="en-US" sz="1200" b="1" spc="150" kern="0" dirty="0">
-                <a:solidFill>
-                  <a:srgbClr val="FF7932"/>
-                </a:solidFill>
-                <a:latin typeface="Arial" pitchFamily="34" charset="0"/>
-                <a:ea typeface="Arial" pitchFamily="34" charset="-122"/>
-                <a:cs typeface="Arial" pitchFamily="34" charset="-120"/>
-              </a:rPr>
-              <a:t>01 · EL PROBLEMA Y EL CLIENTE</a:t>
-            </a:r>
-            <a:endParaRPr lang="en-US" sz="1200" dirty="0"/>
-          </a:p>
-        </p:txBody>
-      </p:sp>
-      <p:sp>
-        <p:nvSpPr>
-          <p:cNvPr id="3" name="Text 1"/>
-          <p:cNvSpPr/>
-          <p:nvPr/>
-        </p:nvSpPr>
-        <p:spPr>
-          <a:xfrm>
-            <a:off x="971550" y="975320"/>
-            <a:ext cx="10556367" cy="388607"/>
-          </a:xfrm>
-          <a:prstGeom prst="rect">
-            <a:avLst/>
-          </a:prstGeom>
-          <a:noFill/>
-          <a:ln/>
-        </p:spPr>
-        <p:txBody>
-          <a:bodyPr wrap="square" lIns="0" tIns="0" rIns="0" bIns="0" rtlCol="0" anchor="t">
-            <a:normAutofit/>
-          </a:bodyPr>
-          <a:lstStyle/>
-          <a:p>
-            <a:pPr algn="l" indent="0" marL="0">
-              <a:lnSpc>
-                <a:spcPts val="2860"/>
-              </a:lnSpc>
-              <a:buNone/>
-            </a:pPr>
-            <a:r>
-              <a:rPr lang="en-US" sz="2600" b="1" spc="-50" kern="0" dirty="0">
-                <a:solidFill>
-                  <a:srgbClr val="233441"/>
-                </a:solidFill>
-                <a:latin typeface="Arial" pitchFamily="34" charset="0"/>
-                <a:ea typeface="Arial" pitchFamily="34" charset="-122"/>
-                <a:cs typeface="Arial" pitchFamily="34" charset="-120"/>
-              </a:rPr>
-              <a:t>Un regalo que tiene que ser suyo, y además leerse bien</a:t>
-            </a:r>
-            <a:endParaRPr lang="en-US" sz="2600" dirty="0"/>
-          </a:p>
-        </p:txBody>
-      </p:sp>
-      <p:sp>
-        <p:nvSpPr>
-          <p:cNvPr id="4" name="Shape 2"/>
-          <p:cNvSpPr/>
-          <p:nvPr/>
-        </p:nvSpPr>
-        <p:spPr>
-          <a:xfrm>
-            <a:off x="971550" y="1592528"/>
-            <a:ext cx="3314700" cy="1765168"/>
-          </a:xfrm>
-          <a:prstGeom prst="roundRect">
-            <a:avLst>
-              <a:gd name="adj" fmla="val 5036"/>
-            </a:avLst>
-          </a:prstGeom>
-          <a:solidFill>
-            <a:srgbClr val="F5F5F5"/>
-          </a:solidFill>
-          <a:ln/>
-        </p:spPr>
-      </p:sp>
-      <p:sp>
-        <p:nvSpPr>
-          <p:cNvPr id="5" name="Shape 3"/>
-          <p:cNvSpPr/>
-          <p:nvPr/>
-        </p:nvSpPr>
-        <p:spPr>
-          <a:xfrm>
-            <a:off x="971550" y="1592528"/>
-            <a:ext cx="3314700" cy="1765168"/>
-          </a:xfrm>
-          <a:custGeom>
-            <a:avLst/>
-            <a:gdLst/>
-            <a:ahLst/>
-            <a:cxnLst/>
-            <a:rect l="l" t="t" r="r" b="b"/>
-            <a:pathLst>
-              <a:path w="3314700" h="1765168">
-                <a:moveTo>
-                  <a:pt x="0" y="88900"/>
-                </a:moveTo>
-                <a:lnTo>
-                  <a:pt x="0" y="88900"/>
-                </a:lnTo>
-                <a:arcTo hR="88900" wR="88900" stAng="10800000" swAng="5400000"/>
-                <a:lnTo>
-                  <a:pt x="3225800" y="0"/>
-                </a:lnTo>
-                <a:arcTo hR="88900" wR="88900" stAng="16200000" swAng="5400000"/>
-                <a:lnTo>
-                  <a:pt x="3314700" y="88900"/>
-                </a:lnTo>
-                <a:arcTo hR="25400" wR="88900" stAng="0" swAng="-5400000"/>
-                <a:lnTo>
-                  <a:pt x="88900" y="63500"/>
-                </a:lnTo>
-                <a:arcTo hR="25400" wR="88900" stAng="16200000" swAng="-5400000"/>
-                <a:close/>
-              </a:path>
-            </a:pathLst>
-          </a:custGeom>
-          <a:solidFill>
-            <a:srgbClr val="F4631E"/>
-          </a:solidFill>
-          <a:ln/>
-        </p:spPr>
-      </p:sp>
-      <p:sp>
-        <p:nvSpPr>
-          <p:cNvPr id="6" name="Text 4"/>
-          <p:cNvSpPr/>
-          <p:nvPr/>
-        </p:nvSpPr>
-        <p:spPr>
-          <a:xfrm>
-            <a:off x="1200150" y="1884628"/>
-            <a:ext cx="2943225" cy="269214"/>
-          </a:xfrm>
-          <a:prstGeom prst="rect">
-            <a:avLst/>
-          </a:prstGeom>
-          <a:noFill/>
-          <a:ln/>
-        </p:spPr>
-        <p:txBody>
-          <a:bodyPr wrap="square" lIns="0" tIns="0" rIns="0" bIns="0" rtlCol="0" anchor="t">
-            <a:normAutofit/>
-          </a:bodyPr>
-          <a:lstStyle/>
-          <a:p>
-            <a:pPr algn="l" indent="0" marL="0">
-              <a:lnSpc>
-                <a:spcPts val="1920"/>
-              </a:lnSpc>
-              <a:buNone/>
-            </a:pPr>
-            <a:r>
-              <a:rPr lang="en-US" sz="1600" b="1" dirty="0">
-                <a:solidFill>
-                  <a:srgbClr val="1E2D3D"/>
-                </a:solidFill>
-                <a:latin typeface="Arial" pitchFamily="34" charset="0"/>
-                <a:ea typeface="Arial" pitchFamily="34" charset="-122"/>
-                <a:cs typeface="Arial" pitchFamily="34" charset="-120"/>
-              </a:rPr>
-              <a:t>Quién compra</a:t>
-            </a:r>
-            <a:endParaRPr lang="en-US" sz="1600" dirty="0"/>
-          </a:p>
-        </p:txBody>
-      </p:sp>
-      <p:sp>
-        <p:nvSpPr>
-          <p:cNvPr id="7" name="Text 5"/>
-          <p:cNvSpPr/>
-          <p:nvPr/>
-        </p:nvSpPr>
-        <p:spPr>
-          <a:xfrm>
-            <a:off x="1200150" y="2204641"/>
-            <a:ext cx="2943225" cy="718741"/>
-          </a:xfrm>
-          <a:prstGeom prst="rect">
-            <a:avLst/>
-          </a:prstGeom>
-          <a:noFill/>
-          <a:ln/>
-        </p:spPr>
-        <p:txBody>
-          <a:bodyPr wrap="square" lIns="0" tIns="0" rIns="0" bIns="0" rtlCol="0" anchor="t">
-            <a:normAutofit/>
-          </a:bodyPr>
-          <a:lstStyle/>
-          <a:p>
-            <a:pPr algn="l" indent="0" marL="0">
-              <a:lnSpc>
-                <a:spcPts val="1820"/>
-              </a:lnSpc>
-              <a:buNone/>
-            </a:pPr>
-            <a:r>
-              <a:rPr lang="en-US" sz="1300" dirty="0">
-                <a:solidFill>
-                  <a:srgbClr val="3C4645"/>
-                </a:solidFill>
-                <a:latin typeface="Arial" pitchFamily="34" charset="0"/>
-                <a:ea typeface="Arial" pitchFamily="34" charset="-122"/>
-                <a:cs typeface="Arial" pitchFamily="34" charset="-120"/>
-              </a:rPr>
-              <a:t>Quien regala: a un hijo, a la pareja, en una boda, un aniversario o una jubilación.</a:t>
-            </a:r>
-            <a:endParaRPr lang="en-US" sz="1300" dirty="0"/>
-          </a:p>
-        </p:txBody>
-      </p:sp>
-      <p:sp>
-        <p:nvSpPr>
-          <p:cNvPr id="8" name="Shape 6"/>
-          <p:cNvSpPr/>
-          <p:nvPr/>
-        </p:nvSpPr>
-        <p:spPr>
-          <a:xfrm>
-            <a:off x="4438650" y="1592528"/>
-            <a:ext cx="3314700" cy="1765168"/>
-          </a:xfrm>
-          <a:prstGeom prst="roundRect">
-            <a:avLst>
-              <a:gd name="adj" fmla="val 5036"/>
-            </a:avLst>
-          </a:prstGeom>
-          <a:solidFill>
-            <a:srgbClr val="F5F5F5"/>
-          </a:solidFill>
-          <a:ln/>
-        </p:spPr>
-      </p:sp>
-      <p:sp>
-        <p:nvSpPr>
-          <p:cNvPr id="9" name="Shape 7"/>
-          <p:cNvSpPr/>
-          <p:nvPr/>
-        </p:nvSpPr>
-        <p:spPr>
-          <a:xfrm>
-            <a:off x="4438650" y="1592528"/>
-            <a:ext cx="3314700" cy="1765168"/>
-          </a:xfrm>
-          <a:custGeom>
-            <a:avLst/>
-            <a:gdLst/>
-            <a:ahLst/>
-            <a:cxnLst/>
-            <a:rect l="l" t="t" r="r" b="b"/>
-            <a:pathLst>
-              <a:path w="3314700" h="1765168">
-                <a:moveTo>
-                  <a:pt x="0" y="88900"/>
-                </a:moveTo>
-                <a:lnTo>
-                  <a:pt x="0" y="88900"/>
-                </a:lnTo>
-                <a:arcTo hR="88900" wR="88900" stAng="10800000" swAng="5400000"/>
-                <a:lnTo>
-                  <a:pt x="3225800" y="0"/>
-                </a:lnTo>
-                <a:arcTo hR="88900" wR="88900" stAng="16200000" swAng="5400000"/>
-                <a:lnTo>
-                  <a:pt x="3314700" y="88900"/>
-                </a:lnTo>
-                <a:arcTo hR="25400" wR="88900" stAng="0" swAng="-5400000"/>
-                <a:lnTo>
-                  <a:pt x="88900" y="63500"/>
-                </a:lnTo>
-                <a:arcTo hR="25400" wR="88900" stAng="16200000" swAng="-5400000"/>
-                <a:close/>
-              </a:path>
-            </a:pathLst>
-          </a:custGeom>
-          <a:solidFill>
-            <a:srgbClr val="F4631E"/>
-          </a:solidFill>
-          <a:ln/>
-        </p:spPr>
-      </p:sp>
-      <p:sp>
-        <p:nvSpPr>
-          <p:cNvPr id="10" name="Text 8"/>
-          <p:cNvSpPr/>
-          <p:nvPr/>
-        </p:nvSpPr>
-        <p:spPr>
-          <a:xfrm>
-            <a:off x="4667250" y="1884628"/>
-            <a:ext cx="2943225" cy="269214"/>
-          </a:xfrm>
-          <a:prstGeom prst="rect">
-            <a:avLst/>
-          </a:prstGeom>
-          <a:noFill/>
-          <a:ln/>
-        </p:spPr>
-        <p:txBody>
-          <a:bodyPr wrap="square" lIns="0" tIns="0" rIns="0" bIns="0" rtlCol="0" anchor="t">
-            <a:normAutofit/>
-          </a:bodyPr>
-          <a:lstStyle/>
-          <a:p>
-            <a:pPr algn="l" indent="0" marL="0">
-              <a:lnSpc>
-                <a:spcPts val="1920"/>
-              </a:lnSpc>
-              <a:buNone/>
-            </a:pPr>
-            <a:r>
-              <a:rPr lang="en-US" sz="1600" b="1" dirty="0">
-                <a:solidFill>
-                  <a:srgbClr val="1E2D3D"/>
-                </a:solidFill>
-                <a:latin typeface="Arial" pitchFamily="34" charset="0"/>
-                <a:ea typeface="Arial" pitchFamily="34" charset="-122"/>
-                <a:cs typeface="Arial" pitchFamily="34" charset="-120"/>
-              </a:rPr>
-              <a:t>Qué necesita</a:t>
-            </a:r>
-            <a:endParaRPr lang="en-US" sz="1600" dirty="0"/>
-          </a:p>
-        </p:txBody>
-      </p:sp>
-      <p:sp>
-        <p:nvSpPr>
-          <p:cNvPr id="11" name="Text 9"/>
-          <p:cNvSpPr/>
-          <p:nvPr/>
-        </p:nvSpPr>
-        <p:spPr>
-          <a:xfrm>
-            <a:off x="4667250" y="2204641"/>
-            <a:ext cx="2943225" cy="718741"/>
-          </a:xfrm>
-          <a:prstGeom prst="rect">
-            <a:avLst/>
-          </a:prstGeom>
-          <a:noFill/>
-          <a:ln/>
-        </p:spPr>
-        <p:txBody>
-          <a:bodyPr wrap="square" lIns="0" tIns="0" rIns="0" bIns="0" rtlCol="0" anchor="t">
-            <a:normAutofit/>
-          </a:bodyPr>
-          <a:lstStyle/>
-          <a:p>
-            <a:pPr algn="l" indent="0" marL="0">
-              <a:lnSpc>
-                <a:spcPts val="1820"/>
-              </a:lnSpc>
-              <a:buNone/>
-            </a:pPr>
-            <a:r>
-              <a:rPr lang="en-US" sz="1300" dirty="0">
-                <a:solidFill>
-                  <a:srgbClr val="3C4645"/>
-                </a:solidFill>
-                <a:latin typeface="Arial" pitchFamily="34" charset="0"/>
-                <a:ea typeface="Arial" pitchFamily="34" charset="-122"/>
-                <a:cs typeface="Arial" pitchFamily="34" charset="-120"/>
-              </a:rPr>
-              <a:t>Que el destinatario </a:t>
-            </a:r>
-            <a:r>
-              <a:rPr lang="en-US" sz="1300" b="1" dirty="0">
-                <a:solidFill>
-                  <a:srgbClr val="3C4645"/>
-                </a:solidFill>
-                <a:latin typeface="Arial" pitchFamily="34" charset="0"/>
-                <a:ea typeface="Arial" pitchFamily="34" charset="-122"/>
-                <a:cs typeface="Arial" pitchFamily="34" charset="-120"/>
-              </a:rPr>
-              <a:t>se reconozca</a:t>
-            </a:r>
-            <a:r>
-              <a:rPr lang="en-US" sz="1300" dirty="0">
-                <a:solidFill>
-                  <a:srgbClr val="3C4645"/>
-                </a:solidFill>
-                <a:latin typeface="Arial" pitchFamily="34" charset="0"/>
-                <a:ea typeface="Arial" pitchFamily="34" charset="-122"/>
-                <a:cs typeface="Arial" pitchFamily="34" charset="-120"/>
-              </a:rPr>
-              <a:t> y que la novela </a:t>
-            </a:r>
-            <a:r>
-              <a:rPr lang="en-US" sz="1300" b="1" dirty="0">
-                <a:solidFill>
-                  <a:srgbClr val="3C4645"/>
-                </a:solidFill>
-                <a:latin typeface="Arial" pitchFamily="34" charset="0"/>
-                <a:ea typeface="Arial" pitchFamily="34" charset="-122"/>
-                <a:cs typeface="Arial" pitchFamily="34" charset="-120"/>
-              </a:rPr>
-              <a:t>se lea de principio a fin</a:t>
-            </a:r>
-            <a:r>
-              <a:rPr lang="en-US" sz="1300" dirty="0">
-                <a:solidFill>
-                  <a:srgbClr val="3C4645"/>
-                </a:solidFill>
-                <a:latin typeface="Arial" pitchFamily="34" charset="0"/>
-                <a:ea typeface="Arial" pitchFamily="34" charset="-122"/>
-                <a:cs typeface="Arial" pitchFamily="34" charset="-120"/>
-              </a:rPr>
-              <a:t> sin tropezar.</a:t>
-            </a:r>
-            <a:endParaRPr lang="en-US" sz="1300" dirty="0"/>
-          </a:p>
-        </p:txBody>
-      </p:sp>
-      <p:sp>
-        <p:nvSpPr>
-          <p:cNvPr id="12" name="Shape 10"/>
-          <p:cNvSpPr/>
-          <p:nvPr/>
-        </p:nvSpPr>
-        <p:spPr>
-          <a:xfrm>
-            <a:off x="7905750" y="1592528"/>
-            <a:ext cx="3314700" cy="1765168"/>
-          </a:xfrm>
-          <a:prstGeom prst="roundRect">
-            <a:avLst>
-              <a:gd name="adj" fmla="val 5036"/>
-            </a:avLst>
-          </a:prstGeom>
-          <a:solidFill>
-            <a:srgbClr val="F5F5F5"/>
-          </a:solidFill>
-          <a:ln/>
-        </p:spPr>
-      </p:sp>
-      <p:sp>
-        <p:nvSpPr>
-          <p:cNvPr id="13" name="Shape 11"/>
-          <p:cNvSpPr/>
-          <p:nvPr/>
-        </p:nvSpPr>
-        <p:spPr>
-          <a:xfrm>
-            <a:off x="7905750" y="1592528"/>
-            <a:ext cx="3314700" cy="1765168"/>
-          </a:xfrm>
-          <a:custGeom>
-            <a:avLst/>
-            <a:gdLst/>
-            <a:ahLst/>
-            <a:cxnLst/>
-            <a:rect l="l" t="t" r="r" b="b"/>
-            <a:pathLst>
-              <a:path w="3314700" h="1765168">
-                <a:moveTo>
-                  <a:pt x="0" y="88900"/>
-                </a:moveTo>
-                <a:lnTo>
-                  <a:pt x="0" y="88900"/>
-                </a:lnTo>
-                <a:arcTo hR="88900" wR="88900" stAng="10800000" swAng="5400000"/>
-                <a:lnTo>
-                  <a:pt x="3225800" y="0"/>
-                </a:lnTo>
-                <a:arcTo hR="88900" wR="88900" stAng="16200000" swAng="5400000"/>
-                <a:lnTo>
-                  <a:pt x="3314700" y="88900"/>
-                </a:lnTo>
-                <a:arcTo hR="25400" wR="88900" stAng="0" swAng="-5400000"/>
-                <a:lnTo>
-                  <a:pt x="88900" y="63500"/>
-                </a:lnTo>
-                <a:arcTo hR="25400" wR="88900" stAng="16200000" swAng="-5400000"/>
-                <a:close/>
-              </a:path>
-            </a:pathLst>
-          </a:custGeom>
-          <a:solidFill>
-            <a:srgbClr val="F4631E"/>
-          </a:solidFill>
-          <a:ln/>
-        </p:spPr>
-      </p:sp>
-      <p:sp>
-        <p:nvSpPr>
-          <p:cNvPr id="14" name="Text 12"/>
-          <p:cNvSpPr/>
-          <p:nvPr/>
-        </p:nvSpPr>
-        <p:spPr>
-          <a:xfrm>
-            <a:off x="8134350" y="1884628"/>
-            <a:ext cx="2943225" cy="269214"/>
-          </a:xfrm>
-          <a:prstGeom prst="rect">
-            <a:avLst/>
-          </a:prstGeom>
-          <a:noFill/>
-          <a:ln/>
-        </p:spPr>
-        <p:txBody>
-          <a:bodyPr wrap="square" lIns="0" tIns="0" rIns="0" bIns="0" rtlCol="0" anchor="t">
-            <a:normAutofit/>
-          </a:bodyPr>
-          <a:lstStyle/>
-          <a:p>
-            <a:pPr algn="l" indent="0" marL="0">
-              <a:lnSpc>
-                <a:spcPts val="1920"/>
-              </a:lnSpc>
-              <a:buNone/>
-            </a:pPr>
-            <a:r>
-              <a:rPr lang="en-US" sz="1600" b="1" dirty="0">
-                <a:solidFill>
-                  <a:srgbClr val="1E2D3D"/>
-                </a:solidFill>
-                <a:latin typeface="Arial" pitchFamily="34" charset="0"/>
-                <a:ea typeface="Arial" pitchFamily="34" charset="-122"/>
-                <a:cs typeface="Arial" pitchFamily="34" charset="-120"/>
-              </a:rPr>
-              <a:t>Por qué fallan hoy</a:t>
-            </a:r>
-            <a:endParaRPr lang="en-US" sz="1600" dirty="0"/>
-          </a:p>
-        </p:txBody>
-      </p:sp>
-      <p:sp>
-        <p:nvSpPr>
-          <p:cNvPr id="15" name="Text 13"/>
-          <p:cNvSpPr/>
-          <p:nvPr/>
-        </p:nvSpPr>
-        <p:spPr>
-          <a:xfrm>
-            <a:off x="8134350" y="2204641"/>
-            <a:ext cx="2943225" cy="949854"/>
-          </a:xfrm>
-          <a:prstGeom prst="rect">
-            <a:avLst/>
-          </a:prstGeom>
-          <a:noFill/>
-          <a:ln/>
-        </p:spPr>
-        <p:txBody>
-          <a:bodyPr wrap="square" lIns="0" tIns="0" rIns="0" bIns="0" rtlCol="0" anchor="t">
-            <a:normAutofit/>
-          </a:bodyPr>
-          <a:lstStyle/>
-          <a:p>
-            <a:pPr algn="l" indent="0" marL="0">
-              <a:lnSpc>
-                <a:spcPts val="1820"/>
-              </a:lnSpc>
-              <a:buNone/>
-            </a:pPr>
-            <a:r>
-              <a:rPr lang="en-US" sz="1300" dirty="0">
-                <a:solidFill>
-                  <a:srgbClr val="3C4645"/>
-                </a:solidFill>
-                <a:latin typeface="Arial" pitchFamily="34" charset="0"/>
-                <a:ea typeface="Arial" pitchFamily="34" charset="-122"/>
-                <a:cs typeface="Arial" pitchFamily="34" charset="-120"/>
-              </a:rPr>
-              <a:t>Plantillas con el nombre cambiado; escritores a medida caros y lentos; un chatbot sin memoria que se contradice.</a:t>
-            </a:r>
-            <a:endParaRPr lang="en-US" sz="1300" dirty="0"/>
-          </a:p>
-        </p:txBody>
-      </p:sp>
-      <p:sp>
-        <p:nvSpPr>
-          <p:cNvPr id="16" name="Shape 14"/>
-          <p:cNvSpPr/>
-          <p:nvPr/>
-        </p:nvSpPr>
-        <p:spPr>
-          <a:xfrm>
-            <a:off x="977900" y="3618045"/>
-            <a:ext cx="10236200" cy="901700"/>
-          </a:xfrm>
-          <a:prstGeom prst="roundRect">
-            <a:avLst>
-              <a:gd name="adj" fmla="val 9155"/>
-            </a:avLst>
-          </a:prstGeom>
-          <a:noFill/>
-          <a:ln w="12700">
-            <a:solidFill>
-              <a:srgbClr val="F87936"/>
-            </a:solidFill>
-            <a:prstDash val="solid"/>
-          </a:ln>
-        </p:spPr>
-      </p:sp>
-      <p:sp>
-        <p:nvSpPr>
-          <p:cNvPr id="17" name="Text 15"/>
-          <p:cNvSpPr/>
-          <p:nvPr/>
-        </p:nvSpPr>
-        <p:spPr>
-          <a:xfrm>
-            <a:off x="1092518" y="3802195"/>
-            <a:ext cx="10006965" cy="558800"/>
-          </a:xfrm>
-          <a:prstGeom prst="rect">
-            <a:avLst/>
-          </a:prstGeom>
-          <a:noFill/>
-          <a:ln/>
-        </p:spPr>
-        <p:txBody>
-          <a:bodyPr wrap="square" lIns="0" tIns="0" rIns="0" bIns="0" rtlCol="0" anchor="t">
-            <a:normAutofit/>
-          </a:bodyPr>
-          <a:lstStyle/>
-          <a:p>
-            <a:pPr algn="ctr" indent="0" marL="0">
-              <a:lnSpc>
-                <a:spcPts val="2100"/>
-              </a:lnSpc>
-              <a:buNone/>
-            </a:pPr>
-            <a:r>
-              <a:rPr lang="en-US" sz="1500" b="1" dirty="0">
-                <a:solidFill>
-                  <a:srgbClr val="F4631E"/>
-                </a:solidFill>
-                <a:latin typeface="Arial" pitchFamily="34" charset="0"/>
-                <a:ea typeface="Arial" pitchFamily="34" charset="-122"/>
-                <a:cs typeface="Arial" pitchFamily="34" charset="-120"/>
-              </a:rPr>
-              <a:t>StoryMaker: 10 capítulos, unas 12.000 palabras, con los datos del destinatario y validadores que no dejan publicar una historia rota.</a:t>
-            </a:r>
-            <a:endParaRPr lang="en-US" sz="1500" dirty="0"/>
-          </a:p>
-        </p:txBody>
-      </p:sp>
-      <p:pic>
-        <p:nvPicPr>
-          <p:cNvPr id="18" name="Image 0" descr="preencoded.png">    </p:cNvPr>
-          <p:cNvPicPr>
-            <a:picLocks noChangeAspect="1"/>
-          </p:cNvPicPr>
-          <p:nvPr/>
-        </p:nvPicPr>
-        <p:blipFill>
-          <a:blip r:embed="rId1"/>
-          <a:srcRect l="0" r="0" t="-7895" b="-7895"/>
-          <a:stretch/>
-        </p:blipFill>
-        <p:spPr>
-          <a:xfrm>
-            <a:off x="11049000" y="609600"/>
-            <a:ext cx="361950" cy="419100"/>
-          </a:xfrm>
-          <a:prstGeom prst="rect">
-            <a:avLst/>
-          </a:prstGeom>
-        </p:spPr>
-      </p:pic>
-      <p:sp>
-        <p:nvSpPr>
-          <p:cNvPr id="19" name="Text 16"/>
-          <p:cNvSpPr/>
-          <p:nvPr/>
-        </p:nvSpPr>
-        <p:spPr>
-          <a:xfrm>
-            <a:off x="971550" y="6289080"/>
-            <a:ext cx="10556367" cy="238720"/>
-          </a:xfrm>
-          <a:prstGeom prst="rect">
-            <a:avLst/>
-          </a:prstGeom>
-          <a:noFill/>
-          <a:ln/>
-        </p:spPr>
-        <p:txBody>
-          <a:bodyPr wrap="square" lIns="0" tIns="0" rIns="0" bIns="0" rtlCol="0" anchor="t">
-            <a:normAutofit/>
-          </a:bodyPr>
-          <a:lstStyle/>
-          <a:p>
-            <a:pPr algn="l" indent="0" marL="0">
-              <a:lnSpc>
-                <a:spcPts val="1680"/>
-              </a:lnSpc>
-              <a:buNone/>
-            </a:pPr>
-            <a:r>
-              <a:rPr lang="en-US" sz="1200" i="1" dirty="0">
-                <a:solidFill>
-                  <a:srgbClr val="93A0AB"/>
-                </a:solidFill>
-                <a:latin typeface="Arial" pitchFamily="34" charset="0"/>
-                <a:ea typeface="Arial" pitchFamily="34" charset="-122"/>
-                <a:cs typeface="Arial" pitchFamily="34" charset="-120"/>
-              </a:rPr>
-              <a:t>© Qaracter group, all rights reserved 2026 · StoryMaker</a:t>
-            </a:r>
-            <a:endParaRPr lang="en-US" sz="1200" dirty="0"/>
-          </a:p>
-        </p:txBody>
-      </p:sp>
-    </p:spTree>
-  </p:cSld>
-  <p:clrMapOvr>
-    <a:masterClrMapping/>
-  </p:clrMapOvr>
-</p:sld>
-</file>
-
-<file path=ppt/slides/slide20.xml><?xml version="1.0" encoding="utf-8"?>
-<p:sld xmlns:a="http://schemas.openxmlformats.org/drawingml/2006/main" xmlns:r="http://schemas.openxmlformats.org/officeDocument/2006/relationships" xmlns:p="http://schemas.openxmlformats.org/presentationml/2006/main">
-  <p:cSld name="Slide 20">
+  <p:cSld name="Slide 21">
     <p:bg>
       <p:bgPr>
         <a:solidFill>
@@ -15076,9 +17686,9 @@
 </p:sld>
 </file>
 
-<file path=ppt/slides/slide21.xml><?xml version="1.0" encoding="utf-8"?>
+<file path=ppt/slides/slide22.xml><?xml version="1.0" encoding="utf-8"?>
 <p:sld xmlns:a="http://schemas.openxmlformats.org/drawingml/2006/main" xmlns:r="http://schemas.openxmlformats.org/officeDocument/2006/relationships" xmlns:p="http://schemas.openxmlformats.org/presentationml/2006/main">
-  <p:cSld name="Slide 21">
+  <p:cSld name="Slide 22">
     <p:bg>
       <p:bgPr>
         <a:solidFill>
@@ -16565,9 +19175,9 @@
 </p:sld>
 </file>
 
-<file path=ppt/slides/slide22.xml><?xml version="1.0" encoding="utf-8"?>
+<file path=ppt/slides/slide23.xml><?xml version="1.0" encoding="utf-8"?>
 <p:sld xmlns:a="http://schemas.openxmlformats.org/drawingml/2006/main" xmlns:r="http://schemas.openxmlformats.org/officeDocument/2006/relationships" xmlns:p="http://schemas.openxmlformats.org/presentationml/2006/main">
-  <p:cSld name="Slide 22">
+  <p:cSld name="Slide 23">
     <p:bg>
       <p:bgPr>
         <a:solidFill>
